--- a/presentacion/SOFIA_LabDST_Presentacion.pptx
+++ b/presentacion/SOFIA_LabDST_Presentacion.pptx
@@ -4,22 +4,19 @@
   <p:sldMasterIdLst>
     <p:sldMasterId id="2147483648" r:id="rId1"/>
   </p:sldMasterIdLst>
-  <p:notesMasterIdLst>
-    <p:notesMasterId r:id="rId12"/>
-  </p:notesMasterIdLst>
   <p:sldIdLst>
-    <p:sldId id="256" r:id="rId2"/>
-    <p:sldId id="257" r:id="rId3"/>
-    <p:sldId id="258" r:id="rId4"/>
-    <p:sldId id="259" r:id="rId5"/>
-    <p:sldId id="260" r:id="rId6"/>
-    <p:sldId id="261" r:id="rId7"/>
-    <p:sldId id="262" r:id="rId8"/>
-    <p:sldId id="263" r:id="rId9"/>
-    <p:sldId id="264" r:id="rId10"/>
-    <p:sldId id="265" r:id="rId11"/>
+    <p:sldId id="256" r:id="rId7"/>
+    <p:sldId id="257" r:id="rId9"/>
+    <p:sldId id="258" r:id="rId10"/>
+    <p:sldId id="259" r:id="rId11"/>
+    <p:sldId id="260" r:id="rId12"/>
+    <p:sldId id="261" r:id="rId13"/>
+    <p:sldId id="262" r:id="rId14"/>
+    <p:sldId id="263" r:id="rId15"/>
+    <p:sldId id="264" r:id="rId16"/>
+    <p:sldId id="265" r:id="rId17"/>
   </p:sldIdLst>
-  <p:sldSz cx="12192000" cy="6858000"/>
+  <p:sldSz cx="12191695" cy="6858000" type="screen4x3"/>
   <p:notesSz cx="6858000" cy="9144000"/>
   <p:defaultTextStyle>
     <a:defPPr>
@@ -116,27 +113,11 @@
       </a:defRPr>
     </a:lvl9pPr>
   </p:defaultTextStyle>
-  <p:extLst>
-    <p:ext uri="{EFAFB233-063F-42B5-8137-9DF3F51BA10A}">
-      <p15:sldGuideLst xmlns:p15="http://schemas.microsoft.com/office/powerpoint/2012/main">
-        <p15:guide id="1" orient="horz" pos="2160">
-          <p15:clr>
-            <a:srgbClr val="A4A3A4"/>
-          </p15:clr>
-        </p15:guide>
-        <p15:guide id="2" pos="2880">
-          <p15:clr>
-            <a:srgbClr val="A4A3A4"/>
-          </p15:clr>
-        </p15:guide>
-      </p15:sldGuideLst>
-    </p:ext>
-  </p:extLst>
 </p:presentation>
 </file>
 
 <file path=ppt/notesMasters/notesMaster1.xml><?xml version="1.0" encoding="utf-8"?>
-<p:notesMaster xmlns:a="http://schemas.openxmlformats.org/drawingml/2006/main" xmlns:r="http://schemas.openxmlformats.org/officeDocument/2006/relationships" xmlns:p="http://schemas.openxmlformats.org/presentationml/2006/main">
+<p:notesMaster xmlns:a="http://schemas.openxmlformats.org/drawingml/2006/main" xmlns:p="http://schemas.openxmlformats.org/presentationml/2006/main" xmlns:r="http://schemas.openxmlformats.org/officeDocument/2006/relationships">
   <p:cSld>
     <p:bg>
       <p:bgRef idx="1001">
@@ -157,16 +138,241 @@
           <a:chExt cx="0" cy="0"/>
         </a:xfrm>
       </p:grpSpPr>
+      <p:sp>
+        <p:nvSpPr>
+          <p:cNvPr id="2" name="Header Placeholder 1"/>
+          <p:cNvSpPr>
+            <a:spLocks noGrp="1"/>
+          </p:cNvSpPr>
+          <p:nvPr>
+            <p:ph type="hdr" sz="quarter"/>
+          </p:nvPr>
+        </p:nvSpPr>
+        <p:spPr>
+          <a:xfrm>
+            <a:off x="0" y="0"/>
+            <a:ext cx="2971800" cy="457200"/>
+          </a:xfrm>
+          <a:prstGeom prst="rect">
+            <a:avLst/>
+          </a:prstGeom>
+        </p:spPr>
+        <p:txBody>
+          <a:bodyPr vert="horz" lIns="91440" tIns="45720" rIns="91440" bIns="45720" rtlCol="0"/>
+          <a:lstStyle>
+            <a:lvl1pPr algn="l">
+              <a:defRPr sz="1200"/>
+            </a:lvl1pPr>
+          </a:lstStyle>
+          <a:p>
+            <a:endParaRPr lang="en-US"/>
+          </a:p>
+        </p:txBody>
+      </p:sp>
+      <p:sp>
+        <p:nvSpPr>
+          <p:cNvPr id="3" name="Date Placeholder 2"/>
+          <p:cNvSpPr>
+            <a:spLocks noGrp="1"/>
+          </p:cNvSpPr>
+          <p:nvPr>
+            <p:ph type="dt" idx="1"/>
+          </p:nvPr>
+        </p:nvSpPr>
+        <p:spPr>
+          <a:xfrm>
+            <a:off x="3884613" y="0"/>
+            <a:ext cx="2971800" cy="457200"/>
+          </a:xfrm>
+          <a:prstGeom prst="rect">
+            <a:avLst/>
+          </a:prstGeom>
+        </p:spPr>
+        <p:txBody>
+          <a:bodyPr vert="horz" lIns="91440" tIns="45720" rIns="91440" bIns="45720" rtlCol="0"/>
+          <a:lstStyle>
+            <a:lvl1pPr algn="r">
+              <a:defRPr sz="1200"/>
+            </a:lvl1pPr>
+          </a:lstStyle>
+          <a:p>
+            <a:fld id="{0F89C1C7-3DCD-1040-A9CF-14679D8B5DDD}" type="datetimeFigureOut">
+              <a:rPr lang="en-US" smtClean="0"/>
+              <a:t>10/17/16</a:t>
+            </a:fld>
+            <a:endParaRPr lang="en-US"/>
+          </a:p>
+        </p:txBody>
+      </p:sp>
+      <p:sp>
+        <p:nvSpPr>
+          <p:cNvPr id="4" name="Slide Image Placeholder 3"/>
+          <p:cNvSpPr>
+            <a:spLocks noGrp="1" noRot="1" noChangeAspect="1"/>
+          </p:cNvSpPr>
+          <p:nvPr>
+            <p:ph type="sldImg" idx="2"/>
+          </p:nvPr>
+        </p:nvSpPr>
+        <p:spPr>
+          <a:xfrm>
+            <a:off x="1143000" y="685800"/>
+            <a:ext cx="4572000" cy="3429000"/>
+          </a:xfrm>
+          <a:prstGeom prst="rect">
+            <a:avLst/>
+          </a:prstGeom>
+          <a:noFill/>
+          <a:ln w="12700">
+            <a:solidFill>
+              <a:prstClr val="black"/>
+            </a:solidFill>
+          </a:ln>
+        </p:spPr>
+        <p:txBody>
+          <a:bodyPr vert="horz" lIns="91440" tIns="45720" rIns="91440" bIns="45720" rtlCol="0" anchor="ctr"/>
+          <a:lstStyle/>
+          <a:p>
+            <a:endParaRPr lang="en-US"/>
+          </a:p>
+        </p:txBody>
+      </p:sp>
+      <p:sp>
+        <p:nvSpPr>
+          <p:cNvPr id="5" name="Notes Placeholder 4"/>
+          <p:cNvSpPr>
+            <a:spLocks noGrp="1"/>
+          </p:cNvSpPr>
+          <p:nvPr>
+            <p:ph type="body" sz="quarter" idx="3"/>
+          </p:nvPr>
+        </p:nvSpPr>
+        <p:spPr>
+          <a:xfrm>
+            <a:off x="685800" y="4343400"/>
+            <a:ext cx="5486400" cy="4114800"/>
+          </a:xfrm>
+          <a:prstGeom prst="rect">
+            <a:avLst/>
+          </a:prstGeom>
+        </p:spPr>
+        <p:txBody>
+          <a:bodyPr vert="horz" lIns="91440" tIns="45720" rIns="91440" bIns="45720" rtlCol="0"/>
+          <a:lstStyle/>
+          <a:p>
+            <a:pPr lvl="0"/>
+            <a:r>
+              <a:rPr lang="en-US" smtClean="0"/>
+              <a:t>Click to edit Master text styles</a:t>
+            </a:r>
+          </a:p>
+          <a:p>
+            <a:pPr lvl="1"/>
+            <a:r>
+              <a:rPr lang="en-US" smtClean="0"/>
+              <a:t>Second level</a:t>
+            </a:r>
+          </a:p>
+          <a:p>
+            <a:pPr lvl="2"/>
+            <a:r>
+              <a:rPr lang="en-US" smtClean="0"/>
+              <a:t>Third level</a:t>
+            </a:r>
+          </a:p>
+          <a:p>
+            <a:pPr lvl="3"/>
+            <a:r>
+              <a:rPr lang="en-US" smtClean="0"/>
+              <a:t>Fourth level</a:t>
+            </a:r>
+          </a:p>
+          <a:p>
+            <a:pPr lvl="4"/>
+            <a:r>
+              <a:rPr lang="en-US" smtClean="0"/>
+              <a:t>Fifth level</a:t>
+            </a:r>
+            <a:endParaRPr lang="en-US"/>
+          </a:p>
+        </p:txBody>
+      </p:sp>
+      <p:sp>
+        <p:nvSpPr>
+          <p:cNvPr id="6" name="Footer Placeholder 5"/>
+          <p:cNvSpPr>
+            <a:spLocks noGrp="1"/>
+          </p:cNvSpPr>
+          <p:nvPr>
+            <p:ph type="ftr" sz="quarter" idx="4"/>
+          </p:nvPr>
+        </p:nvSpPr>
+        <p:spPr>
+          <a:xfrm>
+            <a:off x="0" y="8685213"/>
+            <a:ext cx="2971800" cy="457200"/>
+          </a:xfrm>
+          <a:prstGeom prst="rect">
+            <a:avLst/>
+          </a:prstGeom>
+        </p:spPr>
+        <p:txBody>
+          <a:bodyPr vert="horz" lIns="91440" tIns="45720" rIns="91440" bIns="45720" rtlCol="0" anchor="b"/>
+          <a:lstStyle>
+            <a:lvl1pPr algn="l">
+              <a:defRPr sz="1200"/>
+            </a:lvl1pPr>
+          </a:lstStyle>
+          <a:p>
+            <a:endParaRPr lang="en-US"/>
+          </a:p>
+        </p:txBody>
+      </p:sp>
+      <p:sp>
+        <p:nvSpPr>
+          <p:cNvPr id="7" name="Slide Number Placeholder 6"/>
+          <p:cNvSpPr>
+            <a:spLocks noGrp="1"/>
+          </p:cNvSpPr>
+          <p:nvPr>
+            <p:ph type="sldNum" sz="quarter" idx="5"/>
+          </p:nvPr>
+        </p:nvSpPr>
+        <p:spPr>
+          <a:xfrm>
+            <a:off x="3884613" y="8685213"/>
+            <a:ext cx="2971800" cy="457200"/>
+          </a:xfrm>
+          <a:prstGeom prst="rect">
+            <a:avLst/>
+          </a:prstGeom>
+        </p:spPr>
+        <p:txBody>
+          <a:bodyPr vert="horz" lIns="91440" tIns="45720" rIns="91440" bIns="45720" rtlCol="0" anchor="b"/>
+          <a:lstStyle>
+            <a:lvl1pPr algn="r">
+              <a:defRPr sz="1200"/>
+            </a:lvl1pPr>
+          </a:lstStyle>
+          <a:p>
+            <a:fld id="{BB5E49A5-4136-284D-997B-48E1D791AD67}" type="slidenum">
+              <a:rPr lang="en-US" smtClean="0"/>
+              <a:t>‹#›</a:t>
+            </a:fld>
+            <a:endParaRPr lang="en-US"/>
+          </a:p>
+        </p:txBody>
+      </p:sp>
     </p:spTree>
     <p:extLst>
       <p:ext uri="{BB962C8B-B14F-4D97-AF65-F5344CB8AC3E}">
-        <p14:creationId xmlns:p14="http://schemas.microsoft.com/office/powerpoint/2010/main" val="2024455947"/>
+        <p14:creationId xmlns:p14="http://schemas.microsoft.com/office/powerpoint/2010/main" val="2623252185"/>
       </p:ext>
     </p:extLst>
   </p:cSld>
   <p:clrMap bg1="lt1" tx1="dk1" bg2="lt2" tx2="dk2" accent1="accent1" accent2="accent2" accent3="accent3" accent4="accent4" accent5="accent5" accent6="accent6" hlink="hlink" folHlink="folHlink"/>
   <p:notesStyle>
-    <a:lvl1pPr marL="0" algn="l" defTabSz="914400" rtl="0" eaLnBrk="1" latinLnBrk="0" hangingPunct="1">
+    <a:lvl1pPr marL="0" algn="l" defTabSz="457200" rtl="0" eaLnBrk="1" latinLnBrk="0" hangingPunct="1">
       <a:defRPr sz="1200" kern="1200">
         <a:solidFill>
           <a:schemeClr val="tx1"/>
@@ -176,7 +382,7 @@
         <a:cs typeface="+mn-cs"/>
       </a:defRPr>
     </a:lvl1pPr>
-    <a:lvl2pPr marL="457200" algn="l" defTabSz="914400" rtl="0" eaLnBrk="1" latinLnBrk="0" hangingPunct="1">
+    <a:lvl2pPr marL="457200" algn="l" defTabSz="457200" rtl="0" eaLnBrk="1" latinLnBrk="0" hangingPunct="1">
       <a:defRPr sz="1200" kern="1200">
         <a:solidFill>
           <a:schemeClr val="tx1"/>
@@ -186,7 +392,7 @@
         <a:cs typeface="+mn-cs"/>
       </a:defRPr>
     </a:lvl2pPr>
-    <a:lvl3pPr marL="914400" algn="l" defTabSz="914400" rtl="0" eaLnBrk="1" latinLnBrk="0" hangingPunct="1">
+    <a:lvl3pPr marL="914400" algn="l" defTabSz="457200" rtl="0" eaLnBrk="1" latinLnBrk="0" hangingPunct="1">
       <a:defRPr sz="1200" kern="1200">
         <a:solidFill>
           <a:schemeClr val="tx1"/>
@@ -196,7 +402,7 @@
         <a:cs typeface="+mn-cs"/>
       </a:defRPr>
     </a:lvl3pPr>
-    <a:lvl4pPr marL="1371600" algn="l" defTabSz="914400" rtl="0" eaLnBrk="1" latinLnBrk="0" hangingPunct="1">
+    <a:lvl4pPr marL="1371600" algn="l" defTabSz="457200" rtl="0" eaLnBrk="1" latinLnBrk="0" hangingPunct="1">
       <a:defRPr sz="1200" kern="1200">
         <a:solidFill>
           <a:schemeClr val="tx1"/>
@@ -206,7 +412,7 @@
         <a:cs typeface="+mn-cs"/>
       </a:defRPr>
     </a:lvl4pPr>
-    <a:lvl5pPr marL="1828800" algn="l" defTabSz="914400" rtl="0" eaLnBrk="1" latinLnBrk="0" hangingPunct="1">
+    <a:lvl5pPr marL="1828800" algn="l" defTabSz="457200" rtl="0" eaLnBrk="1" latinLnBrk="0" hangingPunct="1">
       <a:defRPr sz="1200" kern="1200">
         <a:solidFill>
           <a:schemeClr val="tx1"/>
@@ -216,7 +422,7 @@
         <a:cs typeface="+mn-cs"/>
       </a:defRPr>
     </a:lvl5pPr>
-    <a:lvl6pPr marL="2286000" algn="l" defTabSz="914400" rtl="0" eaLnBrk="1" latinLnBrk="0" hangingPunct="1">
+    <a:lvl6pPr marL="2286000" algn="l" defTabSz="457200" rtl="0" eaLnBrk="1" latinLnBrk="0" hangingPunct="1">
       <a:defRPr sz="1200" kern="1200">
         <a:solidFill>
           <a:schemeClr val="tx1"/>
@@ -226,7 +432,7 @@
         <a:cs typeface="+mn-cs"/>
       </a:defRPr>
     </a:lvl6pPr>
-    <a:lvl7pPr marL="2743200" algn="l" defTabSz="914400" rtl="0" eaLnBrk="1" latinLnBrk="0" hangingPunct="1">
+    <a:lvl7pPr marL="2743200" algn="l" defTabSz="457200" rtl="0" eaLnBrk="1" latinLnBrk="0" hangingPunct="1">
       <a:defRPr sz="1200" kern="1200">
         <a:solidFill>
           <a:schemeClr val="tx1"/>
@@ -236,7 +442,7 @@
         <a:cs typeface="+mn-cs"/>
       </a:defRPr>
     </a:lvl7pPr>
-    <a:lvl8pPr marL="3200400" algn="l" defTabSz="914400" rtl="0" eaLnBrk="1" latinLnBrk="0" hangingPunct="1">
+    <a:lvl8pPr marL="3200400" algn="l" defTabSz="457200" rtl="0" eaLnBrk="1" latinLnBrk="0" hangingPunct="1">
       <a:defRPr sz="1200" kern="1200">
         <a:solidFill>
           <a:schemeClr val="tx1"/>
@@ -246,7 +452,7 @@
         <a:cs typeface="+mn-cs"/>
       </a:defRPr>
     </a:lvl8pPr>
-    <a:lvl9pPr marL="3657600" algn="l" defTabSz="914400" rtl="0" eaLnBrk="1" latinLnBrk="0" hangingPunct="1">
+    <a:lvl9pPr marL="3657600" algn="l" defTabSz="457200" rtl="0" eaLnBrk="1" latinLnBrk="0" hangingPunct="1">
       <a:defRPr sz="1200" kern="1200">
         <a:solidFill>
           <a:schemeClr val="tx1"/>
@@ -261,7 +467,7 @@
 </file>
 
 <file path=ppt/notesSlides/notesSlide1.xml><?xml version="1.0" encoding="utf-8"?>
-<p:notes xmlns:a="http://schemas.openxmlformats.org/drawingml/2006/main" xmlns:r="http://schemas.openxmlformats.org/officeDocument/2006/relationships" xmlns:p="http://schemas.openxmlformats.org/presentationml/2006/main">
+<p:notes xmlns:a="http://schemas.openxmlformats.org/drawingml/2006/main" xmlns:p="http://schemas.openxmlformats.org/presentationml/2006/main" xmlns:r="http://schemas.openxmlformats.org/officeDocument/2006/relationships">
   <p:cSld>
     <p:spTree>
       <p:nvGrpSpPr>
@@ -281,7 +487,7 @@
         <p:nvSpPr>
           <p:cNvPr id="2" name="Slide Image Placeholder 1"/>
           <p:cNvSpPr>
-            <a:spLocks noGrp="1" noRot="1" noChangeAspect="1"/>
+            <a:spLocks noGrp="1"/>
           </p:cNvSpPr>
           <p:nvPr>
             <p:ph type="sldImg" idx="2"/>
@@ -296,7 +502,7 @@
             <a:spLocks noGrp="1"/>
           </p:cNvSpPr>
           <p:nvPr>
-            <p:ph type="body" sz="quarter" idx="3"/>
+            <p:ph type="body" idx="3" sz="quarter"/>
           </p:nvPr>
         </p:nvSpPr>
         <p:spPr/>
@@ -322,7 +528,7 @@
             <a:spLocks noGrp="1"/>
           </p:cNvSpPr>
           <p:nvPr>
-            <p:ph type="sldNum" sz="quarter" idx="5"/>
+            <p:ph type="sldNum" idx="5" sz="quarter"/>
           </p:nvPr>
         </p:nvSpPr>
         <p:spPr/>
@@ -336,7 +542,7 @@
 </file>
 
 <file path=ppt/notesSlides/notesSlide10.xml><?xml version="1.0" encoding="utf-8"?>
-<p:notes xmlns:a="http://schemas.openxmlformats.org/drawingml/2006/main" xmlns:r="http://schemas.openxmlformats.org/officeDocument/2006/relationships" xmlns:p="http://schemas.openxmlformats.org/presentationml/2006/main">
+<p:notes xmlns:a="http://schemas.openxmlformats.org/drawingml/2006/main" xmlns:p="http://schemas.openxmlformats.org/presentationml/2006/main" xmlns:r="http://schemas.openxmlformats.org/officeDocument/2006/relationships">
   <p:cSld>
     <p:spTree>
       <p:nvGrpSpPr>
@@ -356,7 +562,7 @@
         <p:nvSpPr>
           <p:cNvPr id="2" name="Slide Image Placeholder 1"/>
           <p:cNvSpPr>
-            <a:spLocks noGrp="1" noRot="1" noChangeAspect="1"/>
+            <a:spLocks noGrp="1"/>
           </p:cNvSpPr>
           <p:nvPr>
             <p:ph type="sldImg" idx="2"/>
@@ -371,7 +577,7 @@
             <a:spLocks noGrp="1"/>
           </p:cNvSpPr>
           <p:nvPr>
-            <p:ph type="body" sz="quarter" idx="3"/>
+            <p:ph type="body" idx="3" sz="quarter"/>
           </p:nvPr>
         </p:nvSpPr>
         <p:spPr/>
@@ -388,9 +594,7 @@
               <a:t>Atendimos las observaciones del Corte 1 con objetivos delimitados y mediciones reales de calor. Para el Corte 3 fabricaremos la PCB de potencia, el corte automático y montaremos los 16 paneles. Muchas gracias, abrimos la sesión de preguntas.</a:t>
             </a:r>
           </a:p>
-          <a:p>
-            <a:endParaRPr/>
-          </a:p>
+          <a:p/>
           <a:p>
             <a:r>
               <a:t>--- PREGUNTAS PROBABLES DE LOS JUECES Y RESPUESTAS BREVES ---</a:t>
@@ -406,9 +610,7 @@
               <a:t>R: Por engranaje metálico, bajo costo comercial, accesibilidad y facilidad de reemplazo modular en 32 actuadores.</a:t>
             </a:r>
           </a:p>
-          <a:p>
-            <a:endParaRPr/>
-          </a:p>
+          <a:p/>
           <a:p>
             <a:r>
               <a:t>2. ¿Cómo detecta el atasco si el motor no tiene sensor de temperatura?</a:t>
@@ -419,9 +621,7 @@
               <a:t>R: El motor comercial NO tiene sensor térmico interno ni avisa que está forzado. En laboratorio caracterizamos su curva con termómetro láser y osciloscopio mecatrónico. En la pared final, la placa monitorea la corriente y el ESP32 corta la señal PWM tras 15 s para proteger la estructura de PLA.</a:t>
             </a:r>
           </a:p>
-          <a:p>
-            <a:endParaRPr/>
-          </a:p>
+          <a:p/>
           <a:p>
             <a:r>
               <a:t>3. ¿Cuánto cuesta frente a una pared comercial?</a:t>
@@ -432,9 +632,7 @@
               <a:t>R: Una instalación comercial cuesta cientos de miles de pesos; SOFÍA cuesta una fracción gracias a impresión 3D y componentes IoT accesibles.</a:t>
             </a:r>
           </a:p>
-          <a:p>
-            <a:endParaRPr/>
-          </a:p>
+          <a:p/>
           <a:p>
             <a:r>
               <a:t>4. ¿Qué pasa con varias personas frente a la cámara?</a:t>
@@ -445,9 +643,7 @@
               <a:t>R: Hoy prioriza a la persona más cercana al centro del encuadre; la siguiente etapa filtrará por usuario dominante.</a:t>
             </a:r>
           </a:p>
-          <a:p>
-            <a:endParaRPr/>
-          </a:p>
+          <a:p/>
           <a:p>
             <a:r>
               <a:t>5. ¿Cómo cierran la brecha hacia el espacio público real?</a:t>
@@ -455,7 +651,7 @@
           </a:p>
           <a:p>
             <a:r>
-              <a:t>R: Con la PCB de potencia para 25-30 A, acoples mecánicos de desacople seguro y firmware con auto-recuperación.</a:t>
+              <a:t>R: Con la PCB de potencia para 25 A, acoples mecánicos de desacople seguro y firmware con auto-recuperación.</a:t>
             </a:r>
           </a:p>
         </p:txBody>
@@ -467,7 +663,7 @@
             <a:spLocks noGrp="1"/>
           </p:cNvSpPr>
           <p:nvPr>
-            <p:ph type="sldNum" sz="quarter" idx="5"/>
+            <p:ph type="sldNum" idx="5" sz="quarter"/>
           </p:nvPr>
         </p:nvSpPr>
         <p:spPr/>
@@ -481,7 +677,7 @@
 </file>
 
 <file path=ppt/notesSlides/notesSlide2.xml><?xml version="1.0" encoding="utf-8"?>
-<p:notes xmlns:a="http://schemas.openxmlformats.org/drawingml/2006/main" xmlns:r="http://schemas.openxmlformats.org/officeDocument/2006/relationships" xmlns:p="http://schemas.openxmlformats.org/presentationml/2006/main">
+<p:notes xmlns:a="http://schemas.openxmlformats.org/drawingml/2006/main" xmlns:p="http://schemas.openxmlformats.org/presentationml/2006/main" xmlns:r="http://schemas.openxmlformats.org/officeDocument/2006/relationships">
   <p:cSld>
     <p:spTree>
       <p:nvGrpSpPr>
@@ -501,7 +697,7 @@
         <p:nvSpPr>
           <p:cNvPr id="2" name="Slide Image Placeholder 1"/>
           <p:cNvSpPr>
-            <a:spLocks noGrp="1" noRot="1" noChangeAspect="1"/>
+            <a:spLocks noGrp="1"/>
           </p:cNvSpPr>
           <p:nvPr>
             <p:ph type="sldImg" idx="2"/>
@@ -516,7 +712,7 @@
             <a:spLocks noGrp="1"/>
           </p:cNvSpPr>
           <p:nvPr>
-            <p:ph type="body" sz="quarter" idx="3"/>
+            <p:ph type="body" idx="3" sz="quarter"/>
           </p:nvPr>
         </p:nvSpPr>
         <p:spPr/>
@@ -542,7 +738,7 @@
             <a:spLocks noGrp="1"/>
           </p:cNvSpPr>
           <p:nvPr>
-            <p:ph type="sldNum" sz="quarter" idx="5"/>
+            <p:ph type="sldNum" idx="5" sz="quarter"/>
           </p:nvPr>
         </p:nvSpPr>
         <p:spPr/>
@@ -556,7 +752,7 @@
 </file>
 
 <file path=ppt/notesSlides/notesSlide3.xml><?xml version="1.0" encoding="utf-8"?>
-<p:notes xmlns:a="http://schemas.openxmlformats.org/drawingml/2006/main" xmlns:r="http://schemas.openxmlformats.org/officeDocument/2006/relationships" xmlns:p="http://schemas.openxmlformats.org/presentationml/2006/main">
+<p:notes xmlns:a="http://schemas.openxmlformats.org/drawingml/2006/main" xmlns:p="http://schemas.openxmlformats.org/presentationml/2006/main" xmlns:r="http://schemas.openxmlformats.org/officeDocument/2006/relationships">
   <p:cSld>
     <p:spTree>
       <p:nvGrpSpPr>
@@ -576,7 +772,7 @@
         <p:nvSpPr>
           <p:cNvPr id="2" name="Slide Image Placeholder 1"/>
           <p:cNvSpPr>
-            <a:spLocks noGrp="1" noRot="1" noChangeAspect="1"/>
+            <a:spLocks noGrp="1"/>
           </p:cNvSpPr>
           <p:nvPr>
             <p:ph type="sldImg" idx="2"/>
@@ -591,7 +787,7 @@
             <a:spLocks noGrp="1"/>
           </p:cNvSpPr>
           <p:nvPr>
-            <p:ph type="body" sz="quarter" idx="3"/>
+            <p:ph type="body" idx="3" sz="quarter"/>
           </p:nvPr>
         </p:nvSpPr>
         <p:spPr/>
@@ -617,7 +813,7 @@
             <a:spLocks noGrp="1"/>
           </p:cNvSpPr>
           <p:nvPr>
-            <p:ph type="sldNum" sz="quarter" idx="5"/>
+            <p:ph type="sldNum" idx="5" sz="quarter"/>
           </p:nvPr>
         </p:nvSpPr>
         <p:spPr/>
@@ -631,7 +827,7 @@
 </file>
 
 <file path=ppt/notesSlides/notesSlide4.xml><?xml version="1.0" encoding="utf-8"?>
-<p:notes xmlns:a="http://schemas.openxmlformats.org/drawingml/2006/main" xmlns:r="http://schemas.openxmlformats.org/officeDocument/2006/relationships" xmlns:p="http://schemas.openxmlformats.org/presentationml/2006/main">
+<p:notes xmlns:a="http://schemas.openxmlformats.org/drawingml/2006/main" xmlns:p="http://schemas.openxmlformats.org/presentationml/2006/main" xmlns:r="http://schemas.openxmlformats.org/officeDocument/2006/relationships">
   <p:cSld>
     <p:spTree>
       <p:nvGrpSpPr>
@@ -651,7 +847,7 @@
         <p:nvSpPr>
           <p:cNvPr id="2" name="Slide Image Placeholder 1"/>
           <p:cNvSpPr>
-            <a:spLocks noGrp="1" noRot="1" noChangeAspect="1"/>
+            <a:spLocks noGrp="1"/>
           </p:cNvSpPr>
           <p:nvPr>
             <p:ph type="sldImg" idx="2"/>
@@ -666,7 +862,7 @@
             <a:spLocks noGrp="1"/>
           </p:cNvSpPr>
           <p:nvPr>
-            <p:ph type="body" sz="quarter" idx="3"/>
+            <p:ph type="body" idx="3" sz="quarter"/>
           </p:nvPr>
         </p:nvSpPr>
         <p:spPr/>
@@ -692,7 +888,7 @@
             <a:spLocks noGrp="1"/>
           </p:cNvSpPr>
           <p:nvPr>
-            <p:ph type="sldNum" sz="quarter" idx="5"/>
+            <p:ph type="sldNum" idx="5" sz="quarter"/>
           </p:nvPr>
         </p:nvSpPr>
         <p:spPr/>
@@ -706,7 +902,7 @@
 </file>
 
 <file path=ppt/notesSlides/notesSlide5.xml><?xml version="1.0" encoding="utf-8"?>
-<p:notes xmlns:a="http://schemas.openxmlformats.org/drawingml/2006/main" xmlns:r="http://schemas.openxmlformats.org/officeDocument/2006/relationships" xmlns:p="http://schemas.openxmlformats.org/presentationml/2006/main">
+<p:notes xmlns:a="http://schemas.openxmlformats.org/drawingml/2006/main" xmlns:p="http://schemas.openxmlformats.org/presentationml/2006/main" xmlns:r="http://schemas.openxmlformats.org/officeDocument/2006/relationships">
   <p:cSld>
     <p:spTree>
       <p:nvGrpSpPr>
@@ -726,7 +922,7 @@
         <p:nvSpPr>
           <p:cNvPr id="2" name="Slide Image Placeholder 1"/>
           <p:cNvSpPr>
-            <a:spLocks noGrp="1" noRot="1" noChangeAspect="1"/>
+            <a:spLocks noGrp="1"/>
           </p:cNvSpPr>
           <p:nvPr>
             <p:ph type="sldImg" idx="2"/>
@@ -741,7 +937,7 @@
             <a:spLocks noGrp="1"/>
           </p:cNvSpPr>
           <p:nvPr>
-            <p:ph type="body" sz="quarter" idx="3"/>
+            <p:ph type="body" idx="3" sz="quarter"/>
           </p:nvPr>
         </p:nvSpPr>
         <p:spPr/>
@@ -767,7 +963,7 @@
             <a:spLocks noGrp="1"/>
           </p:cNvSpPr>
           <p:nvPr>
-            <p:ph type="sldNum" sz="quarter" idx="5"/>
+            <p:ph type="sldNum" idx="5" sz="quarter"/>
           </p:nvPr>
         </p:nvSpPr>
         <p:spPr/>
@@ -781,7 +977,7 @@
 </file>
 
 <file path=ppt/notesSlides/notesSlide6.xml><?xml version="1.0" encoding="utf-8"?>
-<p:notes xmlns:a="http://schemas.openxmlformats.org/drawingml/2006/main" xmlns:r="http://schemas.openxmlformats.org/officeDocument/2006/relationships" xmlns:p="http://schemas.openxmlformats.org/presentationml/2006/main">
+<p:notes xmlns:a="http://schemas.openxmlformats.org/drawingml/2006/main" xmlns:p="http://schemas.openxmlformats.org/presentationml/2006/main" xmlns:r="http://schemas.openxmlformats.org/officeDocument/2006/relationships">
   <p:cSld>
     <p:spTree>
       <p:nvGrpSpPr>
@@ -801,7 +997,7 @@
         <p:nvSpPr>
           <p:cNvPr id="2" name="Slide Image Placeholder 1"/>
           <p:cNvSpPr>
-            <a:spLocks noGrp="1" noRot="1" noChangeAspect="1"/>
+            <a:spLocks noGrp="1"/>
           </p:cNvSpPr>
           <p:nvPr>
             <p:ph type="sldImg" idx="2"/>
@@ -816,7 +1012,7 @@
             <a:spLocks noGrp="1"/>
           </p:cNvSpPr>
           <p:nvPr>
-            <p:ph type="body" sz="quarter" idx="3"/>
+            <p:ph type="body" idx="3" sz="quarter"/>
           </p:nvPr>
         </p:nvSpPr>
         <p:spPr/>
@@ -830,7 +1026,7 @@
           </a:p>
           <a:p>
             <a:r>
-              <a:t>Aquí vemos el prototipo físico real. Al detectar el saludo frente a la cámara, el panel físico responde por Bluetooth en menos de 100 milisegundos con una oscilación suave.</a:t>
+              <a:t>Aquí vemos el prototipo físico real. Cámara y Bluetooth tardan 45 a 50 milisegundos, y el servo 75 a 180 ms en moverse. Ensayos repetidos con N=10 validan la fluidez.</a:t>
             </a:r>
           </a:p>
         </p:txBody>
@@ -842,7 +1038,7 @@
             <a:spLocks noGrp="1"/>
           </p:cNvSpPr>
           <p:nvPr>
-            <p:ph type="sldNum" sz="quarter" idx="5"/>
+            <p:ph type="sldNum" idx="5" sz="quarter"/>
           </p:nvPr>
         </p:nvSpPr>
         <p:spPr/>
@@ -856,7 +1052,7 @@
 </file>
 
 <file path=ppt/notesSlides/notesSlide7.xml><?xml version="1.0" encoding="utf-8"?>
-<p:notes xmlns:a="http://schemas.openxmlformats.org/drawingml/2006/main" xmlns:r="http://schemas.openxmlformats.org/officeDocument/2006/relationships" xmlns:p="http://schemas.openxmlformats.org/presentationml/2006/main">
+<p:notes xmlns:a="http://schemas.openxmlformats.org/drawingml/2006/main" xmlns:p="http://schemas.openxmlformats.org/presentationml/2006/main" xmlns:r="http://schemas.openxmlformats.org/officeDocument/2006/relationships">
   <p:cSld>
     <p:spTree>
       <p:nvGrpSpPr>
@@ -876,7 +1072,7 @@
         <p:nvSpPr>
           <p:cNvPr id="2" name="Slide Image Placeholder 1"/>
           <p:cNvSpPr>
-            <a:spLocks noGrp="1" noRot="1" noChangeAspect="1"/>
+            <a:spLocks noGrp="1"/>
           </p:cNvSpPr>
           <p:nvPr>
             <p:ph type="sldImg" idx="2"/>
@@ -891,7 +1087,7 @@
             <a:spLocks noGrp="1"/>
           </p:cNvSpPr>
           <p:nvPr>
-            <p:ph type="body" sz="quarter" idx="3"/>
+            <p:ph type="body" idx="3" sz="quarter"/>
           </p:nvPr>
         </p:nvSpPr>
         <p:spPr/>
@@ -905,7 +1101,7 @@
           </a:p>
           <a:p>
             <a:r>
-              <a:t>Este es nuestro hallazgo experimental más importante: sin carga el motor no se calienta. Pero atorado con un tope, llegó a 64.8 grados en 226 segundos y a los 3 minutos supera los 60 grados, donde el plástico 3D empieza a aflojarse. Por eso diseñamos un corte automático a los 15 segundos.</a:t>
+              <a:t>Este es nuestro hallazgo experimental más importante: sin carga el motor no se calienta. Pero atorado con un tope, sube unos 13 grados por minuto hasta llegar a 64.8 grados en menos de cuatro minutos; a los 3 minutos ya pasa de 55 grados, entrando a zona de riesgo. Con corte a 15 segundos solo sube unos 3 grados.</a:t>
             </a:r>
           </a:p>
         </p:txBody>
@@ -917,7 +1113,7 @@
             <a:spLocks noGrp="1"/>
           </p:cNvSpPr>
           <p:nvPr>
-            <p:ph type="sldNum" sz="quarter" idx="5"/>
+            <p:ph type="sldNum" idx="5" sz="quarter"/>
           </p:nvPr>
         </p:nvSpPr>
         <p:spPr/>
@@ -931,7 +1127,7 @@
 </file>
 
 <file path=ppt/notesSlides/notesSlide8.xml><?xml version="1.0" encoding="utf-8"?>
-<p:notes xmlns:a="http://schemas.openxmlformats.org/drawingml/2006/main" xmlns:r="http://schemas.openxmlformats.org/officeDocument/2006/relationships" xmlns:p="http://schemas.openxmlformats.org/presentationml/2006/main">
+<p:notes xmlns:a="http://schemas.openxmlformats.org/drawingml/2006/main" xmlns:p="http://schemas.openxmlformats.org/presentationml/2006/main" xmlns:r="http://schemas.openxmlformats.org/officeDocument/2006/relationships">
   <p:cSld>
     <p:spTree>
       <p:nvGrpSpPr>
@@ -951,7 +1147,7 @@
         <p:nvSpPr>
           <p:cNvPr id="2" name="Slide Image Placeholder 1"/>
           <p:cNvSpPr>
-            <a:spLocks noGrp="1" noRot="1" noChangeAspect="1"/>
+            <a:spLocks noGrp="1"/>
           </p:cNvSpPr>
           <p:nvPr>
             <p:ph type="sldImg" idx="2"/>
@@ -966,7 +1162,7 @@
             <a:spLocks noGrp="1"/>
           </p:cNvSpPr>
           <p:nvPr>
-            <p:ph type="body" sz="quarter" idx="3"/>
+            <p:ph type="body" idx="3" sz="quarter"/>
           </p:nvPr>
         </p:nvSpPr>
         <p:spPr/>
@@ -992,7 +1188,7 @@
             <a:spLocks noGrp="1"/>
           </p:cNvSpPr>
           <p:nvPr>
-            <p:ph type="sldNum" sz="quarter" idx="5"/>
+            <p:ph type="sldNum" idx="5" sz="quarter"/>
           </p:nvPr>
         </p:nvSpPr>
         <p:spPr/>
@@ -1006,7 +1202,7 @@
 </file>
 
 <file path=ppt/notesSlides/notesSlide9.xml><?xml version="1.0" encoding="utf-8"?>
-<p:notes xmlns:a="http://schemas.openxmlformats.org/drawingml/2006/main" xmlns:r="http://schemas.openxmlformats.org/officeDocument/2006/relationships" xmlns:p="http://schemas.openxmlformats.org/presentationml/2006/main">
+<p:notes xmlns:a="http://schemas.openxmlformats.org/drawingml/2006/main" xmlns:p="http://schemas.openxmlformats.org/presentationml/2006/main" xmlns:r="http://schemas.openxmlformats.org/officeDocument/2006/relationships">
   <p:cSld>
     <p:spTree>
       <p:nvGrpSpPr>
@@ -1026,7 +1222,7 @@
         <p:nvSpPr>
           <p:cNvPr id="2" name="Slide Image Placeholder 1"/>
           <p:cNvSpPr>
-            <a:spLocks noGrp="1" noRot="1" noChangeAspect="1"/>
+            <a:spLocks noGrp="1"/>
           </p:cNvSpPr>
           <p:nvPr>
             <p:ph type="sldImg" idx="2"/>
@@ -1041,7 +1237,7 @@
             <a:spLocks noGrp="1"/>
           </p:cNvSpPr>
           <p:nvPr>
-            <p:ph type="body" sz="quarter" idx="3"/>
+            <p:ph type="body" idx="3" sz="quarter"/>
           </p:nvPr>
         </p:nvSpPr>
         <p:spPr/>
@@ -1055,7 +1251,7 @@
           </a:p>
           <a:p>
             <a:r>
-              <a:t>La segunda brecha se basa en nuestros datos: un museo opera 12 horas seguidas, los niños van a jalar los pétalos requiriendo desacoples seguros, los 32 motores demandan hasta 25-30 amperes y la pared debe recuperarse sola.</a:t>
+              <a:t>La segunda brecha se basa en nuestros datos: un museo opera 12 horas seguidas, los niños van a jalar los pétalos demandando 0.9 amperes y disipando 4.6 watts de calor. Los 32 motores piden hasta 23 amperes al arrancar juntos requiriendo fuente de 25 amperes. Aun sin público, los pétalos se rozan por tolerancias de impresión (±0.4 mm); falta un acople mecánico que ceda sin romper engranes.</a:t>
             </a:r>
           </a:p>
         </p:txBody>
@@ -1067,7 +1263,7 @@
             <a:spLocks noGrp="1"/>
           </p:cNvSpPr>
           <p:nvPr>
-            <p:ph type="sldNum" sz="quarter" idx="5"/>
+            <p:ph type="sldNum" idx="5" sz="quarter"/>
           </p:nvPr>
         </p:nvSpPr>
         <p:spPr/>
@@ -1118,9 +1314,10 @@
           <a:lstStyle/>
           <a:p>
             <a:r>
-              <a:rPr lang="en-US"/>
+              <a:rPr lang="en-US" smtClean="0"/>
               <a:t>Click to edit Master title style</a:t>
             </a:r>
+            <a:endParaRPr lang="en-US"/>
           </a:p>
         </p:txBody>
       </p:sp>
@@ -1236,9 +1433,10 @@
           </a:lstStyle>
           <a:p>
             <a:r>
-              <a:rPr lang="en-US"/>
+              <a:rPr lang="en-US" smtClean="0"/>
               <a:t>Click to edit Master subtitle style</a:t>
             </a:r>
+            <a:endParaRPr lang="en-US"/>
           </a:p>
         </p:txBody>
       </p:sp>
@@ -1259,7 +1457,7 @@
           <a:p>
             <a:fld id="{5BCAD085-E8A6-8845-BD4E-CB4CCA059FC4}" type="datetimeFigureOut">
               <a:rPr lang="en-US" smtClean="0"/>
-              <a:t>10/19/26</a:t>
+              <a:t>1/27/13</a:t>
             </a:fld>
             <a:endParaRPr lang="en-US"/>
           </a:p>
@@ -1301,7 +1499,7 @@
           <a:p>
             <a:fld id="{C1FF6DA9-008F-8B48-92A6-B652298478BF}" type="slidenum">
               <a:rPr lang="en-US" smtClean="0"/>
-              <a:t>‹Nº›</a:t>
+              <a:t>‹#›</a:t>
             </a:fld>
             <a:endParaRPr lang="en-US"/>
           </a:p>
@@ -1353,9 +1551,10 @@
           <a:lstStyle/>
           <a:p>
             <a:r>
-              <a:rPr lang="en-US"/>
+              <a:rPr lang="en-US" smtClean="0"/>
               <a:t>Click to edit Master title style</a:t>
             </a:r>
+            <a:endParaRPr lang="en-US"/>
           </a:p>
         </p:txBody>
       </p:sp>
@@ -1376,37 +1575,38 @@
           <a:p>
             <a:pPr lvl="0"/>
             <a:r>
-              <a:rPr lang="en-US"/>
+              <a:rPr lang="en-US" smtClean="0"/>
               <a:t>Click to edit Master text styles</a:t>
             </a:r>
           </a:p>
           <a:p>
             <a:pPr lvl="1"/>
             <a:r>
-              <a:rPr lang="en-US"/>
+              <a:rPr lang="en-US" smtClean="0"/>
               <a:t>Second level</a:t>
             </a:r>
           </a:p>
           <a:p>
             <a:pPr lvl="2"/>
             <a:r>
-              <a:rPr lang="en-US"/>
+              <a:rPr lang="en-US" smtClean="0"/>
               <a:t>Third level</a:t>
             </a:r>
           </a:p>
           <a:p>
             <a:pPr lvl="3"/>
             <a:r>
-              <a:rPr lang="en-US"/>
+              <a:rPr lang="en-US" smtClean="0"/>
               <a:t>Fourth level</a:t>
             </a:r>
           </a:p>
           <a:p>
             <a:pPr lvl="4"/>
             <a:r>
-              <a:rPr lang="en-US"/>
+              <a:rPr lang="en-US" smtClean="0"/>
               <a:t>Fifth level</a:t>
             </a:r>
+            <a:endParaRPr lang="en-US"/>
           </a:p>
         </p:txBody>
       </p:sp>
@@ -1427,7 +1627,7 @@
           <a:p>
             <a:fld id="{5BCAD085-E8A6-8845-BD4E-CB4CCA059FC4}" type="datetimeFigureOut">
               <a:rPr lang="en-US" smtClean="0"/>
-              <a:t>10/19/26</a:t>
+              <a:t>1/27/13</a:t>
             </a:fld>
             <a:endParaRPr lang="en-US"/>
           </a:p>
@@ -1469,7 +1669,7 @@
           <a:p>
             <a:fld id="{C1FF6DA9-008F-8B48-92A6-B652298478BF}" type="slidenum">
               <a:rPr lang="en-US" smtClean="0"/>
-              <a:t>‹Nº›</a:t>
+              <a:t>‹#›</a:t>
             </a:fld>
             <a:endParaRPr lang="en-US"/>
           </a:p>
@@ -1526,9 +1726,10 @@
           <a:lstStyle/>
           <a:p>
             <a:r>
-              <a:rPr lang="en-US"/>
+              <a:rPr lang="en-US" smtClean="0"/>
               <a:t>Click to edit Master title style</a:t>
             </a:r>
+            <a:endParaRPr lang="en-US"/>
           </a:p>
         </p:txBody>
       </p:sp>
@@ -1554,37 +1755,38 @@
           <a:p>
             <a:pPr lvl="0"/>
             <a:r>
-              <a:rPr lang="en-US"/>
+              <a:rPr lang="en-US" smtClean="0"/>
               <a:t>Click to edit Master text styles</a:t>
             </a:r>
           </a:p>
           <a:p>
             <a:pPr lvl="1"/>
             <a:r>
-              <a:rPr lang="en-US"/>
+              <a:rPr lang="en-US" smtClean="0"/>
               <a:t>Second level</a:t>
             </a:r>
           </a:p>
           <a:p>
             <a:pPr lvl="2"/>
             <a:r>
-              <a:rPr lang="en-US"/>
+              <a:rPr lang="en-US" smtClean="0"/>
               <a:t>Third level</a:t>
             </a:r>
           </a:p>
           <a:p>
             <a:pPr lvl="3"/>
             <a:r>
-              <a:rPr lang="en-US"/>
+              <a:rPr lang="en-US" smtClean="0"/>
               <a:t>Fourth level</a:t>
             </a:r>
           </a:p>
           <a:p>
             <a:pPr lvl="4"/>
             <a:r>
-              <a:rPr lang="en-US"/>
+              <a:rPr lang="en-US" smtClean="0"/>
               <a:t>Fifth level</a:t>
             </a:r>
+            <a:endParaRPr lang="en-US"/>
           </a:p>
         </p:txBody>
       </p:sp>
@@ -1605,7 +1807,7 @@
           <a:p>
             <a:fld id="{5BCAD085-E8A6-8845-BD4E-CB4CCA059FC4}" type="datetimeFigureOut">
               <a:rPr lang="en-US" smtClean="0"/>
-              <a:t>10/19/26</a:t>
+              <a:t>1/27/13</a:t>
             </a:fld>
             <a:endParaRPr lang="en-US"/>
           </a:p>
@@ -1647,7 +1849,7 @@
           <a:p>
             <a:fld id="{C1FF6DA9-008F-8B48-92A6-B652298478BF}" type="slidenum">
               <a:rPr lang="en-US" smtClean="0"/>
-              <a:t>‹Nº›</a:t>
+              <a:t>‹#›</a:t>
             </a:fld>
             <a:endParaRPr lang="en-US"/>
           </a:p>
@@ -1699,9 +1901,10 @@
           <a:lstStyle/>
           <a:p>
             <a:r>
-              <a:rPr lang="en-US"/>
+              <a:rPr lang="en-US" smtClean="0"/>
               <a:t>Click to edit Master title style</a:t>
             </a:r>
+            <a:endParaRPr lang="en-US"/>
           </a:p>
         </p:txBody>
       </p:sp>
@@ -1722,37 +1925,38 @@
           <a:p>
             <a:pPr lvl="0"/>
             <a:r>
-              <a:rPr lang="en-US"/>
+              <a:rPr lang="en-US" smtClean="0"/>
               <a:t>Click to edit Master text styles</a:t>
             </a:r>
           </a:p>
           <a:p>
             <a:pPr lvl="1"/>
             <a:r>
-              <a:rPr lang="en-US"/>
+              <a:rPr lang="en-US" smtClean="0"/>
               <a:t>Second level</a:t>
             </a:r>
           </a:p>
           <a:p>
             <a:pPr lvl="2"/>
             <a:r>
-              <a:rPr lang="en-US"/>
+              <a:rPr lang="en-US" smtClean="0"/>
               <a:t>Third level</a:t>
             </a:r>
           </a:p>
           <a:p>
             <a:pPr lvl="3"/>
             <a:r>
-              <a:rPr lang="en-US"/>
+              <a:rPr lang="en-US" smtClean="0"/>
               <a:t>Fourth level</a:t>
             </a:r>
           </a:p>
           <a:p>
             <a:pPr lvl="4"/>
             <a:r>
-              <a:rPr lang="en-US"/>
+              <a:rPr lang="en-US" smtClean="0"/>
               <a:t>Fifth level</a:t>
             </a:r>
+            <a:endParaRPr lang="en-US"/>
           </a:p>
         </p:txBody>
       </p:sp>
@@ -1773,7 +1977,7 @@
           <a:p>
             <a:fld id="{5BCAD085-E8A6-8845-BD4E-CB4CCA059FC4}" type="datetimeFigureOut">
               <a:rPr lang="en-US" smtClean="0"/>
-              <a:t>10/19/26</a:t>
+              <a:t>1/27/13</a:t>
             </a:fld>
             <a:endParaRPr lang="en-US"/>
           </a:p>
@@ -1815,7 +2019,7 @@
           <a:p>
             <a:fld id="{C1FF6DA9-008F-8B48-92A6-B652298478BF}" type="slidenum">
               <a:rPr lang="en-US" smtClean="0"/>
-              <a:t>‹Nº›</a:t>
+              <a:t>‹#›</a:t>
             </a:fld>
             <a:endParaRPr lang="en-US"/>
           </a:p>
@@ -1876,9 +2080,10 @@
           </a:lstStyle>
           <a:p>
             <a:r>
-              <a:rPr lang="en-US"/>
+              <a:rPr lang="en-US" smtClean="0"/>
               <a:t>Click to edit Master title style</a:t>
             </a:r>
+            <a:endParaRPr lang="en-US"/>
           </a:p>
         </p:txBody>
       </p:sp>
@@ -1995,7 +2200,7 @@
           <a:p>
             <a:pPr lvl="0"/>
             <a:r>
-              <a:rPr lang="en-US"/>
+              <a:rPr lang="en-US" smtClean="0"/>
               <a:t>Click to edit Master text styles</a:t>
             </a:r>
           </a:p>
@@ -2018,7 +2223,7 @@
           <a:p>
             <a:fld id="{5BCAD085-E8A6-8845-BD4E-CB4CCA059FC4}" type="datetimeFigureOut">
               <a:rPr lang="en-US" smtClean="0"/>
-              <a:t>10/19/26</a:t>
+              <a:t>1/27/13</a:t>
             </a:fld>
             <a:endParaRPr lang="en-US"/>
           </a:p>
@@ -2060,7 +2265,7 @@
           <a:p>
             <a:fld id="{C1FF6DA9-008F-8B48-92A6-B652298478BF}" type="slidenum">
               <a:rPr lang="en-US" smtClean="0"/>
-              <a:t>‹Nº›</a:t>
+              <a:t>‹#›</a:t>
             </a:fld>
             <a:endParaRPr lang="en-US"/>
           </a:p>
@@ -2112,9 +2317,10 @@
           <a:lstStyle/>
           <a:p>
             <a:r>
-              <a:rPr lang="en-US"/>
+              <a:rPr lang="en-US" smtClean="0"/>
               <a:t>Click to edit Master title style</a:t>
             </a:r>
+            <a:endParaRPr lang="en-US"/>
           </a:p>
         </p:txBody>
       </p:sp>
@@ -2168,37 +2374,38 @@
           <a:p>
             <a:pPr lvl="0"/>
             <a:r>
-              <a:rPr lang="en-US"/>
+              <a:rPr lang="en-US" smtClean="0"/>
               <a:t>Click to edit Master text styles</a:t>
             </a:r>
           </a:p>
           <a:p>
             <a:pPr lvl="1"/>
             <a:r>
-              <a:rPr lang="en-US"/>
+              <a:rPr lang="en-US" smtClean="0"/>
               <a:t>Second level</a:t>
             </a:r>
           </a:p>
           <a:p>
             <a:pPr lvl="2"/>
             <a:r>
-              <a:rPr lang="en-US"/>
+              <a:rPr lang="en-US" smtClean="0"/>
               <a:t>Third level</a:t>
             </a:r>
           </a:p>
           <a:p>
             <a:pPr lvl="3"/>
             <a:r>
-              <a:rPr lang="en-US"/>
+              <a:rPr lang="en-US" smtClean="0"/>
               <a:t>Fourth level</a:t>
             </a:r>
           </a:p>
           <a:p>
             <a:pPr lvl="4"/>
             <a:r>
-              <a:rPr lang="en-US"/>
+              <a:rPr lang="en-US" smtClean="0"/>
               <a:t>Fifth level</a:t>
             </a:r>
+            <a:endParaRPr lang="en-US"/>
           </a:p>
         </p:txBody>
       </p:sp>
@@ -2252,37 +2459,38 @@
           <a:p>
             <a:pPr lvl="0"/>
             <a:r>
-              <a:rPr lang="en-US"/>
+              <a:rPr lang="en-US" smtClean="0"/>
               <a:t>Click to edit Master text styles</a:t>
             </a:r>
           </a:p>
           <a:p>
             <a:pPr lvl="1"/>
             <a:r>
-              <a:rPr lang="en-US"/>
+              <a:rPr lang="en-US" smtClean="0"/>
               <a:t>Second level</a:t>
             </a:r>
           </a:p>
           <a:p>
             <a:pPr lvl="2"/>
             <a:r>
-              <a:rPr lang="en-US"/>
+              <a:rPr lang="en-US" smtClean="0"/>
               <a:t>Third level</a:t>
             </a:r>
           </a:p>
           <a:p>
             <a:pPr lvl="3"/>
             <a:r>
-              <a:rPr lang="en-US"/>
+              <a:rPr lang="en-US" smtClean="0"/>
               <a:t>Fourth level</a:t>
             </a:r>
           </a:p>
           <a:p>
             <a:pPr lvl="4"/>
             <a:r>
-              <a:rPr lang="en-US"/>
+              <a:rPr lang="en-US" smtClean="0"/>
               <a:t>Fifth level</a:t>
             </a:r>
+            <a:endParaRPr lang="en-US"/>
           </a:p>
         </p:txBody>
       </p:sp>
@@ -2303,7 +2511,7 @@
           <a:p>
             <a:fld id="{5BCAD085-E8A6-8845-BD4E-CB4CCA059FC4}" type="datetimeFigureOut">
               <a:rPr lang="en-US" smtClean="0"/>
-              <a:t>10/19/26</a:t>
+              <a:t>1/27/13</a:t>
             </a:fld>
             <a:endParaRPr lang="en-US"/>
           </a:p>
@@ -2345,7 +2553,7 @@
           <a:p>
             <a:fld id="{C1FF6DA9-008F-8B48-92A6-B652298478BF}" type="slidenum">
               <a:rPr lang="en-US" smtClean="0"/>
-              <a:t>‹Nº›</a:t>
+              <a:t>‹#›</a:t>
             </a:fld>
             <a:endParaRPr lang="en-US"/>
           </a:p>
@@ -2401,9 +2609,10 @@
           </a:lstStyle>
           <a:p>
             <a:r>
-              <a:rPr lang="en-US"/>
+              <a:rPr lang="en-US" smtClean="0"/>
               <a:t>Click to edit Master title style</a:t>
             </a:r>
+            <a:endParaRPr lang="en-US"/>
           </a:p>
         </p:txBody>
       </p:sp>
@@ -2466,7 +2675,7 @@
           <a:p>
             <a:pPr lvl="0"/>
             <a:r>
-              <a:rPr lang="en-US"/>
+              <a:rPr lang="en-US" smtClean="0"/>
               <a:t>Click to edit Master text styles</a:t>
             </a:r>
           </a:p>
@@ -2522,37 +2731,38 @@
           <a:p>
             <a:pPr lvl="0"/>
             <a:r>
-              <a:rPr lang="en-US"/>
+              <a:rPr lang="en-US" smtClean="0"/>
               <a:t>Click to edit Master text styles</a:t>
             </a:r>
           </a:p>
           <a:p>
             <a:pPr lvl="1"/>
             <a:r>
-              <a:rPr lang="en-US"/>
+              <a:rPr lang="en-US" smtClean="0"/>
               <a:t>Second level</a:t>
             </a:r>
           </a:p>
           <a:p>
             <a:pPr lvl="2"/>
             <a:r>
-              <a:rPr lang="en-US"/>
+              <a:rPr lang="en-US" smtClean="0"/>
               <a:t>Third level</a:t>
             </a:r>
           </a:p>
           <a:p>
             <a:pPr lvl="3"/>
             <a:r>
-              <a:rPr lang="en-US"/>
+              <a:rPr lang="en-US" smtClean="0"/>
               <a:t>Fourth level</a:t>
             </a:r>
           </a:p>
           <a:p>
             <a:pPr lvl="4"/>
             <a:r>
-              <a:rPr lang="en-US"/>
+              <a:rPr lang="en-US" smtClean="0"/>
               <a:t>Fifth level</a:t>
             </a:r>
+            <a:endParaRPr lang="en-US"/>
           </a:p>
         </p:txBody>
       </p:sp>
@@ -2615,7 +2825,7 @@
           <a:p>
             <a:pPr lvl="0"/>
             <a:r>
-              <a:rPr lang="en-US"/>
+              <a:rPr lang="en-US" smtClean="0"/>
               <a:t>Click to edit Master text styles</a:t>
             </a:r>
           </a:p>
@@ -2671,37 +2881,38 @@
           <a:p>
             <a:pPr lvl="0"/>
             <a:r>
-              <a:rPr lang="en-US"/>
+              <a:rPr lang="en-US" smtClean="0"/>
               <a:t>Click to edit Master text styles</a:t>
             </a:r>
           </a:p>
           <a:p>
             <a:pPr lvl="1"/>
             <a:r>
-              <a:rPr lang="en-US"/>
+              <a:rPr lang="en-US" smtClean="0"/>
               <a:t>Second level</a:t>
             </a:r>
           </a:p>
           <a:p>
             <a:pPr lvl="2"/>
             <a:r>
-              <a:rPr lang="en-US"/>
+              <a:rPr lang="en-US" smtClean="0"/>
               <a:t>Third level</a:t>
             </a:r>
           </a:p>
           <a:p>
             <a:pPr lvl="3"/>
             <a:r>
-              <a:rPr lang="en-US"/>
+              <a:rPr lang="en-US" smtClean="0"/>
               <a:t>Fourth level</a:t>
             </a:r>
           </a:p>
           <a:p>
             <a:pPr lvl="4"/>
             <a:r>
-              <a:rPr lang="en-US"/>
+              <a:rPr lang="en-US" smtClean="0"/>
               <a:t>Fifth level</a:t>
             </a:r>
+            <a:endParaRPr lang="en-US"/>
           </a:p>
         </p:txBody>
       </p:sp>
@@ -2722,7 +2933,7 @@
           <a:p>
             <a:fld id="{5BCAD085-E8A6-8845-BD4E-CB4CCA059FC4}" type="datetimeFigureOut">
               <a:rPr lang="en-US" smtClean="0"/>
-              <a:t>10/19/26</a:t>
+              <a:t>1/27/13</a:t>
             </a:fld>
             <a:endParaRPr lang="en-US"/>
           </a:p>
@@ -2764,7 +2975,7 @@
           <a:p>
             <a:fld id="{C1FF6DA9-008F-8B48-92A6-B652298478BF}" type="slidenum">
               <a:rPr lang="en-US" smtClean="0"/>
-              <a:t>‹Nº›</a:t>
+              <a:t>‹#›</a:t>
             </a:fld>
             <a:endParaRPr lang="en-US"/>
           </a:p>
@@ -2816,9 +3027,10 @@
           <a:lstStyle/>
           <a:p>
             <a:r>
-              <a:rPr lang="en-US"/>
+              <a:rPr lang="en-US" smtClean="0"/>
               <a:t>Click to edit Master title style</a:t>
             </a:r>
+            <a:endParaRPr lang="en-US"/>
           </a:p>
         </p:txBody>
       </p:sp>
@@ -2839,7 +3051,7 @@
           <a:p>
             <a:fld id="{5BCAD085-E8A6-8845-BD4E-CB4CCA059FC4}" type="datetimeFigureOut">
               <a:rPr lang="en-US" smtClean="0"/>
-              <a:t>10/19/26</a:t>
+              <a:t>1/27/13</a:t>
             </a:fld>
             <a:endParaRPr lang="en-US"/>
           </a:p>
@@ -2881,7 +3093,7 @@
           <a:p>
             <a:fld id="{C1FF6DA9-008F-8B48-92A6-B652298478BF}" type="slidenum">
               <a:rPr lang="en-US" smtClean="0"/>
-              <a:t>‹Nº›</a:t>
+              <a:t>‹#›</a:t>
             </a:fld>
             <a:endParaRPr lang="en-US"/>
           </a:p>
@@ -2934,7 +3146,7 @@
           <a:p>
             <a:fld id="{5BCAD085-E8A6-8845-BD4E-CB4CCA059FC4}" type="datetimeFigureOut">
               <a:rPr lang="en-US" smtClean="0"/>
-              <a:t>10/19/26</a:t>
+              <a:t>1/27/13</a:t>
             </a:fld>
             <a:endParaRPr lang="en-US"/>
           </a:p>
@@ -2976,7 +3188,7 @@
           <a:p>
             <a:fld id="{C1FF6DA9-008F-8B48-92A6-B652298478BF}" type="slidenum">
               <a:rPr lang="en-US" smtClean="0"/>
-              <a:t>‹Nº›</a:t>
+              <a:t>‹#›</a:t>
             </a:fld>
             <a:endParaRPr lang="en-US"/>
           </a:p>
@@ -3037,9 +3249,10 @@
           </a:lstStyle>
           <a:p>
             <a:r>
-              <a:rPr lang="en-US"/>
+              <a:rPr lang="en-US" smtClean="0"/>
               <a:t>Click to edit Master title style</a:t>
             </a:r>
+            <a:endParaRPr lang="en-US"/>
           </a:p>
         </p:txBody>
       </p:sp>
@@ -3093,37 +3306,38 @@
           <a:p>
             <a:pPr lvl="0"/>
             <a:r>
-              <a:rPr lang="en-US"/>
+              <a:rPr lang="en-US" smtClean="0"/>
               <a:t>Click to edit Master text styles</a:t>
             </a:r>
           </a:p>
           <a:p>
             <a:pPr lvl="1"/>
             <a:r>
-              <a:rPr lang="en-US"/>
+              <a:rPr lang="en-US" smtClean="0"/>
               <a:t>Second level</a:t>
             </a:r>
           </a:p>
           <a:p>
             <a:pPr lvl="2"/>
             <a:r>
-              <a:rPr lang="en-US"/>
+              <a:rPr lang="en-US" smtClean="0"/>
               <a:t>Third level</a:t>
             </a:r>
           </a:p>
           <a:p>
             <a:pPr lvl="3"/>
             <a:r>
-              <a:rPr lang="en-US"/>
+              <a:rPr lang="en-US" smtClean="0"/>
               <a:t>Fourth level</a:t>
             </a:r>
           </a:p>
           <a:p>
             <a:pPr lvl="4"/>
             <a:r>
-              <a:rPr lang="en-US"/>
+              <a:rPr lang="en-US" smtClean="0"/>
               <a:t>Fifth level</a:t>
             </a:r>
+            <a:endParaRPr lang="en-US"/>
           </a:p>
         </p:txBody>
       </p:sp>
@@ -3186,7 +3400,7 @@
           <a:p>
             <a:pPr lvl="0"/>
             <a:r>
-              <a:rPr lang="en-US"/>
+              <a:rPr lang="en-US" smtClean="0"/>
               <a:t>Click to edit Master text styles</a:t>
             </a:r>
           </a:p>
@@ -3209,7 +3423,7 @@
           <a:p>
             <a:fld id="{5BCAD085-E8A6-8845-BD4E-CB4CCA059FC4}" type="datetimeFigureOut">
               <a:rPr lang="en-US" smtClean="0"/>
-              <a:t>10/19/26</a:t>
+              <a:t>1/27/13</a:t>
             </a:fld>
             <a:endParaRPr lang="en-US"/>
           </a:p>
@@ -3251,7 +3465,7 @@
           <a:p>
             <a:fld id="{C1FF6DA9-008F-8B48-92A6-B652298478BF}" type="slidenum">
               <a:rPr lang="en-US" smtClean="0"/>
-              <a:t>‹Nº›</a:t>
+              <a:t>‹#›</a:t>
             </a:fld>
             <a:endParaRPr lang="en-US"/>
           </a:p>
@@ -3312,9 +3526,10 @@
           </a:lstStyle>
           <a:p>
             <a:r>
-              <a:rPr lang="en-US"/>
+              <a:rPr lang="en-US" smtClean="0"/>
               <a:t>Click to edit Master title style</a:t>
             </a:r>
+            <a:endParaRPr lang="en-US"/>
           </a:p>
         </p:txBody>
       </p:sp>
@@ -3438,7 +3653,7 @@
           <a:p>
             <a:pPr lvl="0"/>
             <a:r>
-              <a:rPr lang="en-US"/>
+              <a:rPr lang="en-US" smtClean="0"/>
               <a:t>Click to edit Master text styles</a:t>
             </a:r>
           </a:p>
@@ -3461,7 +3676,7 @@
           <a:p>
             <a:fld id="{5BCAD085-E8A6-8845-BD4E-CB4CCA059FC4}" type="datetimeFigureOut">
               <a:rPr lang="en-US" smtClean="0"/>
-              <a:t>10/19/26</a:t>
+              <a:t>1/27/13</a:t>
             </a:fld>
             <a:endParaRPr lang="en-US"/>
           </a:p>
@@ -3503,7 +3718,7 @@
           <a:p>
             <a:fld id="{C1FF6DA9-008F-8B48-92A6-B652298478BF}" type="slidenum">
               <a:rPr lang="en-US" smtClean="0"/>
-              <a:t>‹Nº›</a:t>
+              <a:t>‹#›</a:t>
             </a:fld>
             <a:endParaRPr lang="en-US"/>
           </a:p>
@@ -3570,9 +3785,10 @@
           <a:lstStyle/>
           <a:p>
             <a:r>
-              <a:rPr lang="en-US"/>
+              <a:rPr lang="en-US" smtClean="0"/>
               <a:t>Click to edit Master title style</a:t>
             </a:r>
+            <a:endParaRPr lang="en-US"/>
           </a:p>
         </p:txBody>
       </p:sp>
@@ -3603,37 +3819,38 @@
           <a:p>
             <a:pPr lvl="0"/>
             <a:r>
-              <a:rPr lang="en-US"/>
+              <a:rPr lang="en-US" smtClean="0"/>
               <a:t>Click to edit Master text styles</a:t>
             </a:r>
           </a:p>
           <a:p>
             <a:pPr lvl="1"/>
             <a:r>
-              <a:rPr lang="en-US"/>
+              <a:rPr lang="en-US" smtClean="0"/>
               <a:t>Second level</a:t>
             </a:r>
           </a:p>
           <a:p>
             <a:pPr lvl="2"/>
             <a:r>
-              <a:rPr lang="en-US"/>
+              <a:rPr lang="en-US" smtClean="0"/>
               <a:t>Third level</a:t>
             </a:r>
           </a:p>
           <a:p>
             <a:pPr lvl="3"/>
             <a:r>
-              <a:rPr lang="en-US"/>
+              <a:rPr lang="en-US" smtClean="0"/>
               <a:t>Fourth level</a:t>
             </a:r>
           </a:p>
           <a:p>
             <a:pPr lvl="4"/>
             <a:r>
-              <a:rPr lang="en-US"/>
+              <a:rPr lang="en-US" smtClean="0"/>
               <a:t>Fifth level</a:t>
             </a:r>
+            <a:endParaRPr lang="en-US"/>
           </a:p>
         </p:txBody>
       </p:sp>
@@ -3672,7 +3889,7 @@
           <a:p>
             <a:fld id="{5BCAD085-E8A6-8845-BD4E-CB4CCA059FC4}" type="datetimeFigureOut">
               <a:rPr lang="en-US" smtClean="0"/>
-              <a:t>10/19/26</a:t>
+              <a:t>1/27/13</a:t>
             </a:fld>
             <a:endParaRPr lang="en-US"/>
           </a:p>
@@ -3750,7 +3967,7 @@
           <a:p>
             <a:fld id="{C1FF6DA9-008F-8B48-92A6-B652298478BF}" type="slidenum">
               <a:rPr lang="en-US" smtClean="0"/>
-              <a:t>‹Nº›</a:t>
+              <a:t>‹#›</a:t>
             </a:fld>
             <a:endParaRPr lang="en-US"/>
           </a:p>
@@ -4031,12 +4248,12 @@
 </file>
 
 <file path=ppt/slides/slide1.xml><?xml version="1.0" encoding="utf-8"?>
-<p:sld xmlns:a="http://schemas.openxmlformats.org/drawingml/2006/main" xmlns:r="http://schemas.openxmlformats.org/officeDocument/2006/relationships" xmlns:p="http://schemas.openxmlformats.org/presentationml/2006/main">
+<p:sld xmlns:a="http://schemas.openxmlformats.org/drawingml/2006/main" xmlns:p="http://schemas.openxmlformats.org/presentationml/2006/main" xmlns:r="http://schemas.openxmlformats.org/officeDocument/2006/relationships">
   <p:cSld>
     <p:bg>
       <p:bgPr>
         <a:solidFill>
-          <a:srgbClr val="0B132B"/>
+          <a:srgbClr val="0F1016"/>
         </a:solidFill>
         <a:effectLst/>
       </p:bgPr>
@@ -4047,14 +4264,7 @@
         <p:cNvGrpSpPr/>
         <p:nvPr/>
       </p:nvGrpSpPr>
-      <p:grpSpPr>
-        <a:xfrm>
-          <a:off x="0" y="0"/>
-          <a:ext cx="0" cy="0"/>
-          <a:chOff x="0" y="0"/>
-          <a:chExt cx="0" cy="0"/>
-        </a:xfrm>
-      </p:grpSpPr>
+      <p:grpSpPr/>
       <p:sp>
         <p:nvSpPr>
           <p:cNvPr id="2" name="Rectangle 1"/>
@@ -4070,7 +4280,7 @@
             <a:avLst/>
           </a:prstGeom>
           <a:solidFill>
-            <a:srgbClr val="0B132B"/>
+            <a:srgbClr val="0F1016"/>
           </a:solidFill>
           <a:ln>
             <a:noFill/>
@@ -4096,7 +4306,6 @@
           <a:lstStyle/>
           <a:p>
             <a:pPr algn="ctr"/>
-            <a:endParaRPr/>
           </a:p>
         </p:txBody>
       </p:sp>
@@ -4115,7 +4324,7 @@
             <a:avLst/>
           </a:prstGeom>
           <a:solidFill>
-            <a:srgbClr val="2DD4BF"/>
+            <a:srgbClr val="E024A5"/>
           </a:solidFill>
           <a:ln>
             <a:noFill/>
@@ -4141,7 +4350,6 @@
           <a:lstStyle/>
           <a:p>
             <a:pPr algn="ctr"/>
-            <a:endParaRPr/>
           </a:p>
         </p:txBody>
       </p:sp>
@@ -4162,7 +4370,7 @@
           <a:noFill/>
         </p:spPr>
         <p:txBody>
-          <a:bodyPr wrap="square" lIns="36576" tIns="18288" rIns="36576" bIns="18288" anchor="t">
+          <a:bodyPr wrap="square" anchor="t" lIns="36576" rIns="36576" tIns="18288" bIns="18288">
             <a:spAutoFit/>
           </a:bodyPr>
           <a:lstStyle/>
@@ -4171,7 +4379,7 @@
             <a:r>
               <a:rPr sz="1400" b="1" i="0">
                 <a:solidFill>
-                  <a:srgbClr val="2DD4BF"/>
+                  <a:srgbClr val="E024A5"/>
                 </a:solidFill>
                 <a:latin typeface="Calibri"/>
               </a:rPr>
@@ -4197,7 +4405,7 @@
           <a:noFill/>
         </p:spPr>
         <p:txBody>
-          <a:bodyPr wrap="square" lIns="36576" tIns="18288" rIns="36576" bIns="18288" anchor="t">
+          <a:bodyPr wrap="square" anchor="t" lIns="36576" rIns="36576" tIns="18288" bIns="18288">
             <a:spAutoFit/>
           </a:bodyPr>
           <a:lstStyle/>
@@ -4206,7 +4414,7 @@
             <a:r>
               <a:rPr sz="5400" b="1" i="0">
                 <a:solidFill>
-                  <a:srgbClr val="F8FAFC"/>
+                  <a:srgbClr val="FAF5FF"/>
                 </a:solidFill>
                 <a:latin typeface="Calibri"/>
               </a:rPr>
@@ -4232,7 +4440,7 @@
           <a:noFill/>
         </p:spPr>
         <p:txBody>
-          <a:bodyPr wrap="square" lIns="36576" tIns="18288" rIns="36576" bIns="18288" anchor="t">
+          <a:bodyPr wrap="square" anchor="t" lIns="36576" rIns="36576" tIns="18288" bIns="18288">
             <a:spAutoFit/>
           </a:bodyPr>
           <a:lstStyle/>
@@ -4241,7 +4449,7 @@
             <a:r>
               <a:rPr sz="2400" b="0" i="0">
                 <a:solidFill>
-                  <a:srgbClr val="94A3B8"/>
+                  <a:srgbClr val="C4B5FD"/>
                 </a:solidFill>
                 <a:latin typeface="Calibri"/>
               </a:rPr>
@@ -4267,7 +4475,7 @@
             </a:avLst>
           </a:prstGeom>
           <a:solidFill>
-            <a:srgbClr val="1C2541"/>
+            <a:srgbClr val="181926"/>
           </a:solidFill>
           <a:ln>
             <a:noFill/>
@@ -4293,7 +4501,6 @@
           <a:lstStyle/>
           <a:p>
             <a:pPr algn="ctr"/>
-            <a:endParaRPr/>
           </a:p>
         </p:txBody>
       </p:sp>
@@ -4338,7 +4545,7 @@
           <a:noFill/>
         </p:spPr>
         <p:txBody>
-          <a:bodyPr wrap="square" lIns="36576" tIns="18288" rIns="36576" bIns="18288" anchor="t">
+          <a:bodyPr wrap="square" anchor="t" lIns="36576" rIns="36576" tIns="18288" bIns="18288">
             <a:spAutoFit/>
           </a:bodyPr>
           <a:lstStyle/>
@@ -4347,7 +4554,7 @@
             <a:r>
               <a:rPr sz="1300" b="0" i="1">
                 <a:solidFill>
-                  <a:srgbClr val="94A3B8"/>
+                  <a:srgbClr val="C4B5FD"/>
                 </a:solidFill>
                 <a:latin typeface="Calibri"/>
               </a:rPr>
@@ -4373,7 +4580,7 @@
             </a:avLst>
           </a:prstGeom>
           <a:solidFill>
-            <a:srgbClr val="1C2541"/>
+            <a:srgbClr val="181926"/>
           </a:solidFill>
           <a:ln>
             <a:noFill/>
@@ -4399,7 +4606,6 @@
           <a:lstStyle/>
           <a:p>
             <a:pPr algn="ctr"/>
-            <a:endParaRPr/>
           </a:p>
         </p:txBody>
       </p:sp>
@@ -4444,7 +4650,7 @@
           <a:noFill/>
         </p:spPr>
         <p:txBody>
-          <a:bodyPr wrap="square" lIns="36576" tIns="18288" rIns="36576" bIns="18288" anchor="t">
+          <a:bodyPr wrap="square" anchor="t" lIns="36576" rIns="36576" tIns="18288" bIns="18288">
             <a:spAutoFit/>
           </a:bodyPr>
           <a:lstStyle/>
@@ -4453,7 +4659,7 @@
             <a:r>
               <a:rPr sz="1300" b="0" i="1">
                 <a:solidFill>
-                  <a:srgbClr val="94A3B8"/>
+                  <a:srgbClr val="C4B5FD"/>
                 </a:solidFill>
                 <a:latin typeface="Calibri"/>
               </a:rPr>
@@ -4479,7 +4685,7 @@
           <a:noFill/>
         </p:spPr>
         <p:txBody>
-          <a:bodyPr wrap="square" lIns="36576" tIns="18288" rIns="36576" bIns="18288" anchor="t">
+          <a:bodyPr wrap="square" anchor="t" lIns="36576" rIns="36576" tIns="18288" bIns="18288">
             <a:spAutoFit/>
           </a:bodyPr>
           <a:lstStyle/>
@@ -4488,7 +4694,7 @@
             <a:r>
               <a:rPr sz="1300" b="0" i="0">
                 <a:solidFill>
-                  <a:srgbClr val="94A3B8"/>
+                  <a:srgbClr val="C4B5FD"/>
                 </a:solidFill>
                 <a:latin typeface="Calibri"/>
               </a:rPr>
@@ -4506,12 +4712,12 @@
 </file>
 
 <file path=ppt/slides/slide10.xml><?xml version="1.0" encoding="utf-8"?>
-<p:sld xmlns:a="http://schemas.openxmlformats.org/drawingml/2006/main" xmlns:r="http://schemas.openxmlformats.org/officeDocument/2006/relationships" xmlns:p="http://schemas.openxmlformats.org/presentationml/2006/main">
+<p:sld xmlns:a="http://schemas.openxmlformats.org/drawingml/2006/main" xmlns:p="http://schemas.openxmlformats.org/presentationml/2006/main" xmlns:r="http://schemas.openxmlformats.org/officeDocument/2006/relationships">
   <p:cSld>
     <p:bg>
       <p:bgPr>
         <a:solidFill>
-          <a:srgbClr val="0B132B"/>
+          <a:srgbClr val="0F1016"/>
         </a:solidFill>
         <a:effectLst/>
       </p:bgPr>
@@ -4522,14 +4728,7 @@
         <p:cNvGrpSpPr/>
         <p:nvPr/>
       </p:nvGrpSpPr>
-      <p:grpSpPr>
-        <a:xfrm>
-          <a:off x="0" y="0"/>
-          <a:ext cx="0" cy="0"/>
-          <a:chOff x="0" y="0"/>
-          <a:chExt cx="0" cy="0"/>
-        </a:xfrm>
-      </p:grpSpPr>
+      <p:grpSpPr/>
       <p:sp>
         <p:nvSpPr>
           <p:cNvPr id="2" name="Rectangle 1"/>
@@ -4545,7 +4744,7 @@
             <a:avLst/>
           </a:prstGeom>
           <a:solidFill>
-            <a:srgbClr val="2DD4BF"/>
+            <a:srgbClr val="E024A5"/>
           </a:solidFill>
           <a:ln>
             <a:noFill/>
@@ -4571,7 +4770,6 @@
           <a:lstStyle/>
           <a:p>
             <a:pPr algn="ctr"/>
-            <a:endParaRPr/>
           </a:p>
         </p:txBody>
       </p:sp>
@@ -4592,7 +4790,7 @@
           <a:noFill/>
         </p:spPr>
         <p:txBody>
-          <a:bodyPr wrap="square" lIns="36576" tIns="18288" rIns="36576" bIns="18288" anchor="t">
+          <a:bodyPr wrap="square" anchor="t" lIns="36576" rIns="36576" tIns="18288" bIns="18288">
             <a:spAutoFit/>
           </a:bodyPr>
           <a:lstStyle/>
@@ -4601,7 +4799,7 @@
             <a:r>
               <a:rPr sz="1200" b="1" i="0">
                 <a:solidFill>
-                  <a:srgbClr val="2DD4BF"/>
+                  <a:srgbClr val="E024A5"/>
                 </a:solidFill>
                 <a:latin typeface="Calibri"/>
               </a:rPr>
@@ -4627,7 +4825,7 @@
           <a:noFill/>
         </p:spPr>
         <p:txBody>
-          <a:bodyPr wrap="square" lIns="36576" tIns="18288" rIns="36576" bIns="18288" anchor="t">
+          <a:bodyPr wrap="square" anchor="t" lIns="36576" rIns="36576" tIns="18288" bIns="18288">
             <a:spAutoFit/>
           </a:bodyPr>
           <a:lstStyle/>
@@ -4636,7 +4834,7 @@
             <a:r>
               <a:rPr sz="4000" b="1" i="0">
                 <a:solidFill>
-                  <a:srgbClr val="F8FAFC"/>
+                  <a:srgbClr val="FAF5FF"/>
                 </a:solidFill>
                 <a:latin typeface="Calibri"/>
               </a:rPr>
@@ -4662,7 +4860,7 @@
           <a:noFill/>
         </p:spPr>
         <p:txBody>
-          <a:bodyPr wrap="square" lIns="36576" tIns="18288" rIns="36576" bIns="18288" anchor="t">
+          <a:bodyPr wrap="square" anchor="t" lIns="36576" rIns="36576" tIns="18288" bIns="18288">
             <a:spAutoFit/>
           </a:bodyPr>
           <a:lstStyle/>
@@ -4671,7 +4869,7 @@
             <a:r>
               <a:rPr sz="1300" b="0" i="0">
                 <a:solidFill>
-                  <a:srgbClr val="94A3B8"/>
+                  <a:srgbClr val="C4B5FD"/>
                 </a:solidFill>
                 <a:latin typeface="Calibri"/>
               </a:rPr>
@@ -4697,11 +4895,11 @@
             </a:avLst>
           </a:prstGeom>
           <a:solidFill>
-            <a:srgbClr val="1C2541"/>
+            <a:srgbClr val="181926"/>
           </a:solidFill>
           <a:ln w="19050">
             <a:solidFill>
-              <a:srgbClr val="2DD4BF"/>
+              <a:srgbClr val="E024A5"/>
             </a:solidFill>
           </a:ln>
           <a:effectLst/>
@@ -4725,7 +4923,6 @@
           <a:lstStyle/>
           <a:p>
             <a:pPr algn="ctr"/>
-            <a:endParaRPr/>
           </a:p>
         </p:txBody>
       </p:sp>
@@ -4746,7 +4943,7 @@
           <a:noFill/>
         </p:spPr>
         <p:txBody>
-          <a:bodyPr wrap="square" lIns="36576" tIns="18288" rIns="36576" bIns="18288" anchor="t">
+          <a:bodyPr wrap="square" anchor="t" lIns="36576" rIns="36576" tIns="18288" bIns="18288">
             <a:spAutoFit/>
           </a:bodyPr>
           <a:lstStyle/>
@@ -4755,7 +4952,7 @@
             <a:r>
               <a:rPr sz="2600" b="1" i="0">
                 <a:solidFill>
-                  <a:srgbClr val="2DD4BF"/>
+                  <a:srgbClr val="E024A5"/>
                 </a:solidFill>
                 <a:latin typeface="Calibri"/>
               </a:rPr>
@@ -4781,16 +4978,16 @@
           <a:noFill/>
         </p:spPr>
         <p:txBody>
-          <a:bodyPr wrap="square" lIns="36576" tIns="18288" rIns="36576" bIns="18288" anchor="t">
+          <a:bodyPr wrap="square" anchor="t" lIns="36576" rIns="36576" tIns="18288" bIns="18288">
             <a:spAutoFit/>
           </a:bodyPr>
           <a:lstStyle/>
           <a:p>
             <a:pPr algn="l"/>
             <a:r>
-              <a:rPr sz="2200" b="0" i="0">
-                <a:solidFill>
-                  <a:srgbClr val="F8FAFC"/>
+              <a:rPr sz="2100" b="0" i="0">
+                <a:solidFill>
+                  <a:srgbClr val="FAF5FF"/>
                 </a:solidFill>
                 <a:latin typeface="Calibri"/>
               </a:rPr>
@@ -4799,44 +4996,50 @@
           </a:p>
           <a:p>
             <a:pPr algn="l"/>
-            <a:endParaRPr sz="2200" b="0" i="0">
-              <a:solidFill>
-                <a:srgbClr val="F8FAFC"/>
-              </a:solidFill>
-              <a:latin typeface="Calibri"/>
-            </a:endParaRPr>
+            <a:r>
+              <a:rPr sz="2100" b="0" i="0">
+                <a:solidFill>
+                  <a:srgbClr val="FAF5FF"/>
+                </a:solidFill>
+                <a:latin typeface="Calibri"/>
+              </a:rPr>
+              <a:t/>
+            </a:r>
           </a:p>
           <a:p>
             <a:pPr algn="l"/>
             <a:r>
-              <a:rPr sz="2200" b="0" i="0">
-                <a:solidFill>
-                  <a:srgbClr val="F8FAFC"/>
-                </a:solidFill>
-                <a:latin typeface="Calibri"/>
-              </a:rPr>
-              <a:t>▸ Mediciones con termómetro láser y osciloscopio</a:t>
+              <a:rPr sz="2100" b="0" i="0">
+                <a:solidFill>
+                  <a:srgbClr val="FAF5FF"/>
+                </a:solidFill>
+                <a:latin typeface="Calibri"/>
+              </a:rPr>
+              <a:t>▸ Mediciones reales: 682 lecturas, 0.9 A atorado</a:t>
             </a:r>
           </a:p>
           <a:p>
             <a:pPr algn="l"/>
-            <a:endParaRPr sz="2200" b="0" i="0">
-              <a:solidFill>
-                <a:srgbClr val="F8FAFC"/>
-              </a:solidFill>
-              <a:latin typeface="Calibri"/>
-            </a:endParaRPr>
+            <a:r>
+              <a:rPr sz="2100" b="0" i="0">
+                <a:solidFill>
+                  <a:srgbClr val="FAF5FF"/>
+                </a:solidFill>
+                <a:latin typeface="Calibri"/>
+              </a:rPr>
+              <a:t/>
+            </a:r>
           </a:p>
           <a:p>
             <a:pPr algn="l"/>
             <a:r>
-              <a:rPr sz="2200" b="0" i="0">
-                <a:solidFill>
-                  <a:srgbClr val="F8FAFC"/>
-                </a:solidFill>
-                <a:latin typeface="Calibri"/>
-              </a:rPr>
-              <a:t>▸ Comparativa internacional</a:t>
+              <a:rPr sz="2100" b="0" i="0">
+                <a:solidFill>
+                  <a:srgbClr val="FAF5FF"/>
+                </a:solidFill>
+                <a:latin typeface="Calibri"/>
+              </a:rPr>
+              <a:t>▸ Comparativa con MIT y comercial</a:t>
             </a:r>
           </a:p>
         </p:txBody>
@@ -4858,7 +5061,7 @@
             </a:avLst>
           </a:prstGeom>
           <a:solidFill>
-            <a:srgbClr val="243356"/>
+            <a:srgbClr val="2A1B38"/>
           </a:solidFill>
           <a:ln w="19050">
             <a:solidFill>
@@ -4886,7 +5089,6 @@
           <a:lstStyle/>
           <a:p>
             <a:pPr algn="ctr"/>
-            <a:endParaRPr/>
           </a:p>
         </p:txBody>
       </p:sp>
@@ -4907,7 +5109,7 @@
           <a:noFill/>
         </p:spPr>
         <p:txBody>
-          <a:bodyPr wrap="square" lIns="36576" tIns="18288" rIns="36576" bIns="18288" anchor="t">
+          <a:bodyPr wrap="square" anchor="t" lIns="36576" rIns="36576" tIns="18288" bIns="18288">
             <a:spAutoFit/>
           </a:bodyPr>
           <a:lstStyle/>
@@ -4942,7 +5144,7 @@
           <a:noFill/>
         </p:spPr>
         <p:txBody>
-          <a:bodyPr wrap="square" lIns="36576" tIns="18288" rIns="36576" bIns="18288" anchor="t">
+          <a:bodyPr wrap="square" anchor="t" lIns="36576" rIns="36576" tIns="18288" bIns="18288">
             <a:spAutoFit/>
           </a:bodyPr>
           <a:lstStyle/>
@@ -4951,11 +5153,11 @@
             <a:r>
               <a:rPr sz="2000" b="1" i="0">
                 <a:solidFill>
-                  <a:srgbClr val="F8FAFC"/>
-                </a:solidFill>
-                <a:latin typeface="Calibri"/>
-              </a:rPr>
-              <a:t>▸ PCB de potencia definitiva</a:t>
+                  <a:srgbClr val="FAF5FF"/>
+                </a:solidFill>
+                <a:latin typeface="Calibri"/>
+              </a:rPr>
+              <a:t>▸ PCB de potencia definitiva (25 A)</a:t>
             </a:r>
           </a:p>
           <a:p>
@@ -4963,7 +5165,7 @@
             <a:r>
               <a:rPr sz="2000" b="1" i="0">
                 <a:solidFill>
-                  <a:srgbClr val="F8FAFC"/>
+                  <a:srgbClr val="FAF5FF"/>
                 </a:solidFill>
                 <a:latin typeface="Calibri"/>
               </a:rPr>
@@ -4975,7 +5177,7 @@
             <a:r>
               <a:rPr sz="2000" b="1" i="0">
                 <a:solidFill>
-                  <a:srgbClr val="F8FAFC"/>
+                  <a:srgbClr val="FAF5FF"/>
                 </a:solidFill>
                 <a:latin typeface="Calibri"/>
               </a:rPr>
@@ -4992,7 +5194,7 @@
         </p:nvSpPr>
         <p:spPr>
           <a:xfrm>
-            <a:off x="6510528" y="3840480"/>
+            <a:off x="6583680" y="4114800"/>
             <a:ext cx="4480560" cy="1371600"/>
           </a:xfrm>
           <a:prstGeom prst="roundRect">
@@ -5001,7 +5203,7 @@
             </a:avLst>
           </a:prstGeom>
           <a:solidFill>
-            <a:srgbClr val="1C2541"/>
+            <a:srgbClr val="181926"/>
           </a:solidFill>
           <a:ln>
             <a:noFill/>
@@ -5027,7 +5229,6 @@
           <a:lstStyle/>
           <a:p>
             <a:pPr algn="ctr"/>
-            <a:endParaRPr/>
           </a:p>
         </p:txBody>
       </p:sp>
@@ -5047,7 +5248,7 @@
         </p:blipFill>
         <p:spPr>
           <a:xfrm>
-            <a:off x="7840166" y="3895344"/>
+            <a:off x="7913318" y="4169664"/>
             <a:ext cx="1821284" cy="1261872"/>
           </a:xfrm>
           <a:prstGeom prst="rect">
@@ -5063,7 +5264,7 @@
         </p:nvSpPr>
         <p:spPr>
           <a:xfrm>
-            <a:off x="6510528" y="5230368"/>
+            <a:off x="6583680" y="5504688"/>
             <a:ext cx="4480560" cy="256032"/>
           </a:xfrm>
           <a:prstGeom prst="rect">
@@ -5072,63 +5273,21 @@
           <a:noFill/>
         </p:spPr>
         <p:txBody>
-          <a:bodyPr wrap="square" lIns="36576" tIns="18288" rIns="36576" bIns="18288" anchor="t">
+          <a:bodyPr wrap="square" anchor="t" lIns="36576" rIns="36576" tIns="18288" bIns="18288">
             <a:spAutoFit/>
           </a:bodyPr>
           <a:lstStyle/>
           <a:p>
             <a:pPr algn="ctr"/>
             <a:r>
-              <a:rPr sz="1300" b="0" i="1" dirty="0" err="1">
-                <a:solidFill>
-                  <a:srgbClr val="94A3B8"/>
-                </a:solidFill>
-                <a:latin typeface="Calibri"/>
-              </a:rPr>
-              <a:t>Diseño</a:t>
-            </a:r>
-            <a:r>
-              <a:rPr sz="1300" b="0" i="1" dirty="0">
-                <a:solidFill>
-                  <a:srgbClr val="94A3B8"/>
-                </a:solidFill>
-                <a:latin typeface="Calibri"/>
-              </a:rPr>
-              <a:t> PCB de </a:t>
-            </a:r>
-            <a:r>
-              <a:rPr sz="1300" b="0" i="1" dirty="0" err="1">
-                <a:solidFill>
-                  <a:srgbClr val="94A3B8"/>
-                </a:solidFill>
-                <a:latin typeface="Calibri"/>
-              </a:rPr>
-              <a:t>potencia</a:t>
-            </a:r>
-            <a:r>
-              <a:rPr sz="1300" b="0" i="1" dirty="0">
-                <a:solidFill>
-                  <a:srgbClr val="94A3B8"/>
-                </a:solidFill>
-                <a:latin typeface="Calibri"/>
-              </a:rPr>
-              <a:t> para 32 </a:t>
-            </a:r>
-            <a:r>
-              <a:rPr sz="1300" b="0" i="1" dirty="0" err="1">
-                <a:solidFill>
-                  <a:srgbClr val="94A3B8"/>
-                </a:solidFill>
-                <a:latin typeface="Calibri"/>
-              </a:rPr>
-              <a:t>motores</a:t>
-            </a:r>
-            <a:endParaRPr sz="1300" b="0" i="1" dirty="0">
-              <a:solidFill>
-                <a:srgbClr val="94A3B8"/>
-              </a:solidFill>
-              <a:latin typeface="Calibri"/>
-            </a:endParaRPr>
+              <a:rPr sz="1300" b="0" i="1">
+                <a:solidFill>
+                  <a:srgbClr val="C4B5FD"/>
+                </a:solidFill>
+                <a:latin typeface="Calibri"/>
+              </a:rPr>
+              <a:t>Diseño PCB de potencia para 32 motores</a:t>
+            </a:r>
           </a:p>
         </p:txBody>
       </p:sp>
@@ -5149,7 +5308,7 @@
             </a:avLst>
           </a:prstGeom>
           <a:solidFill>
-            <a:srgbClr val="1C2541"/>
+            <a:srgbClr val="181926"/>
           </a:solidFill>
           <a:ln>
             <a:noFill/>
@@ -5175,7 +5334,6 @@
           <a:lstStyle/>
           <a:p>
             <a:pPr algn="ctr"/>
-            <a:endParaRPr/>
           </a:p>
         </p:txBody>
       </p:sp>
@@ -5196,7 +5354,7 @@
           <a:noFill/>
         </p:spPr>
         <p:txBody>
-          <a:bodyPr wrap="square" lIns="36576" tIns="18288" rIns="36576" bIns="18288" anchor="t">
+          <a:bodyPr wrap="square" anchor="t" lIns="36576" rIns="36576" tIns="18288" bIns="18288">
             <a:spAutoFit/>
           </a:bodyPr>
           <a:lstStyle/>
@@ -5205,7 +5363,7 @@
             <a:r>
               <a:rPr sz="1800" b="1" i="0">
                 <a:solidFill>
-                  <a:srgbClr val="2DD4BF"/>
+                  <a:srgbClr val="E024A5"/>
                 </a:solidFill>
                 <a:latin typeface="Calibri"/>
               </a:rPr>
@@ -5231,7 +5389,7 @@
           <a:noFill/>
         </p:spPr>
         <p:txBody>
-          <a:bodyPr wrap="square" lIns="36576" tIns="18288" rIns="36576" bIns="18288" anchor="t">
+          <a:bodyPr wrap="square" anchor="t" lIns="36576" rIns="36576" tIns="18288" bIns="18288">
             <a:spAutoFit/>
           </a:bodyPr>
           <a:lstStyle/>
@@ -5240,7 +5398,7 @@
             <a:r>
               <a:rPr sz="2200" b="1" i="0">
                 <a:solidFill>
-                  <a:srgbClr val="F8FAFC"/>
+                  <a:srgbClr val="FAF5FF"/>
                 </a:solidFill>
                 <a:latin typeface="Calibri"/>
               </a:rPr>
@@ -5258,12 +5416,12 @@
 </file>
 
 <file path=ppt/slides/slide2.xml><?xml version="1.0" encoding="utf-8"?>
-<p:sld xmlns:a="http://schemas.openxmlformats.org/drawingml/2006/main" xmlns:r="http://schemas.openxmlformats.org/officeDocument/2006/relationships" xmlns:p="http://schemas.openxmlformats.org/presentationml/2006/main">
+<p:sld xmlns:a="http://schemas.openxmlformats.org/drawingml/2006/main" xmlns:p="http://schemas.openxmlformats.org/presentationml/2006/main" xmlns:r="http://schemas.openxmlformats.org/officeDocument/2006/relationships">
   <p:cSld>
     <p:bg>
       <p:bgPr>
         <a:solidFill>
-          <a:srgbClr val="0B132B"/>
+          <a:srgbClr val="0F1016"/>
         </a:solidFill>
         <a:effectLst/>
       </p:bgPr>
@@ -5274,14 +5432,7 @@
         <p:cNvGrpSpPr/>
         <p:nvPr/>
       </p:nvGrpSpPr>
-      <p:grpSpPr>
-        <a:xfrm>
-          <a:off x="0" y="0"/>
-          <a:ext cx="0" cy="0"/>
-          <a:chOff x="0" y="0"/>
-          <a:chExt cx="0" cy="0"/>
-        </a:xfrm>
-      </p:grpSpPr>
+      <p:grpSpPr/>
       <p:sp>
         <p:nvSpPr>
           <p:cNvPr id="2" name="Rectangle 1"/>
@@ -5297,7 +5448,7 @@
             <a:avLst/>
           </a:prstGeom>
           <a:solidFill>
-            <a:srgbClr val="2DD4BF"/>
+            <a:srgbClr val="E024A5"/>
           </a:solidFill>
           <a:ln>
             <a:noFill/>
@@ -5323,7 +5474,6 @@
           <a:lstStyle/>
           <a:p>
             <a:pPr algn="ctr"/>
-            <a:endParaRPr/>
           </a:p>
         </p:txBody>
       </p:sp>
@@ -5344,16 +5494,16 @@
           <a:noFill/>
         </p:spPr>
         <p:txBody>
-          <a:bodyPr wrap="square" lIns="36576" tIns="18288" rIns="36576" bIns="18288" anchor="t">
+          <a:bodyPr wrap="square" anchor="t" lIns="36576" rIns="36576" tIns="18288" bIns="18288">
             <a:spAutoFit/>
           </a:bodyPr>
           <a:lstStyle/>
           <a:p>
             <a:pPr algn="l"/>
             <a:r>
-              <a:rPr sz="1200" b="1" i="0" dirty="0">
-                <a:solidFill>
-                  <a:srgbClr val="2DD4BF"/>
+              <a:rPr sz="1200" b="1" i="0">
+                <a:solidFill>
+                  <a:srgbClr val="E024A5"/>
                 </a:solidFill>
                 <a:latin typeface="Calibri"/>
               </a:rPr>
@@ -5371,7 +5521,7 @@
         <p:spPr>
           <a:xfrm>
             <a:off x="731520" y="621792"/>
-            <a:ext cx="11155680" cy="652486"/>
+            <a:ext cx="10789920" cy="777240"/>
           </a:xfrm>
           <a:prstGeom prst="rect">
             <a:avLst/>
@@ -5379,108 +5529,21 @@
           <a:noFill/>
         </p:spPr>
         <p:txBody>
-          <a:bodyPr wrap="square" lIns="36576" tIns="18288" rIns="36576" bIns="18288" anchor="t">
+          <a:bodyPr wrap="square" anchor="t" lIns="36576" rIns="36576" tIns="18288" bIns="18288">
             <a:spAutoFit/>
           </a:bodyPr>
           <a:lstStyle/>
           <a:p>
             <a:pPr algn="l"/>
             <a:r>
-              <a:rPr sz="4000" b="1" i="0" dirty="0">
-                <a:solidFill>
-                  <a:srgbClr val="F8FAFC"/>
-                </a:solidFill>
-                <a:latin typeface="Calibri"/>
-              </a:rPr>
-              <a:t>Las </a:t>
-            </a:r>
-            <a:r>
-              <a:rPr sz="4000" b="1" i="0" dirty="0" err="1">
-                <a:solidFill>
-                  <a:srgbClr val="F8FAFC"/>
-                </a:solidFill>
-                <a:latin typeface="Calibri"/>
-              </a:rPr>
-              <a:t>paredes</a:t>
-            </a:r>
-            <a:r>
-              <a:rPr sz="4000" b="1" i="0" dirty="0">
-                <a:solidFill>
-                  <a:srgbClr val="F8FAFC"/>
-                </a:solidFill>
-                <a:latin typeface="Calibri"/>
-              </a:rPr>
-              <a:t> </a:t>
-            </a:r>
-            <a:r>
-              <a:rPr sz="4000" b="1" i="0" dirty="0" err="1">
-                <a:solidFill>
-                  <a:srgbClr val="F8FAFC"/>
-                </a:solidFill>
-                <a:latin typeface="Calibri"/>
-              </a:rPr>
-              <a:t>interactivas</a:t>
-            </a:r>
-            <a:r>
-              <a:rPr sz="4000" b="1" i="0" dirty="0">
-                <a:solidFill>
-                  <a:srgbClr val="F8FAFC"/>
-                </a:solidFill>
-                <a:latin typeface="Calibri"/>
-              </a:rPr>
-              <a:t> </a:t>
-            </a:r>
-            <a:r>
-              <a:rPr sz="4000" b="1" i="0" dirty="0" err="1">
-                <a:solidFill>
-                  <a:srgbClr val="F8FAFC"/>
-                </a:solidFill>
-                <a:latin typeface="Calibri"/>
-              </a:rPr>
-              <a:t>cuestan</a:t>
-            </a:r>
-            <a:r>
-              <a:rPr sz="4000" b="1" i="0" dirty="0">
-                <a:solidFill>
-                  <a:srgbClr val="F8FAFC"/>
-                </a:solidFill>
-                <a:latin typeface="Calibri"/>
-              </a:rPr>
-              <a:t> </a:t>
-            </a:r>
-            <a:r>
-              <a:rPr lang="es-419" sz="4000" b="1" i="0" dirty="0">
-                <a:solidFill>
-                  <a:srgbClr val="F8FAFC"/>
-                </a:solidFill>
-                <a:latin typeface="Calibri"/>
-              </a:rPr>
-              <a:t>miles</a:t>
-            </a:r>
-            <a:r>
-              <a:rPr sz="4000" b="1" i="0" dirty="0">
-                <a:solidFill>
-                  <a:srgbClr val="F8FAFC"/>
-                </a:solidFill>
-                <a:latin typeface="Calibri"/>
-              </a:rPr>
-              <a:t> y se </a:t>
-            </a:r>
-            <a:r>
-              <a:rPr sz="4000" b="1" i="0" dirty="0" err="1">
-                <a:solidFill>
-                  <a:srgbClr val="F8FAFC"/>
-                </a:solidFill>
-                <a:latin typeface="Calibri"/>
-              </a:rPr>
-              <a:t>queman</a:t>
-            </a:r>
-            <a:endParaRPr sz="4000" b="1" i="0" dirty="0">
-              <a:solidFill>
-                <a:srgbClr val="F8FAFC"/>
-              </a:solidFill>
-              <a:latin typeface="Calibri"/>
-            </a:endParaRPr>
+              <a:rPr sz="4000" b="1" i="0">
+                <a:solidFill>
+                  <a:srgbClr val="FAF5FF"/>
+                </a:solidFill>
+                <a:latin typeface="Calibri"/>
+              </a:rPr>
+              <a:t>Las paredes interactivas cuestan millones y se queman</a:t>
+            </a:r>
           </a:p>
         </p:txBody>
       </p:sp>
@@ -5501,7 +5564,7 @@
           <a:noFill/>
         </p:spPr>
         <p:txBody>
-          <a:bodyPr wrap="square" lIns="36576" tIns="18288" rIns="36576" bIns="18288" anchor="t">
+          <a:bodyPr wrap="square" anchor="t" lIns="36576" rIns="36576" tIns="18288" bIns="18288">
             <a:spAutoFit/>
           </a:bodyPr>
           <a:lstStyle/>
@@ -5510,7 +5573,7 @@
             <a:r>
               <a:rPr sz="1300" b="0" i="0">
                 <a:solidFill>
-                  <a:srgbClr val="94A3B8"/>
+                  <a:srgbClr val="C4B5FD"/>
                 </a:solidFill>
                 <a:latin typeface="Calibri"/>
               </a:rPr>
@@ -5536,7 +5599,7 @@
             </a:avLst>
           </a:prstGeom>
           <a:solidFill>
-            <a:srgbClr val="1C2541"/>
+            <a:srgbClr val="181926"/>
           </a:solidFill>
           <a:ln>
             <a:noFill/>
@@ -5562,7 +5625,6 @@
           <a:lstStyle/>
           <a:p>
             <a:pPr algn="ctr"/>
-            <a:endParaRPr/>
           </a:p>
         </p:txBody>
       </p:sp>
@@ -5607,7 +5669,7 @@
           <a:noFill/>
         </p:spPr>
         <p:txBody>
-          <a:bodyPr wrap="square" lIns="36576" tIns="18288" rIns="36576" bIns="18288" anchor="t">
+          <a:bodyPr wrap="square" anchor="t" lIns="36576" rIns="36576" tIns="18288" bIns="18288">
             <a:spAutoFit/>
           </a:bodyPr>
           <a:lstStyle/>
@@ -5616,7 +5678,7 @@
             <a:r>
               <a:rPr sz="1300" b="0" i="1">
                 <a:solidFill>
-                  <a:srgbClr val="94A3B8"/>
+                  <a:srgbClr val="C4B5FD"/>
                 </a:solidFill>
                 <a:latin typeface="Calibri"/>
               </a:rPr>
@@ -5642,11 +5704,11 @@
             </a:avLst>
           </a:prstGeom>
           <a:solidFill>
-            <a:srgbClr val="1C2541"/>
+            <a:srgbClr val="181926"/>
           </a:solidFill>
           <a:ln w="19050">
             <a:solidFill>
-              <a:srgbClr val="F87171"/>
+              <a:srgbClr val="FB7185"/>
             </a:solidFill>
           </a:ln>
           <a:effectLst/>
@@ -5670,7 +5732,6 @@
           <a:lstStyle/>
           <a:p>
             <a:pPr algn="ctr"/>
-            <a:endParaRPr/>
           </a:p>
         </p:txBody>
       </p:sp>
@@ -5691,7 +5752,7 @@
           <a:noFill/>
         </p:spPr>
         <p:txBody>
-          <a:bodyPr wrap="square" lIns="36576" tIns="18288" rIns="36576" bIns="18288" anchor="t">
+          <a:bodyPr wrap="square" anchor="t" lIns="36576" rIns="36576" tIns="18288" bIns="18288">
             <a:spAutoFit/>
           </a:bodyPr>
           <a:lstStyle/>
@@ -5700,7 +5761,7 @@
             <a:r>
               <a:rPr sz="2000" b="1" i="0">
                 <a:solidFill>
-                  <a:srgbClr val="F87171"/>
+                  <a:srgbClr val="FB7185"/>
                 </a:solidFill>
                 <a:latin typeface="Calibri"/>
               </a:rPr>
@@ -5726,7 +5787,7 @@
           <a:noFill/>
         </p:spPr>
         <p:txBody>
-          <a:bodyPr wrap="square" lIns="36576" tIns="18288" rIns="36576" bIns="18288" anchor="t">
+          <a:bodyPr wrap="square" anchor="t" lIns="36576" rIns="36576" tIns="18288" bIns="18288">
             <a:spAutoFit/>
           </a:bodyPr>
           <a:lstStyle/>
@@ -5735,7 +5796,7 @@
             <a:r>
               <a:rPr sz="1500" b="0" i="0">
                 <a:solidFill>
-                  <a:srgbClr val="94A3B8"/>
+                  <a:srgbClr val="C4B5FD"/>
                 </a:solidFill>
                 <a:latin typeface="Calibri"/>
               </a:rPr>
@@ -5761,11 +5822,11 @@
             </a:avLst>
           </a:prstGeom>
           <a:solidFill>
-            <a:srgbClr val="1C2541"/>
+            <a:srgbClr val="181926"/>
           </a:solidFill>
           <a:ln w="19050">
             <a:solidFill>
-              <a:srgbClr val="F87171"/>
+              <a:srgbClr val="FB7185"/>
             </a:solidFill>
           </a:ln>
           <a:effectLst/>
@@ -5789,7 +5850,6 @@
           <a:lstStyle/>
           <a:p>
             <a:pPr algn="ctr"/>
-            <a:endParaRPr/>
           </a:p>
         </p:txBody>
       </p:sp>
@@ -5810,7 +5870,7 @@
           <a:noFill/>
         </p:spPr>
         <p:txBody>
-          <a:bodyPr wrap="square" lIns="36576" tIns="18288" rIns="36576" bIns="18288" anchor="t">
+          <a:bodyPr wrap="square" anchor="t" lIns="36576" rIns="36576" tIns="18288" bIns="18288">
             <a:spAutoFit/>
           </a:bodyPr>
           <a:lstStyle/>
@@ -5819,7 +5879,7 @@
             <a:r>
               <a:rPr sz="2000" b="1" i="0">
                 <a:solidFill>
-                  <a:srgbClr val="F87171"/>
+                  <a:srgbClr val="FB7185"/>
                 </a:solidFill>
                 <a:latin typeface="Calibri"/>
               </a:rPr>
@@ -5836,7 +5896,7 @@
         </p:nvSpPr>
         <p:spPr>
           <a:xfrm>
-            <a:off x="7178040" y="2276856"/>
+            <a:off x="7178040" y="2130552"/>
             <a:ext cx="2103120" cy="365760"/>
           </a:xfrm>
           <a:prstGeom prst="rect">
@@ -5845,45 +5905,21 @@
           <a:noFill/>
         </p:spPr>
         <p:txBody>
-          <a:bodyPr wrap="square" lIns="36576" tIns="18288" rIns="36576" bIns="18288" anchor="t">
+          <a:bodyPr wrap="square" anchor="t" lIns="36576" rIns="36576" tIns="18288" bIns="18288">
             <a:spAutoFit/>
           </a:bodyPr>
           <a:lstStyle/>
           <a:p>
             <a:pPr algn="ctr"/>
             <a:r>
-              <a:rPr sz="1500" b="0" i="0" dirty="0" err="1">
-                <a:solidFill>
-                  <a:srgbClr val="94A3B8"/>
-                </a:solidFill>
-                <a:latin typeface="Calibri"/>
-              </a:rPr>
-              <a:t>Mecánica</a:t>
-            </a:r>
-            <a:r>
-              <a:rPr sz="1500" b="0" i="0" dirty="0">
-                <a:solidFill>
-                  <a:srgbClr val="94A3B8"/>
-                </a:solidFill>
-                <a:latin typeface="Calibri"/>
-              </a:rPr>
-              <a:t> </a:t>
-            </a:r>
-            <a:r>
-              <a:rPr sz="1500" b="0" i="0" dirty="0" err="1">
-                <a:solidFill>
-                  <a:srgbClr val="94A3B8"/>
-                </a:solidFill>
-                <a:latin typeface="Calibri"/>
-              </a:rPr>
-              <a:t>inaccesible</a:t>
-            </a:r>
-            <a:endParaRPr sz="1500" b="0" i="0" dirty="0">
-              <a:solidFill>
-                <a:srgbClr val="94A3B8"/>
-              </a:solidFill>
-              <a:latin typeface="Calibri"/>
-            </a:endParaRPr>
+              <a:rPr sz="1500" b="0" i="0">
+                <a:solidFill>
+                  <a:srgbClr val="C4B5FD"/>
+                </a:solidFill>
+                <a:latin typeface="Calibri"/>
+              </a:rPr>
+              <a:t>Mecánica inaccesible</a:t>
+            </a:r>
           </a:p>
         </p:txBody>
       </p:sp>
@@ -5904,11 +5940,11 @@
             </a:avLst>
           </a:prstGeom>
           <a:solidFill>
-            <a:srgbClr val="1C2541"/>
+            <a:srgbClr val="181926"/>
           </a:solidFill>
           <a:ln w="19050">
             <a:solidFill>
-              <a:srgbClr val="F87171"/>
+              <a:srgbClr val="FB7185"/>
             </a:solidFill>
           </a:ln>
           <a:effectLst/>
@@ -5932,7 +5968,6 @@
           <a:lstStyle/>
           <a:p>
             <a:pPr algn="ctr"/>
-            <a:endParaRPr/>
           </a:p>
         </p:txBody>
       </p:sp>
@@ -5953,7 +5988,7 @@
           <a:noFill/>
         </p:spPr>
         <p:txBody>
-          <a:bodyPr wrap="square" lIns="36576" tIns="18288" rIns="36576" bIns="18288" anchor="t">
+          <a:bodyPr wrap="square" anchor="t" lIns="36576" rIns="36576" tIns="18288" bIns="18288">
             <a:spAutoFit/>
           </a:bodyPr>
           <a:lstStyle/>
@@ -5962,7 +5997,7 @@
             <a:r>
               <a:rPr sz="2000" b="1" i="0">
                 <a:solidFill>
-                  <a:srgbClr val="F87171"/>
+                  <a:srgbClr val="FB7185"/>
                 </a:solidFill>
                 <a:latin typeface="Calibri"/>
               </a:rPr>
@@ -5979,7 +6014,7 @@
         </p:nvSpPr>
         <p:spPr>
           <a:xfrm>
-            <a:off x="9418320" y="2276856"/>
+            <a:off x="9418320" y="2130552"/>
             <a:ext cx="2103120" cy="365760"/>
           </a:xfrm>
           <a:prstGeom prst="rect">
@@ -5988,7 +6023,7 @@
           <a:noFill/>
         </p:spPr>
         <p:txBody>
-          <a:bodyPr wrap="square" lIns="36576" tIns="18288" rIns="36576" bIns="18288" anchor="t">
+          <a:bodyPr wrap="square" anchor="t" lIns="36576" rIns="36576" tIns="18288" bIns="18288">
             <a:spAutoFit/>
           </a:bodyPr>
           <a:lstStyle/>
@@ -5997,7 +6032,7 @@
             <a:r>
               <a:rPr sz="1500" b="0" i="0">
                 <a:solidFill>
-                  <a:srgbClr val="94A3B8"/>
+                  <a:srgbClr val="C4B5FD"/>
                 </a:solidFill>
                 <a:latin typeface="Calibri"/>
               </a:rPr>
@@ -6023,11 +6058,11 @@
             </a:avLst>
           </a:prstGeom>
           <a:solidFill>
-            <a:srgbClr val="243356"/>
+            <a:srgbClr val="2A1B38"/>
           </a:solidFill>
           <a:ln w="19050">
             <a:solidFill>
-              <a:srgbClr val="2DD4BF"/>
+              <a:srgbClr val="E024A5"/>
             </a:solidFill>
           </a:ln>
           <a:effectLst/>
@@ -6051,7 +6086,6 @@
           <a:lstStyle/>
           <a:p>
             <a:pPr algn="ctr"/>
-            <a:endParaRPr/>
           </a:p>
         </p:txBody>
       </p:sp>
@@ -6072,7 +6106,7 @@
           <a:noFill/>
         </p:spPr>
         <p:txBody>
-          <a:bodyPr wrap="square" lIns="36576" tIns="18288" rIns="36576" bIns="18288" anchor="t">
+          <a:bodyPr wrap="square" anchor="t" lIns="36576" rIns="36576" tIns="18288" bIns="18288">
             <a:spAutoFit/>
           </a:bodyPr>
           <a:lstStyle/>
@@ -6081,7 +6115,7 @@
             <a:r>
               <a:rPr sz="2200" b="1" i="0">
                 <a:solidFill>
-                  <a:srgbClr val="F8FAFC"/>
+                  <a:srgbClr val="FAF5FF"/>
                 </a:solidFill>
                 <a:latin typeface="Calibri"/>
               </a:rPr>
@@ -6107,7 +6141,7 @@
           <a:noFill/>
         </p:spPr>
         <p:txBody>
-          <a:bodyPr wrap="square" lIns="36576" tIns="18288" rIns="36576" bIns="18288" anchor="t">
+          <a:bodyPr wrap="square" anchor="t" lIns="36576" rIns="36576" tIns="18288" bIns="18288">
             <a:spAutoFit/>
           </a:bodyPr>
           <a:lstStyle/>
@@ -6116,7 +6150,7 @@
             <a:r>
               <a:rPr sz="1800" b="1" i="0">
                 <a:solidFill>
-                  <a:srgbClr val="2DD4BF"/>
+                  <a:srgbClr val="E024A5"/>
                 </a:solidFill>
                 <a:latin typeface="Calibri"/>
               </a:rPr>
@@ -6142,7 +6176,7 @@
           <a:noFill/>
         </p:spPr>
         <p:txBody>
-          <a:bodyPr wrap="square" lIns="36576" tIns="18288" rIns="36576" bIns="18288" anchor="t">
+          <a:bodyPr wrap="square" anchor="t" lIns="36576" rIns="36576" tIns="18288" bIns="18288">
             <a:spAutoFit/>
           </a:bodyPr>
           <a:lstStyle/>
@@ -6151,7 +6185,7 @@
             <a:r>
               <a:rPr sz="1800" b="1" i="0">
                 <a:solidFill>
-                  <a:srgbClr val="2DD4BF"/>
+                  <a:srgbClr val="E024A5"/>
                 </a:solidFill>
                 <a:latin typeface="Calibri"/>
               </a:rPr>
@@ -6177,7 +6211,7 @@
           <a:noFill/>
         </p:spPr>
         <p:txBody>
-          <a:bodyPr wrap="square" lIns="36576" tIns="18288" rIns="36576" bIns="18288" anchor="t">
+          <a:bodyPr wrap="square" anchor="t" lIns="36576" rIns="36576" tIns="18288" bIns="18288">
             <a:spAutoFit/>
           </a:bodyPr>
           <a:lstStyle/>
@@ -6186,7 +6220,7 @@
             <a:r>
               <a:rPr sz="1800" b="1" i="0">
                 <a:solidFill>
-                  <a:srgbClr val="2DD4BF"/>
+                  <a:srgbClr val="E024A5"/>
                 </a:solidFill>
                 <a:latin typeface="Calibri"/>
               </a:rPr>
@@ -6212,7 +6246,7 @@
             </a:avLst>
           </a:prstGeom>
           <a:solidFill>
-            <a:srgbClr val="1C2541"/>
+            <a:srgbClr val="181926"/>
           </a:solidFill>
           <a:ln>
             <a:noFill/>
@@ -6238,7 +6272,6 @@
           <a:lstStyle/>
           <a:p>
             <a:pPr algn="ctr"/>
-            <a:endParaRPr/>
           </a:p>
         </p:txBody>
       </p:sp>
@@ -6259,7 +6292,7 @@
           <a:noFill/>
         </p:spPr>
         <p:txBody>
-          <a:bodyPr wrap="square" lIns="36576" tIns="18288" rIns="36576" bIns="18288" anchor="t">
+          <a:bodyPr wrap="square" anchor="t" lIns="36576" rIns="36576" tIns="18288" bIns="18288">
             <a:spAutoFit/>
           </a:bodyPr>
           <a:lstStyle/>
@@ -6294,7 +6327,7 @@
           <a:noFill/>
         </p:spPr>
         <p:txBody>
-          <a:bodyPr wrap="square" lIns="36576" tIns="18288" rIns="36576" bIns="18288" anchor="t">
+          <a:bodyPr wrap="square" anchor="t" lIns="36576" rIns="36576" tIns="18288" bIns="18288">
             <a:spAutoFit/>
           </a:bodyPr>
           <a:lstStyle/>
@@ -6303,7 +6336,7 @@
             <a:r>
               <a:rPr sz="1400" b="0" i="0">
                 <a:solidFill>
-                  <a:srgbClr val="94A3B8"/>
+                  <a:srgbClr val="C4B5FD"/>
                 </a:solidFill>
                 <a:latin typeface="Calibri"/>
               </a:rPr>
@@ -6321,12 +6354,12 @@
 </file>
 
 <file path=ppt/slides/slide3.xml><?xml version="1.0" encoding="utf-8"?>
-<p:sld xmlns:a="http://schemas.openxmlformats.org/drawingml/2006/main" xmlns:r="http://schemas.openxmlformats.org/officeDocument/2006/relationships" xmlns:p="http://schemas.openxmlformats.org/presentationml/2006/main">
+<p:sld xmlns:a="http://schemas.openxmlformats.org/drawingml/2006/main" xmlns:p="http://schemas.openxmlformats.org/presentationml/2006/main" xmlns:r="http://schemas.openxmlformats.org/officeDocument/2006/relationships">
   <p:cSld>
     <p:bg>
       <p:bgPr>
         <a:solidFill>
-          <a:srgbClr val="0B132B"/>
+          <a:srgbClr val="0F1016"/>
         </a:solidFill>
         <a:effectLst/>
       </p:bgPr>
@@ -6337,14 +6370,7 @@
         <p:cNvGrpSpPr/>
         <p:nvPr/>
       </p:nvGrpSpPr>
-      <p:grpSpPr>
-        <a:xfrm>
-          <a:off x="0" y="0"/>
-          <a:ext cx="0" cy="0"/>
-          <a:chOff x="0" y="0"/>
-          <a:chExt cx="0" cy="0"/>
-        </a:xfrm>
-      </p:grpSpPr>
+      <p:grpSpPr/>
       <p:sp>
         <p:nvSpPr>
           <p:cNvPr id="2" name="Rectangle 1"/>
@@ -6360,7 +6386,7 @@
             <a:avLst/>
           </a:prstGeom>
           <a:solidFill>
-            <a:srgbClr val="2DD4BF"/>
+            <a:srgbClr val="E024A5"/>
           </a:solidFill>
           <a:ln>
             <a:noFill/>
@@ -6386,7 +6412,6 @@
           <a:lstStyle/>
           <a:p>
             <a:pPr algn="ctr"/>
-            <a:endParaRPr/>
           </a:p>
         </p:txBody>
       </p:sp>
@@ -6407,7 +6432,7 @@
           <a:noFill/>
         </p:spPr>
         <p:txBody>
-          <a:bodyPr wrap="square" lIns="36576" tIns="18288" rIns="36576" bIns="18288" anchor="t">
+          <a:bodyPr wrap="square" anchor="t" lIns="36576" rIns="36576" tIns="18288" bIns="18288">
             <a:spAutoFit/>
           </a:bodyPr>
           <a:lstStyle/>
@@ -6416,7 +6441,7 @@
             <a:r>
               <a:rPr sz="1200" b="1" i="0">
                 <a:solidFill>
-                  <a:srgbClr val="2DD4BF"/>
+                  <a:srgbClr val="E024A5"/>
                 </a:solidFill>
                 <a:latin typeface="Calibri"/>
               </a:rPr>
@@ -6442,7 +6467,7 @@
           <a:noFill/>
         </p:spPr>
         <p:txBody>
-          <a:bodyPr wrap="square" lIns="36576" tIns="18288" rIns="36576" bIns="18288" anchor="t">
+          <a:bodyPr wrap="square" anchor="t" lIns="36576" rIns="36576" tIns="18288" bIns="18288">
             <a:spAutoFit/>
           </a:bodyPr>
           <a:lstStyle/>
@@ -6451,7 +6476,7 @@
             <a:r>
               <a:rPr sz="4000" b="1" i="0">
                 <a:solidFill>
-                  <a:srgbClr val="F8FAFC"/>
+                  <a:srgbClr val="FAF5FF"/>
                 </a:solidFill>
                 <a:latin typeface="Calibri"/>
               </a:rPr>
@@ -6477,7 +6502,7 @@
           <a:noFill/>
         </p:spPr>
         <p:txBody>
-          <a:bodyPr wrap="square" lIns="36576" tIns="18288" rIns="36576" bIns="18288" anchor="t">
+          <a:bodyPr wrap="square" anchor="t" lIns="36576" rIns="36576" tIns="18288" bIns="18288">
             <a:spAutoFit/>
           </a:bodyPr>
           <a:lstStyle/>
@@ -6486,7 +6511,7 @@
             <a:r>
               <a:rPr sz="1300" b="0" i="0">
                 <a:solidFill>
-                  <a:srgbClr val="94A3B8"/>
+                  <a:srgbClr val="C4B5FD"/>
                 </a:solidFill>
                 <a:latin typeface="Calibri"/>
               </a:rPr>
@@ -6512,7 +6537,7 @@
             </a:avLst>
           </a:prstGeom>
           <a:solidFill>
-            <a:srgbClr val="1C2541"/>
+            <a:srgbClr val="181926"/>
           </a:solidFill>
           <a:ln>
             <a:noFill/>
@@ -6538,7 +6563,6 @@
           <a:lstStyle/>
           <a:p>
             <a:pPr algn="ctr"/>
-            <a:endParaRPr/>
           </a:p>
         </p:txBody>
       </p:sp>
@@ -6559,7 +6583,7 @@
           <a:noFill/>
         </p:spPr>
         <p:txBody>
-          <a:bodyPr wrap="square" lIns="36576" tIns="18288" rIns="36576" bIns="18288" anchor="t">
+          <a:bodyPr wrap="square" anchor="t" lIns="36576" rIns="36576" tIns="18288" bIns="18288">
             <a:spAutoFit/>
           </a:bodyPr>
           <a:lstStyle/>
@@ -6568,7 +6592,7 @@
             <a:r>
               <a:rPr sz="2800" b="1" i="0">
                 <a:solidFill>
-                  <a:srgbClr val="F8FAFC"/>
+                  <a:srgbClr val="FAF5FF"/>
                 </a:solidFill>
                 <a:latin typeface="Calibri"/>
               </a:rPr>
@@ -6594,7 +6618,7 @@
           <a:noFill/>
         </p:spPr>
         <p:txBody>
-          <a:bodyPr wrap="square" lIns="36576" tIns="18288" rIns="36576" bIns="18288" anchor="t">
+          <a:bodyPr wrap="square" anchor="t" lIns="36576" rIns="36576" tIns="18288" bIns="18288">
             <a:spAutoFit/>
           </a:bodyPr>
           <a:lstStyle/>
@@ -6603,7 +6627,7 @@
             <a:r>
               <a:rPr sz="1800" b="0" i="1">
                 <a:solidFill>
-                  <a:srgbClr val="94A3B8"/>
+                  <a:srgbClr val="C4B5FD"/>
                 </a:solidFill>
                 <a:latin typeface="Calibri"/>
               </a:rPr>
@@ -6629,7 +6653,7 @@
           <a:noFill/>
         </p:spPr>
         <p:txBody>
-          <a:bodyPr wrap="square" lIns="36576" tIns="18288" rIns="36576" bIns="18288" anchor="t">
+          <a:bodyPr wrap="square" anchor="t" lIns="36576" rIns="36576" tIns="18288" bIns="18288">
             <a:spAutoFit/>
           </a:bodyPr>
           <a:lstStyle/>
@@ -6638,7 +6662,7 @@
             <a:r>
               <a:rPr sz="2200" b="0" i="0">
                 <a:solidFill>
-                  <a:srgbClr val="F8FAFC"/>
+                  <a:srgbClr val="FAF5FF"/>
                 </a:solidFill>
                 <a:latin typeface="Calibri"/>
               </a:rPr>
@@ -6647,19 +6671,22 @@
           </a:p>
           <a:p>
             <a:pPr algn="l"/>
-            <a:endParaRPr sz="2200" b="0" i="0">
-              <a:solidFill>
-                <a:srgbClr val="F8FAFC"/>
-              </a:solidFill>
-              <a:latin typeface="Calibri"/>
-            </a:endParaRPr>
+            <a:r>
+              <a:rPr sz="2200" b="0" i="0">
+                <a:solidFill>
+                  <a:srgbClr val="FAF5FF"/>
+                </a:solidFill>
+                <a:latin typeface="Calibri"/>
+              </a:rPr>
+              <a:t/>
+            </a:r>
           </a:p>
           <a:p>
             <a:pPr algn="l"/>
             <a:r>
               <a:rPr sz="2200" b="0" i="0">
                 <a:solidFill>
-                  <a:srgbClr val="F8FAFC"/>
+                  <a:srgbClr val="FAF5FF"/>
                 </a:solidFill>
                 <a:latin typeface="Calibri"/>
               </a:rPr>
@@ -6668,19 +6695,22 @@
           </a:p>
           <a:p>
             <a:pPr algn="l"/>
-            <a:endParaRPr sz="2200" b="0" i="0">
-              <a:solidFill>
-                <a:srgbClr val="F8FAFC"/>
-              </a:solidFill>
-              <a:latin typeface="Calibri"/>
-            </a:endParaRPr>
+            <a:r>
+              <a:rPr sz="2200" b="0" i="0">
+                <a:solidFill>
+                  <a:srgbClr val="FAF5FF"/>
+                </a:solidFill>
+                <a:latin typeface="Calibri"/>
+              </a:rPr>
+              <a:t/>
+            </a:r>
           </a:p>
           <a:p>
             <a:pPr algn="l"/>
             <a:r>
               <a:rPr sz="2200" b="0" i="0">
                 <a:solidFill>
-                  <a:srgbClr val="F8FAFC"/>
+                  <a:srgbClr val="FAF5FF"/>
                 </a:solidFill>
                 <a:latin typeface="Calibri"/>
               </a:rPr>
@@ -6706,7 +6736,7 @@
             </a:avLst>
           </a:prstGeom>
           <a:solidFill>
-            <a:srgbClr val="1C2541"/>
+            <a:srgbClr val="181926"/>
           </a:solidFill>
           <a:ln>
             <a:noFill/>
@@ -6732,7 +6762,6 @@
           <a:lstStyle/>
           <a:p>
             <a:pPr algn="ctr"/>
-            <a:endParaRPr/>
           </a:p>
         </p:txBody>
       </p:sp>
@@ -6753,7 +6782,7 @@
           <a:noFill/>
         </p:spPr>
         <p:txBody>
-          <a:bodyPr wrap="square" lIns="36576" tIns="18288" rIns="36576" bIns="18288" anchor="t">
+          <a:bodyPr wrap="square" anchor="t" lIns="36576" rIns="36576" tIns="18288" bIns="18288">
             <a:spAutoFit/>
           </a:bodyPr>
           <a:lstStyle/>
@@ -6762,7 +6791,7 @@
             <a:r>
               <a:rPr sz="2800" b="1" i="0">
                 <a:solidFill>
-                  <a:srgbClr val="F8FAFC"/>
+                  <a:srgbClr val="FAF5FF"/>
                 </a:solidFill>
                 <a:latin typeface="Calibri"/>
               </a:rPr>
@@ -6788,7 +6817,7 @@
           <a:noFill/>
         </p:spPr>
         <p:txBody>
-          <a:bodyPr wrap="square" lIns="36576" tIns="18288" rIns="36576" bIns="18288" anchor="t">
+          <a:bodyPr wrap="square" anchor="t" lIns="36576" rIns="36576" tIns="18288" bIns="18288">
             <a:spAutoFit/>
           </a:bodyPr>
           <a:lstStyle/>
@@ -6797,7 +6826,7 @@
             <a:r>
               <a:rPr sz="1800" b="0" i="1">
                 <a:solidFill>
-                  <a:srgbClr val="94A3B8"/>
+                  <a:srgbClr val="C4B5FD"/>
                 </a:solidFill>
                 <a:latin typeface="Calibri"/>
               </a:rPr>
@@ -6823,7 +6852,7 @@
           <a:noFill/>
         </p:spPr>
         <p:txBody>
-          <a:bodyPr wrap="square" lIns="36576" tIns="18288" rIns="36576" bIns="18288" anchor="t">
+          <a:bodyPr wrap="square" anchor="t" lIns="36576" rIns="36576" tIns="18288" bIns="18288">
             <a:spAutoFit/>
           </a:bodyPr>
           <a:lstStyle/>
@@ -6832,7 +6861,7 @@
             <a:r>
               <a:rPr sz="2200" b="0" i="0">
                 <a:solidFill>
-                  <a:srgbClr val="F8FAFC"/>
+                  <a:srgbClr val="FAF5FF"/>
                 </a:solidFill>
                 <a:latin typeface="Calibri"/>
               </a:rPr>
@@ -6841,19 +6870,22 @@
           </a:p>
           <a:p>
             <a:pPr algn="l"/>
-            <a:endParaRPr sz="2200" b="0" i="0">
-              <a:solidFill>
-                <a:srgbClr val="F8FAFC"/>
-              </a:solidFill>
-              <a:latin typeface="Calibri"/>
-            </a:endParaRPr>
+            <a:r>
+              <a:rPr sz="2200" b="0" i="0">
+                <a:solidFill>
+                  <a:srgbClr val="FAF5FF"/>
+                </a:solidFill>
+                <a:latin typeface="Calibri"/>
+              </a:rPr>
+              <a:t/>
+            </a:r>
           </a:p>
           <a:p>
             <a:pPr algn="l"/>
             <a:r>
               <a:rPr sz="2200" b="0" i="0">
                 <a:solidFill>
-                  <a:srgbClr val="F8FAFC"/>
+                  <a:srgbClr val="FAF5FF"/>
                 </a:solidFill>
                 <a:latin typeface="Calibri"/>
               </a:rPr>
@@ -6862,19 +6894,22 @@
           </a:p>
           <a:p>
             <a:pPr algn="l"/>
-            <a:endParaRPr sz="2200" b="0" i="0">
-              <a:solidFill>
-                <a:srgbClr val="F8FAFC"/>
-              </a:solidFill>
-              <a:latin typeface="Calibri"/>
-            </a:endParaRPr>
+            <a:r>
+              <a:rPr sz="2200" b="0" i="0">
+                <a:solidFill>
+                  <a:srgbClr val="FAF5FF"/>
+                </a:solidFill>
+                <a:latin typeface="Calibri"/>
+              </a:rPr>
+              <a:t/>
+            </a:r>
           </a:p>
           <a:p>
             <a:pPr algn="l"/>
             <a:r>
               <a:rPr sz="2200" b="0" i="0">
                 <a:solidFill>
-                  <a:srgbClr val="F8FAFC"/>
+                  <a:srgbClr val="FAF5FF"/>
                 </a:solidFill>
                 <a:latin typeface="Calibri"/>
               </a:rPr>
@@ -6900,11 +6935,11 @@
             </a:avLst>
           </a:prstGeom>
           <a:solidFill>
-            <a:srgbClr val="243356"/>
+            <a:srgbClr val="2A1B38"/>
           </a:solidFill>
           <a:ln w="19050">
             <a:solidFill>
-              <a:srgbClr val="2DD4BF"/>
+              <a:srgbClr val="E024A5"/>
             </a:solidFill>
           </a:ln>
           <a:effectLst/>
@@ -6928,7 +6963,6 @@
           <a:lstStyle/>
           <a:p>
             <a:pPr algn="ctr"/>
-            <a:endParaRPr/>
           </a:p>
         </p:txBody>
       </p:sp>
@@ -6949,7 +6983,7 @@
           <a:noFill/>
         </p:spPr>
         <p:txBody>
-          <a:bodyPr wrap="square" lIns="36576" tIns="18288" rIns="36576" bIns="18288" anchor="t">
+          <a:bodyPr wrap="square" anchor="t" lIns="36576" rIns="36576" tIns="18288" bIns="18288">
             <a:spAutoFit/>
           </a:bodyPr>
           <a:lstStyle/>
@@ -6958,7 +6992,7 @@
             <a:r>
               <a:rPr sz="3000" b="1" i="0">
                 <a:solidFill>
-                  <a:srgbClr val="2DD4BF"/>
+                  <a:srgbClr val="E024A5"/>
                 </a:solidFill>
                 <a:latin typeface="Calibri"/>
               </a:rPr>
@@ -6984,7 +7018,7 @@
           <a:noFill/>
         </p:spPr>
         <p:txBody>
-          <a:bodyPr wrap="square" lIns="36576" tIns="18288" rIns="36576" bIns="18288" anchor="t">
+          <a:bodyPr wrap="square" anchor="t" lIns="36576" rIns="36576" tIns="18288" bIns="18288">
             <a:spAutoFit/>
           </a:bodyPr>
           <a:lstStyle/>
@@ -7019,7 +7053,7 @@
           <a:noFill/>
         </p:spPr>
         <p:txBody>
-          <a:bodyPr wrap="square" lIns="36576" tIns="18288" rIns="36576" bIns="18288" anchor="t">
+          <a:bodyPr wrap="square" anchor="t" lIns="36576" rIns="36576" tIns="18288" bIns="18288">
             <a:spAutoFit/>
           </a:bodyPr>
           <a:lstStyle/>
@@ -7028,7 +7062,7 @@
             <a:r>
               <a:rPr sz="1800" b="1" i="0">
                 <a:solidFill>
-                  <a:srgbClr val="F8FAFC"/>
+                  <a:srgbClr val="FAF5FF"/>
                 </a:solidFill>
                 <a:latin typeface="Calibri"/>
               </a:rPr>
@@ -7040,7 +7074,7 @@
             <a:r>
               <a:rPr sz="1800" b="1" i="0">
                 <a:solidFill>
-                  <a:srgbClr val="F8FAFC"/>
+                  <a:srgbClr val="FAF5FF"/>
                 </a:solidFill>
                 <a:latin typeface="Calibri"/>
               </a:rPr>
@@ -7052,7 +7086,7 @@
             <a:r>
               <a:rPr sz="1800" b="1" i="0">
                 <a:solidFill>
-                  <a:srgbClr val="F8FAFC"/>
+                  <a:srgbClr val="FAF5FF"/>
                 </a:solidFill>
                 <a:latin typeface="Calibri"/>
               </a:rPr>
@@ -7078,7 +7112,7 @@
             </a:avLst>
           </a:prstGeom>
           <a:solidFill>
-            <a:srgbClr val="1C2541"/>
+            <a:srgbClr val="181926"/>
           </a:solidFill>
           <a:ln>
             <a:noFill/>
@@ -7104,7 +7138,6 @@
           <a:lstStyle/>
           <a:p>
             <a:pPr algn="ctr"/>
-            <a:endParaRPr/>
           </a:p>
         </p:txBody>
       </p:sp>
@@ -7141,12 +7174,12 @@
 </file>
 
 <file path=ppt/slides/slide4.xml><?xml version="1.0" encoding="utf-8"?>
-<p:sld xmlns:a="http://schemas.openxmlformats.org/drawingml/2006/main" xmlns:r="http://schemas.openxmlformats.org/officeDocument/2006/relationships" xmlns:p="http://schemas.openxmlformats.org/presentationml/2006/main">
+<p:sld xmlns:a="http://schemas.openxmlformats.org/drawingml/2006/main" xmlns:p="http://schemas.openxmlformats.org/presentationml/2006/main" xmlns:r="http://schemas.openxmlformats.org/officeDocument/2006/relationships">
   <p:cSld>
     <p:bg>
       <p:bgPr>
         <a:solidFill>
-          <a:srgbClr val="0B132B"/>
+          <a:srgbClr val="0F1016"/>
         </a:solidFill>
         <a:effectLst/>
       </p:bgPr>
@@ -7157,14 +7190,7 @@
         <p:cNvGrpSpPr/>
         <p:nvPr/>
       </p:nvGrpSpPr>
-      <p:grpSpPr>
-        <a:xfrm>
-          <a:off x="0" y="0"/>
-          <a:ext cx="0" cy="0"/>
-          <a:chOff x="0" y="0"/>
-          <a:chExt cx="0" cy="0"/>
-        </a:xfrm>
-      </p:grpSpPr>
+      <p:grpSpPr/>
       <p:sp>
         <p:nvSpPr>
           <p:cNvPr id="2" name="Rectangle 1"/>
@@ -7180,7 +7206,7 @@
             <a:avLst/>
           </a:prstGeom>
           <a:solidFill>
-            <a:srgbClr val="2DD4BF"/>
+            <a:srgbClr val="E024A5"/>
           </a:solidFill>
           <a:ln>
             <a:noFill/>
@@ -7206,7 +7232,6 @@
           <a:lstStyle/>
           <a:p>
             <a:pPr algn="ctr"/>
-            <a:endParaRPr/>
           </a:p>
         </p:txBody>
       </p:sp>
@@ -7227,7 +7252,7 @@
           <a:noFill/>
         </p:spPr>
         <p:txBody>
-          <a:bodyPr wrap="square" lIns="36576" tIns="18288" rIns="36576" bIns="18288" anchor="t">
+          <a:bodyPr wrap="square" anchor="t" lIns="36576" rIns="36576" tIns="18288" bIns="18288">
             <a:spAutoFit/>
           </a:bodyPr>
           <a:lstStyle/>
@@ -7236,7 +7261,7 @@
             <a:r>
               <a:rPr sz="1200" b="1" i="0">
                 <a:solidFill>
-                  <a:srgbClr val="2DD4BF"/>
+                  <a:srgbClr val="E024A5"/>
                 </a:solidFill>
                 <a:latin typeface="Calibri"/>
               </a:rPr>
@@ -7262,7 +7287,7 @@
           <a:noFill/>
         </p:spPr>
         <p:txBody>
-          <a:bodyPr wrap="square" lIns="36576" tIns="18288" rIns="36576" bIns="18288" anchor="t">
+          <a:bodyPr wrap="square" anchor="t" lIns="36576" rIns="36576" tIns="18288" bIns="18288">
             <a:spAutoFit/>
           </a:bodyPr>
           <a:lstStyle/>
@@ -7271,7 +7296,7 @@
             <a:r>
               <a:rPr sz="4000" b="1" i="0">
                 <a:solidFill>
-                  <a:srgbClr val="F8FAFC"/>
+                  <a:srgbClr val="FAF5FF"/>
                 </a:solidFill>
                 <a:latin typeface="Calibri"/>
               </a:rPr>
@@ -7297,7 +7322,7 @@
           <a:noFill/>
         </p:spPr>
         <p:txBody>
-          <a:bodyPr wrap="square" lIns="36576" tIns="18288" rIns="36576" bIns="18288" anchor="t">
+          <a:bodyPr wrap="square" anchor="t" lIns="36576" rIns="36576" tIns="18288" bIns="18288">
             <a:spAutoFit/>
           </a:bodyPr>
           <a:lstStyle/>
@@ -7306,7 +7331,7 @@
             <a:r>
               <a:rPr sz="1300" b="0" i="0">
                 <a:solidFill>
-                  <a:srgbClr val="94A3B8"/>
+                  <a:srgbClr val="C4B5FD"/>
                 </a:solidFill>
                 <a:latin typeface="Calibri"/>
               </a:rPr>
@@ -7332,11 +7357,11 @@
             </a:avLst>
           </a:prstGeom>
           <a:solidFill>
-            <a:srgbClr val="1C2541"/>
+            <a:srgbClr val="181926"/>
           </a:solidFill>
           <a:ln w="19050">
             <a:solidFill>
-              <a:srgbClr val="2DD4BF"/>
+              <a:srgbClr val="E024A5"/>
             </a:solidFill>
           </a:ln>
           <a:effectLst/>
@@ -7360,7 +7385,6 @@
           <a:lstStyle/>
           <a:p>
             <a:pPr algn="ctr"/>
-            <a:endParaRPr/>
           </a:p>
         </p:txBody>
       </p:sp>
@@ -7381,7 +7405,7 @@
           <a:noFill/>
         </p:spPr>
         <p:txBody>
-          <a:bodyPr wrap="square" lIns="36576" tIns="18288" rIns="36576" bIns="18288" anchor="t">
+          <a:bodyPr wrap="square" anchor="t" lIns="36576" rIns="36576" tIns="18288" bIns="18288">
             <a:spAutoFit/>
           </a:bodyPr>
           <a:lstStyle/>
@@ -7390,7 +7414,7 @@
             <a:r>
               <a:rPr sz="1800" b="1" i="0">
                 <a:solidFill>
-                  <a:srgbClr val="2DD4BF"/>
+                  <a:srgbClr val="E024A5"/>
                 </a:solidFill>
                 <a:latin typeface="Calibri"/>
               </a:rPr>
@@ -7416,7 +7440,7 @@
           <a:noFill/>
         </p:spPr>
         <p:txBody>
-          <a:bodyPr wrap="square" lIns="36576" tIns="18288" rIns="36576" bIns="18288" anchor="t">
+          <a:bodyPr wrap="square" anchor="t" lIns="36576" rIns="36576" tIns="18288" bIns="18288">
             <a:spAutoFit/>
           </a:bodyPr>
           <a:lstStyle/>
@@ -7425,11 +7449,11 @@
             <a:r>
               <a:rPr sz="1400" b="0" i="0">
                 <a:solidFill>
-                  <a:srgbClr val="94A3B8"/>
-                </a:solidFill>
-                <a:latin typeface="Calibri"/>
-              </a:rPr>
-              <a:t>Te ve en vivo</a:t>
+                  <a:srgbClr val="C4B5FD"/>
+                </a:solidFill>
+                <a:latin typeface="Calibri"/>
+              </a:rPr>
+              <a:t>30 FPS</a:t>
             </a:r>
           </a:p>
         </p:txBody>
@@ -7450,7 +7474,7 @@
           </a:prstGeom>
           <a:ln w="25400">
             <a:solidFill>
-              <a:srgbClr val="2DD4BF"/>
+              <a:srgbClr val="E024A5"/>
             </a:solidFill>
             <a:tailEnd type="triangle"/>
           </a:ln>
@@ -7487,11 +7511,11 @@
             </a:avLst>
           </a:prstGeom>
           <a:solidFill>
-            <a:srgbClr val="1C2541"/>
+            <a:srgbClr val="181926"/>
           </a:solidFill>
           <a:ln w="19050">
             <a:solidFill>
-              <a:srgbClr val="2DD4BF"/>
+              <a:srgbClr val="E024A5"/>
             </a:solidFill>
           </a:ln>
           <a:effectLst/>
@@ -7515,7 +7539,6 @@
           <a:lstStyle/>
           <a:p>
             <a:pPr algn="ctr"/>
-            <a:endParaRPr/>
           </a:p>
         </p:txBody>
       </p:sp>
@@ -7536,7 +7559,7 @@
           <a:noFill/>
         </p:spPr>
         <p:txBody>
-          <a:bodyPr wrap="square" lIns="36576" tIns="18288" rIns="36576" bIns="18288" anchor="t">
+          <a:bodyPr wrap="square" anchor="t" lIns="36576" rIns="36576" tIns="18288" bIns="18288">
             <a:spAutoFit/>
           </a:bodyPr>
           <a:lstStyle/>
@@ -7545,7 +7568,7 @@
             <a:r>
               <a:rPr sz="1800" b="1" i="0">
                 <a:solidFill>
-                  <a:srgbClr val="2DD4BF"/>
+                  <a:srgbClr val="E024A5"/>
                 </a:solidFill>
                 <a:latin typeface="Calibri"/>
               </a:rPr>
@@ -7571,7 +7594,7 @@
           <a:noFill/>
         </p:spPr>
         <p:txBody>
-          <a:bodyPr wrap="square" lIns="36576" tIns="18288" rIns="36576" bIns="18288" anchor="t">
+          <a:bodyPr wrap="square" anchor="t" lIns="36576" rIns="36576" tIns="18288" bIns="18288">
             <a:spAutoFit/>
           </a:bodyPr>
           <a:lstStyle/>
@@ -7580,7 +7603,7 @@
             <a:r>
               <a:rPr sz="1400" b="0" i="0">
                 <a:solidFill>
-                  <a:srgbClr val="94A3B8"/>
+                  <a:srgbClr val="C4B5FD"/>
                 </a:solidFill>
                 <a:latin typeface="Calibri"/>
               </a:rPr>
@@ -7605,7 +7628,7 @@
           </a:prstGeom>
           <a:ln w="25400">
             <a:solidFill>
-              <a:srgbClr val="2DD4BF"/>
+              <a:srgbClr val="E024A5"/>
             </a:solidFill>
             <a:tailEnd type="triangle"/>
           </a:ln>
@@ -7642,11 +7665,11 @@
             </a:avLst>
           </a:prstGeom>
           <a:solidFill>
-            <a:srgbClr val="1C2541"/>
+            <a:srgbClr val="181926"/>
           </a:solidFill>
           <a:ln w="19050">
             <a:solidFill>
-              <a:srgbClr val="2DD4BF"/>
+              <a:srgbClr val="E024A5"/>
             </a:solidFill>
           </a:ln>
           <a:effectLst/>
@@ -7670,7 +7693,6 @@
           <a:lstStyle/>
           <a:p>
             <a:pPr algn="ctr"/>
-            <a:endParaRPr/>
           </a:p>
         </p:txBody>
       </p:sp>
@@ -7691,7 +7713,7 @@
           <a:noFill/>
         </p:spPr>
         <p:txBody>
-          <a:bodyPr wrap="square" lIns="36576" tIns="18288" rIns="36576" bIns="18288" anchor="t">
+          <a:bodyPr wrap="square" anchor="t" lIns="36576" rIns="36576" tIns="18288" bIns="18288">
             <a:spAutoFit/>
           </a:bodyPr>
           <a:lstStyle/>
@@ -7700,7 +7722,7 @@
             <a:r>
               <a:rPr sz="1800" b="1" i="0">
                 <a:solidFill>
-                  <a:srgbClr val="2DD4BF"/>
+                  <a:srgbClr val="E024A5"/>
                 </a:solidFill>
                 <a:latin typeface="Calibri"/>
               </a:rPr>
@@ -7726,7 +7748,7 @@
           <a:noFill/>
         </p:spPr>
         <p:txBody>
-          <a:bodyPr wrap="square" lIns="36576" tIns="18288" rIns="36576" bIns="18288" anchor="t">
+          <a:bodyPr wrap="square" anchor="t" lIns="36576" rIns="36576" tIns="18288" bIns="18288">
             <a:spAutoFit/>
           </a:bodyPr>
           <a:lstStyle/>
@@ -7735,7 +7757,7 @@
             <a:r>
               <a:rPr sz="1400" b="0" i="0">
                 <a:solidFill>
-                  <a:srgbClr val="94A3B8"/>
+                  <a:srgbClr val="C4B5FD"/>
                 </a:solidFill>
                 <a:latin typeface="Calibri"/>
               </a:rPr>
@@ -7760,7 +7782,7 @@
           </a:prstGeom>
           <a:ln w="25400">
             <a:solidFill>
-              <a:srgbClr val="2DD4BF"/>
+              <a:srgbClr val="E024A5"/>
             </a:solidFill>
             <a:tailEnd type="triangle"/>
           </a:ln>
@@ -7797,11 +7819,11 @@
             </a:avLst>
           </a:prstGeom>
           <a:solidFill>
-            <a:srgbClr val="1C2541"/>
+            <a:srgbClr val="181926"/>
           </a:solidFill>
           <a:ln w="19050">
             <a:solidFill>
-              <a:srgbClr val="2DD4BF"/>
+              <a:srgbClr val="E024A5"/>
             </a:solidFill>
           </a:ln>
           <a:effectLst/>
@@ -7825,7 +7847,6 @@
           <a:lstStyle/>
           <a:p>
             <a:pPr algn="ctr"/>
-            <a:endParaRPr/>
           </a:p>
         </p:txBody>
       </p:sp>
@@ -7846,7 +7867,7 @@
           <a:noFill/>
         </p:spPr>
         <p:txBody>
-          <a:bodyPr wrap="square" lIns="36576" tIns="18288" rIns="36576" bIns="18288" anchor="t">
+          <a:bodyPr wrap="square" anchor="t" lIns="36576" rIns="36576" tIns="18288" bIns="18288">
             <a:spAutoFit/>
           </a:bodyPr>
           <a:lstStyle/>
@@ -7855,7 +7876,7 @@
             <a:r>
               <a:rPr sz="1800" b="1" i="0">
                 <a:solidFill>
-                  <a:srgbClr val="2DD4BF"/>
+                  <a:srgbClr val="E024A5"/>
                 </a:solidFill>
                 <a:latin typeface="Calibri"/>
               </a:rPr>
@@ -7881,7 +7902,7 @@
           <a:noFill/>
         </p:spPr>
         <p:txBody>
-          <a:bodyPr wrap="square" lIns="36576" tIns="18288" rIns="36576" bIns="18288" anchor="t">
+          <a:bodyPr wrap="square" anchor="t" lIns="36576" rIns="36576" tIns="18288" bIns="18288">
             <a:spAutoFit/>
           </a:bodyPr>
           <a:lstStyle/>
@@ -7890,7 +7911,7 @@
             <a:r>
               <a:rPr sz="1400" b="0" i="0">
                 <a:solidFill>
-                  <a:srgbClr val="94A3B8"/>
+                  <a:srgbClr val="C4B5FD"/>
                 </a:solidFill>
                 <a:latin typeface="Calibri"/>
               </a:rPr>
@@ -7915,7 +7936,7 @@
           </a:prstGeom>
           <a:ln w="25400">
             <a:solidFill>
-              <a:srgbClr val="2DD4BF"/>
+              <a:srgbClr val="E024A5"/>
             </a:solidFill>
             <a:tailEnd type="triangle"/>
           </a:ln>
@@ -7952,11 +7973,11 @@
             </a:avLst>
           </a:prstGeom>
           <a:solidFill>
-            <a:srgbClr val="1C2541"/>
+            <a:srgbClr val="181926"/>
           </a:solidFill>
           <a:ln w="19050">
             <a:solidFill>
-              <a:srgbClr val="2DD4BF"/>
+              <a:srgbClr val="E024A5"/>
             </a:solidFill>
           </a:ln>
           <a:effectLst/>
@@ -7980,7 +8001,6 @@
           <a:lstStyle/>
           <a:p>
             <a:pPr algn="ctr"/>
-            <a:endParaRPr/>
           </a:p>
         </p:txBody>
       </p:sp>
@@ -8001,7 +8021,7 @@
           <a:noFill/>
         </p:spPr>
         <p:txBody>
-          <a:bodyPr wrap="square" lIns="36576" tIns="18288" rIns="36576" bIns="18288" anchor="t">
+          <a:bodyPr wrap="square" anchor="t" lIns="36576" rIns="36576" tIns="18288" bIns="18288">
             <a:spAutoFit/>
           </a:bodyPr>
           <a:lstStyle/>
@@ -8010,7 +8030,7 @@
             <a:r>
               <a:rPr sz="1800" b="1" i="0">
                 <a:solidFill>
-                  <a:srgbClr val="2DD4BF"/>
+                  <a:srgbClr val="E024A5"/>
                 </a:solidFill>
                 <a:latin typeface="Calibri"/>
               </a:rPr>
@@ -8036,7 +8056,7 @@
           <a:noFill/>
         </p:spPr>
         <p:txBody>
-          <a:bodyPr wrap="square" lIns="36576" tIns="18288" rIns="36576" bIns="18288" anchor="t">
+          <a:bodyPr wrap="square" anchor="t" lIns="36576" rIns="36576" tIns="18288" bIns="18288">
             <a:spAutoFit/>
           </a:bodyPr>
           <a:lstStyle/>
@@ -8045,7 +8065,7 @@
             <a:r>
               <a:rPr sz="1400" b="0" i="0">
                 <a:solidFill>
-                  <a:srgbClr val="94A3B8"/>
+                  <a:srgbClr val="C4B5FD"/>
                 </a:solidFill>
                 <a:latin typeface="Calibri"/>
               </a:rPr>
@@ -8071,7 +8091,7 @@
             </a:avLst>
           </a:prstGeom>
           <a:solidFill>
-            <a:srgbClr val="1C2541"/>
+            <a:srgbClr val="181926"/>
           </a:solidFill>
           <a:ln>
             <a:noFill/>
@@ -8097,7 +8117,6 @@
           <a:lstStyle/>
           <a:p>
             <a:pPr algn="ctr"/>
-            <a:endParaRPr/>
           </a:p>
         </p:txBody>
       </p:sp>
@@ -8118,7 +8137,7 @@
           <a:noFill/>
         </p:spPr>
         <p:txBody>
-          <a:bodyPr wrap="square" lIns="36576" tIns="18288" rIns="36576" bIns="18288" anchor="t">
+          <a:bodyPr wrap="square" anchor="t" lIns="36576" rIns="36576" tIns="18288" bIns="18288">
             <a:spAutoFit/>
           </a:bodyPr>
           <a:lstStyle/>
@@ -8127,7 +8146,7 @@
             <a:r>
               <a:rPr sz="2600" b="1" i="0">
                 <a:solidFill>
-                  <a:srgbClr val="F8FAFC"/>
+                  <a:srgbClr val="FAF5FF"/>
                 </a:solidFill>
                 <a:latin typeface="Calibri"/>
               </a:rPr>
@@ -8153,7 +8172,7 @@
           <a:noFill/>
         </p:spPr>
         <p:txBody>
-          <a:bodyPr wrap="square" lIns="36576" tIns="18288" rIns="36576" bIns="18288" anchor="t">
+          <a:bodyPr wrap="square" anchor="t" lIns="36576" rIns="36576" tIns="18288" bIns="18288">
             <a:spAutoFit/>
           </a:bodyPr>
           <a:lstStyle/>
@@ -8162,7 +8181,7 @@
             <a:r>
               <a:rPr sz="2200" b="0" i="0">
                 <a:solidFill>
-                  <a:srgbClr val="94A3B8"/>
+                  <a:srgbClr val="C4B5FD"/>
                 </a:solidFill>
                 <a:latin typeface="Calibri"/>
               </a:rPr>
@@ -8171,19 +8190,22 @@
           </a:p>
           <a:p>
             <a:pPr algn="l"/>
-            <a:endParaRPr sz="2200" b="0" i="0">
-              <a:solidFill>
-                <a:srgbClr val="94A3B8"/>
-              </a:solidFill>
-              <a:latin typeface="Calibri"/>
-            </a:endParaRPr>
+            <a:r>
+              <a:rPr sz="2200" b="0" i="0">
+                <a:solidFill>
+                  <a:srgbClr val="C4B5FD"/>
+                </a:solidFill>
+                <a:latin typeface="Calibri"/>
+              </a:rPr>
+              <a:t/>
+            </a:r>
           </a:p>
           <a:p>
             <a:pPr algn="l"/>
             <a:r>
               <a:rPr sz="2200" b="0" i="0">
                 <a:solidFill>
-                  <a:srgbClr val="94A3B8"/>
+                  <a:srgbClr val="C4B5FD"/>
                 </a:solidFill>
                 <a:latin typeface="Calibri"/>
               </a:rPr>
@@ -8192,19 +8214,22 @@
           </a:p>
           <a:p>
             <a:pPr algn="l"/>
-            <a:endParaRPr sz="2200" b="0" i="0">
-              <a:solidFill>
-                <a:srgbClr val="94A3B8"/>
-              </a:solidFill>
-              <a:latin typeface="Calibri"/>
-            </a:endParaRPr>
+            <a:r>
+              <a:rPr sz="2200" b="0" i="0">
+                <a:solidFill>
+                  <a:srgbClr val="C4B5FD"/>
+                </a:solidFill>
+                <a:latin typeface="Calibri"/>
+              </a:rPr>
+              <a:t/>
+            </a:r>
           </a:p>
           <a:p>
             <a:pPr algn="l"/>
             <a:r>
               <a:rPr sz="2200" b="0" i="0">
                 <a:solidFill>
-                  <a:srgbClr val="94A3B8"/>
+                  <a:srgbClr val="C4B5FD"/>
                 </a:solidFill>
                 <a:latin typeface="Calibri"/>
               </a:rPr>
@@ -8230,7 +8255,7 @@
             </a:avLst>
           </a:prstGeom>
           <a:solidFill>
-            <a:srgbClr val="1C2541"/>
+            <a:srgbClr val="181926"/>
           </a:solidFill>
           <a:ln>
             <a:noFill/>
@@ -8256,7 +8281,6 @@
           <a:lstStyle/>
           <a:p>
             <a:pPr algn="ctr"/>
-            <a:endParaRPr/>
           </a:p>
         </p:txBody>
       </p:sp>
@@ -8277,7 +8301,7 @@
           <a:noFill/>
         </p:spPr>
         <p:txBody>
-          <a:bodyPr wrap="square" lIns="36576" tIns="18288" rIns="36576" bIns="18288" anchor="t">
+          <a:bodyPr wrap="square" anchor="t" lIns="36576" rIns="36576" tIns="18288" bIns="18288">
             <a:spAutoFit/>
           </a:bodyPr>
           <a:lstStyle/>
@@ -8286,7 +8310,7 @@
             <a:r>
               <a:rPr sz="2600" b="1" i="0">
                 <a:solidFill>
-                  <a:srgbClr val="F8FAFC"/>
+                  <a:srgbClr val="FAF5FF"/>
                 </a:solidFill>
                 <a:latin typeface="Calibri"/>
               </a:rPr>
@@ -8312,7 +8336,7 @@
           <a:noFill/>
         </p:spPr>
         <p:txBody>
-          <a:bodyPr wrap="square" lIns="36576" tIns="18288" rIns="36576" bIns="18288" anchor="t">
+          <a:bodyPr wrap="square" anchor="t" lIns="36576" rIns="36576" tIns="18288" bIns="18288">
             <a:spAutoFit/>
           </a:bodyPr>
           <a:lstStyle/>
@@ -8321,28 +8345,31 @@
             <a:r>
               <a:rPr sz="1900" b="0" i="0">
                 <a:solidFill>
-                  <a:srgbClr val="94A3B8"/>
-                </a:solidFill>
-                <a:latin typeface="Calibri"/>
-              </a:rPr>
-              <a:t>▸ Cámara web HD</a:t>
+                  <a:srgbClr val="C4B5FD"/>
+                </a:solidFill>
+                <a:latin typeface="Calibri"/>
+              </a:rPr>
+              <a:t>▸ Cámara web HD (30 FPS)</a:t>
             </a:r>
           </a:p>
           <a:p>
             <a:pPr algn="l"/>
-            <a:endParaRPr sz="1900" b="0" i="0">
-              <a:solidFill>
-                <a:srgbClr val="94A3B8"/>
-              </a:solidFill>
-              <a:latin typeface="Calibri"/>
-            </a:endParaRPr>
+            <a:r>
+              <a:rPr sz="1900" b="0" i="0">
+                <a:solidFill>
+                  <a:srgbClr val="C4B5FD"/>
+                </a:solidFill>
+                <a:latin typeface="Calibri"/>
+              </a:rPr>
+              <a:t/>
+            </a:r>
           </a:p>
           <a:p>
             <a:pPr algn="l"/>
             <a:r>
               <a:rPr sz="1900" b="0" i="0">
                 <a:solidFill>
-                  <a:srgbClr val="94A3B8"/>
+                  <a:srgbClr val="C4B5FD"/>
                 </a:solidFill>
                 <a:latin typeface="Calibri"/>
               </a:rPr>
@@ -8351,19 +8378,22 @@
           </a:p>
           <a:p>
             <a:pPr algn="l"/>
-            <a:endParaRPr sz="1900" b="0" i="0">
-              <a:solidFill>
-                <a:srgbClr val="94A3B8"/>
-              </a:solidFill>
-              <a:latin typeface="Calibri"/>
-            </a:endParaRPr>
+            <a:r>
+              <a:rPr sz="1900" b="0" i="0">
+                <a:solidFill>
+                  <a:srgbClr val="C4B5FD"/>
+                </a:solidFill>
+                <a:latin typeface="Calibri"/>
+              </a:rPr>
+              <a:t/>
+            </a:r>
           </a:p>
           <a:p>
             <a:pPr algn="l"/>
             <a:r>
               <a:rPr sz="1900" b="0" i="0">
                 <a:solidFill>
-                  <a:srgbClr val="94A3B8"/>
+                  <a:srgbClr val="C4B5FD"/>
                 </a:solidFill>
                 <a:latin typeface="Calibri"/>
               </a:rPr>
@@ -8389,11 +8419,11 @@
             </a:avLst>
           </a:prstGeom>
           <a:solidFill>
-            <a:srgbClr val="243356"/>
+            <a:srgbClr val="2A1B38"/>
           </a:solidFill>
           <a:ln w="19050">
             <a:solidFill>
-              <a:srgbClr val="2DD4BF"/>
+              <a:srgbClr val="E024A5"/>
             </a:solidFill>
           </a:ln>
           <a:effectLst/>
@@ -8417,7 +8447,6 @@
           <a:lstStyle/>
           <a:p>
             <a:pPr algn="ctr"/>
-            <a:endParaRPr/>
           </a:p>
         </p:txBody>
       </p:sp>
@@ -8438,7 +8467,7 @@
           <a:noFill/>
         </p:spPr>
         <p:txBody>
-          <a:bodyPr wrap="square" lIns="36576" tIns="18288" rIns="36576" bIns="18288" anchor="t">
+          <a:bodyPr wrap="square" anchor="t" lIns="36576" rIns="36576" tIns="18288" bIns="18288">
             <a:spAutoFit/>
           </a:bodyPr>
           <a:lstStyle/>
@@ -8447,7 +8476,7 @@
             <a:r>
               <a:rPr sz="2600" b="1" i="0">
                 <a:solidFill>
-                  <a:srgbClr val="2DD4BF"/>
+                  <a:srgbClr val="E024A5"/>
                 </a:solidFill>
                 <a:latin typeface="Calibri"/>
               </a:rPr>
@@ -8473,7 +8502,7 @@
           <a:noFill/>
         </p:spPr>
         <p:txBody>
-          <a:bodyPr wrap="square" lIns="36576" tIns="18288" rIns="36576" bIns="18288" anchor="t">
+          <a:bodyPr wrap="square" anchor="t" lIns="36576" rIns="36576" tIns="18288" bIns="18288">
             <a:spAutoFit/>
           </a:bodyPr>
           <a:lstStyle/>
@@ -8482,7 +8511,7 @@
             <a:r>
               <a:rPr sz="2200" b="1" i="0">
                 <a:solidFill>
-                  <a:srgbClr val="F8FAFC"/>
+                  <a:srgbClr val="FAF5FF"/>
                 </a:solidFill>
                 <a:latin typeface="Calibri"/>
               </a:rPr>
@@ -8491,19 +8520,22 @@
           </a:p>
           <a:p>
             <a:pPr algn="l"/>
-            <a:endParaRPr sz="2200" b="1" i="0">
-              <a:solidFill>
-                <a:srgbClr val="F8FAFC"/>
-              </a:solidFill>
-              <a:latin typeface="Calibri"/>
-            </a:endParaRPr>
+            <a:r>
+              <a:rPr sz="2200" b="1" i="0">
+                <a:solidFill>
+                  <a:srgbClr val="FAF5FF"/>
+                </a:solidFill>
+                <a:latin typeface="Calibri"/>
+              </a:rPr>
+              <a:t/>
+            </a:r>
           </a:p>
           <a:p>
             <a:pPr algn="l"/>
             <a:r>
               <a:rPr sz="2200" b="1" i="0">
                 <a:solidFill>
-                  <a:srgbClr val="F8FAFC"/>
+                  <a:srgbClr val="FAF5FF"/>
                 </a:solidFill>
                 <a:latin typeface="Calibri"/>
               </a:rPr>
@@ -8512,19 +8544,22 @@
           </a:p>
           <a:p>
             <a:pPr algn="l"/>
-            <a:endParaRPr sz="2200" b="1" i="0">
-              <a:solidFill>
-                <a:srgbClr val="F8FAFC"/>
-              </a:solidFill>
-              <a:latin typeface="Calibri"/>
-            </a:endParaRPr>
+            <a:r>
+              <a:rPr sz="2200" b="1" i="0">
+                <a:solidFill>
+                  <a:srgbClr val="FAF5FF"/>
+                </a:solidFill>
+                <a:latin typeface="Calibri"/>
+              </a:rPr>
+              <a:t/>
+            </a:r>
           </a:p>
           <a:p>
             <a:pPr algn="l"/>
             <a:r>
               <a:rPr sz="2200" b="1" i="0">
                 <a:solidFill>
-                  <a:srgbClr val="F8FAFC"/>
+                  <a:srgbClr val="FAF5FF"/>
                 </a:solidFill>
                 <a:latin typeface="Calibri"/>
               </a:rPr>
@@ -8542,12 +8577,12 @@
 </file>
 
 <file path=ppt/slides/slide5.xml><?xml version="1.0" encoding="utf-8"?>
-<p:sld xmlns:a="http://schemas.openxmlformats.org/drawingml/2006/main" xmlns:r="http://schemas.openxmlformats.org/officeDocument/2006/relationships" xmlns:p="http://schemas.openxmlformats.org/presentationml/2006/main">
+<p:sld xmlns:a="http://schemas.openxmlformats.org/drawingml/2006/main" xmlns:p="http://schemas.openxmlformats.org/presentationml/2006/main" xmlns:r="http://schemas.openxmlformats.org/officeDocument/2006/relationships">
   <p:cSld>
     <p:bg>
       <p:bgPr>
         <a:solidFill>
-          <a:srgbClr val="0B132B"/>
+          <a:srgbClr val="0F1016"/>
         </a:solidFill>
         <a:effectLst/>
       </p:bgPr>
@@ -8558,14 +8593,7 @@
         <p:cNvGrpSpPr/>
         <p:nvPr/>
       </p:nvGrpSpPr>
-      <p:grpSpPr>
-        <a:xfrm>
-          <a:off x="0" y="0"/>
-          <a:ext cx="0" cy="0"/>
-          <a:chOff x="0" y="0"/>
-          <a:chExt cx="0" cy="0"/>
-        </a:xfrm>
-      </p:grpSpPr>
+      <p:grpSpPr/>
       <p:sp>
         <p:nvSpPr>
           <p:cNvPr id="2" name="Rectangle 1"/>
@@ -8581,7 +8609,7 @@
             <a:avLst/>
           </a:prstGeom>
           <a:solidFill>
-            <a:srgbClr val="2DD4BF"/>
+            <a:srgbClr val="E024A5"/>
           </a:solidFill>
           <a:ln>
             <a:noFill/>
@@ -8607,7 +8635,6 @@
           <a:lstStyle/>
           <a:p>
             <a:pPr algn="ctr"/>
-            <a:endParaRPr/>
           </a:p>
         </p:txBody>
       </p:sp>
@@ -8628,7 +8655,7 @@
           <a:noFill/>
         </p:spPr>
         <p:txBody>
-          <a:bodyPr wrap="square" lIns="36576" tIns="18288" rIns="36576" bIns="18288" anchor="t">
+          <a:bodyPr wrap="square" anchor="t" lIns="36576" rIns="36576" tIns="18288" bIns="18288">
             <a:spAutoFit/>
           </a:bodyPr>
           <a:lstStyle/>
@@ -8637,7 +8664,7 @@
             <a:r>
               <a:rPr sz="1200" b="1" i="0">
                 <a:solidFill>
-                  <a:srgbClr val="2DD4BF"/>
+                  <a:srgbClr val="E024A5"/>
                 </a:solidFill>
                 <a:latin typeface="Calibri"/>
               </a:rPr>
@@ -8663,7 +8690,7 @@
           <a:noFill/>
         </p:spPr>
         <p:txBody>
-          <a:bodyPr wrap="square" lIns="36576" tIns="18288" rIns="36576" bIns="18288" anchor="t">
+          <a:bodyPr wrap="square" anchor="t" lIns="36576" rIns="36576" tIns="18288" bIns="18288">
             <a:spAutoFit/>
           </a:bodyPr>
           <a:lstStyle/>
@@ -8672,7 +8699,7 @@
             <a:r>
               <a:rPr sz="4000" b="1" i="0">
                 <a:solidFill>
-                  <a:srgbClr val="F8FAFC"/>
+                  <a:srgbClr val="FAF5FF"/>
                 </a:solidFill>
                 <a:latin typeface="Calibri"/>
               </a:rPr>
@@ -8698,7 +8725,7 @@
           <a:noFill/>
         </p:spPr>
         <p:txBody>
-          <a:bodyPr wrap="square" lIns="36576" tIns="18288" rIns="36576" bIns="18288" anchor="t">
+          <a:bodyPr wrap="square" anchor="t" lIns="36576" rIns="36576" tIns="18288" bIns="18288">
             <a:spAutoFit/>
           </a:bodyPr>
           <a:lstStyle/>
@@ -8707,7 +8734,7 @@
             <a:r>
               <a:rPr sz="1300" b="0" i="0">
                 <a:solidFill>
-                  <a:srgbClr val="94A3B8"/>
+                  <a:srgbClr val="C4B5FD"/>
                 </a:solidFill>
                 <a:latin typeface="Calibri"/>
               </a:rPr>
@@ -8733,7 +8760,7 @@
             </a:avLst>
           </a:prstGeom>
           <a:solidFill>
-            <a:srgbClr val="1C2541"/>
+            <a:srgbClr val="181926"/>
           </a:solidFill>
           <a:ln>
             <a:noFill/>
@@ -8759,7 +8786,6 @@
           <a:lstStyle/>
           <a:p>
             <a:pPr algn="ctr"/>
-            <a:endParaRPr/>
           </a:p>
         </p:txBody>
       </p:sp>
@@ -8804,7 +8830,7 @@
           <a:noFill/>
         </p:spPr>
         <p:txBody>
-          <a:bodyPr wrap="square" lIns="36576" tIns="18288" rIns="36576" bIns="18288" anchor="t">
+          <a:bodyPr wrap="square" anchor="t" lIns="36576" rIns="36576" tIns="18288" bIns="18288">
             <a:spAutoFit/>
           </a:bodyPr>
           <a:lstStyle/>
@@ -8813,7 +8839,7 @@
             <a:r>
               <a:rPr sz="1300" b="0" i="1">
                 <a:solidFill>
-                  <a:srgbClr val="94A3B8"/>
+                  <a:srgbClr val="C4B5FD"/>
                 </a:solidFill>
                 <a:latin typeface="Calibri"/>
               </a:rPr>
@@ -8839,11 +8865,11 @@
             </a:avLst>
           </a:prstGeom>
           <a:solidFill>
-            <a:srgbClr val="243356"/>
+            <a:srgbClr val="2A1B38"/>
           </a:solidFill>
           <a:ln w="19050">
             <a:solidFill>
-              <a:srgbClr val="2DD4BF"/>
+              <a:srgbClr val="E024A5"/>
             </a:solidFill>
           </a:ln>
           <a:effectLst/>
@@ -8867,7 +8893,6 @@
           <a:lstStyle/>
           <a:p>
             <a:pPr algn="ctr"/>
-            <a:endParaRPr/>
           </a:p>
         </p:txBody>
       </p:sp>
@@ -8888,7 +8913,7 @@
           <a:noFill/>
         </p:spPr>
         <p:txBody>
-          <a:bodyPr wrap="square" lIns="36576" tIns="18288" rIns="36576" bIns="18288" anchor="t">
+          <a:bodyPr wrap="square" anchor="t" lIns="36576" rIns="36576" tIns="18288" bIns="18288">
             <a:spAutoFit/>
           </a:bodyPr>
           <a:lstStyle/>
@@ -8897,7 +8922,7 @@
             <a:r>
               <a:rPr sz="6000" b="1" i="0">
                 <a:solidFill>
-                  <a:srgbClr val="2DD4BF"/>
+                  <a:srgbClr val="E024A5"/>
                 </a:solidFill>
                 <a:latin typeface="Calibri"/>
               </a:rPr>
@@ -8923,7 +8948,7 @@
           <a:noFill/>
         </p:spPr>
         <p:txBody>
-          <a:bodyPr wrap="square" lIns="36576" tIns="18288" rIns="36576" bIns="18288" anchor="t">
+          <a:bodyPr wrap="square" anchor="t" lIns="36576" rIns="36576" tIns="18288" bIns="18288">
             <a:spAutoFit/>
           </a:bodyPr>
           <a:lstStyle/>
@@ -8932,7 +8957,7 @@
             <a:r>
               <a:rPr sz="1800" b="0" i="0">
                 <a:solidFill>
-                  <a:srgbClr val="94A3B8"/>
+                  <a:srgbClr val="C4B5FD"/>
                 </a:solidFill>
                 <a:latin typeface="Calibri"/>
               </a:rPr>
@@ -8958,7 +8983,7 @@
             </a:avLst>
           </a:prstGeom>
           <a:solidFill>
-            <a:srgbClr val="1C2541"/>
+            <a:srgbClr val="181926"/>
           </a:solidFill>
           <a:ln>
             <a:noFill/>
@@ -8984,7 +9009,6 @@
           <a:lstStyle/>
           <a:p>
             <a:pPr algn="ctr"/>
-            <a:endParaRPr/>
           </a:p>
         </p:txBody>
       </p:sp>
@@ -9005,7 +9029,7 @@
           <a:noFill/>
         </p:spPr>
         <p:txBody>
-          <a:bodyPr wrap="square" lIns="36576" tIns="18288" rIns="36576" bIns="18288" anchor="t">
+          <a:bodyPr wrap="square" anchor="t" lIns="36576" rIns="36576" tIns="18288" bIns="18288">
             <a:spAutoFit/>
           </a:bodyPr>
           <a:lstStyle/>
@@ -9040,7 +9064,7 @@
           <a:noFill/>
         </p:spPr>
         <p:txBody>
-          <a:bodyPr wrap="square" lIns="36576" tIns="18288" rIns="36576" bIns="18288" anchor="t">
+          <a:bodyPr wrap="square" anchor="t" lIns="36576" rIns="36576" tIns="18288" bIns="18288">
             <a:spAutoFit/>
           </a:bodyPr>
           <a:lstStyle/>
@@ -9049,7 +9073,7 @@
             <a:r>
               <a:rPr sz="1800" b="1" i="0">
                 <a:solidFill>
-                  <a:srgbClr val="F8FAFC"/>
+                  <a:srgbClr val="FAF5FF"/>
                 </a:solidFill>
                 <a:latin typeface="Calibri"/>
               </a:rPr>
@@ -9075,7 +9099,7 @@
             </a:avLst>
           </a:prstGeom>
           <a:solidFill>
-            <a:srgbClr val="1C2541"/>
+            <a:srgbClr val="181926"/>
           </a:solidFill>
           <a:ln>
             <a:noFill/>
@@ -9101,7 +9125,6 @@
           <a:lstStyle/>
           <a:p>
             <a:pPr algn="ctr"/>
-            <a:endParaRPr/>
           </a:p>
         </p:txBody>
       </p:sp>
@@ -9146,7 +9169,7 @@
             </a:avLst>
           </a:prstGeom>
           <a:solidFill>
-            <a:srgbClr val="1C2541"/>
+            <a:srgbClr val="181926"/>
           </a:solidFill>
           <a:ln>
             <a:noFill/>
@@ -9172,7 +9195,6 @@
           <a:lstStyle/>
           <a:p>
             <a:pPr algn="ctr"/>
-            <a:endParaRPr/>
           </a:p>
         </p:txBody>
       </p:sp>
@@ -9209,12 +9231,12 @@
 </file>
 
 <file path=ppt/slides/slide6.xml><?xml version="1.0" encoding="utf-8"?>
-<p:sld xmlns:a="http://schemas.openxmlformats.org/drawingml/2006/main" xmlns:r="http://schemas.openxmlformats.org/officeDocument/2006/relationships" xmlns:p="http://schemas.openxmlformats.org/presentationml/2006/main">
+<p:sld xmlns:a="http://schemas.openxmlformats.org/drawingml/2006/main" xmlns:p="http://schemas.openxmlformats.org/presentationml/2006/main" xmlns:r="http://schemas.openxmlformats.org/officeDocument/2006/relationships">
   <p:cSld>
     <p:bg>
       <p:bgPr>
         <a:solidFill>
-          <a:srgbClr val="0B132B"/>
+          <a:srgbClr val="0F1016"/>
         </a:solidFill>
         <a:effectLst/>
       </p:bgPr>
@@ -9225,14 +9247,7 @@
         <p:cNvGrpSpPr/>
         <p:nvPr/>
       </p:nvGrpSpPr>
-      <p:grpSpPr>
-        <a:xfrm>
-          <a:off x="0" y="0"/>
-          <a:ext cx="0" cy="0"/>
-          <a:chOff x="0" y="0"/>
-          <a:chExt cx="0" cy="0"/>
-        </a:xfrm>
-      </p:grpSpPr>
+      <p:grpSpPr/>
       <p:sp>
         <p:nvSpPr>
           <p:cNvPr id="2" name="Rectangle 1"/>
@@ -9248,7 +9263,7 @@
             <a:avLst/>
           </a:prstGeom>
           <a:solidFill>
-            <a:srgbClr val="2DD4BF"/>
+            <a:srgbClr val="E024A5"/>
           </a:solidFill>
           <a:ln>
             <a:noFill/>
@@ -9274,7 +9289,6 @@
           <a:lstStyle/>
           <a:p>
             <a:pPr algn="ctr"/>
-            <a:endParaRPr/>
           </a:p>
         </p:txBody>
       </p:sp>
@@ -9295,7 +9309,7 @@
           <a:noFill/>
         </p:spPr>
         <p:txBody>
-          <a:bodyPr wrap="square" lIns="36576" tIns="18288" rIns="36576" bIns="18288" anchor="t">
+          <a:bodyPr wrap="square" anchor="t" lIns="36576" rIns="36576" tIns="18288" bIns="18288">
             <a:spAutoFit/>
           </a:bodyPr>
           <a:lstStyle/>
@@ -9304,7 +9318,7 @@
             <a:r>
               <a:rPr sz="1200" b="1" i="0">
                 <a:solidFill>
-                  <a:srgbClr val="2DD4BF"/>
+                  <a:srgbClr val="E024A5"/>
                 </a:solidFill>
                 <a:latin typeface="Calibri"/>
               </a:rPr>
@@ -9330,7 +9344,7 @@
           <a:noFill/>
         </p:spPr>
         <p:txBody>
-          <a:bodyPr wrap="square" lIns="36576" tIns="18288" rIns="36576" bIns="18288" anchor="t">
+          <a:bodyPr wrap="square" anchor="t" lIns="36576" rIns="36576" tIns="18288" bIns="18288">
             <a:spAutoFit/>
           </a:bodyPr>
           <a:lstStyle/>
@@ -9339,7 +9353,7 @@
             <a:r>
               <a:rPr sz="4000" b="1" i="0">
                 <a:solidFill>
-                  <a:srgbClr val="F8FAFC"/>
+                  <a:srgbClr val="FAF5FF"/>
                 </a:solidFill>
                 <a:latin typeface="Calibri"/>
               </a:rPr>
@@ -9365,7 +9379,7 @@
           <a:noFill/>
         </p:spPr>
         <p:txBody>
-          <a:bodyPr wrap="square" lIns="36576" tIns="18288" rIns="36576" bIns="18288" anchor="t">
+          <a:bodyPr wrap="square" anchor="t" lIns="36576" rIns="36576" tIns="18288" bIns="18288">
             <a:spAutoFit/>
           </a:bodyPr>
           <a:lstStyle/>
@@ -9374,7 +9388,7 @@
             <a:r>
               <a:rPr sz="1300" b="0" i="0">
                 <a:solidFill>
-                  <a:srgbClr val="94A3B8"/>
+                  <a:srgbClr val="C4B5FD"/>
                 </a:solidFill>
                 <a:latin typeface="Calibri"/>
               </a:rPr>
@@ -9400,7 +9414,7 @@
             </a:avLst>
           </a:prstGeom>
           <a:solidFill>
-            <a:srgbClr val="1C2541"/>
+            <a:srgbClr val="181926"/>
           </a:solidFill>
           <a:ln>
             <a:noFill/>
@@ -9426,7 +9440,6 @@
           <a:lstStyle/>
           <a:p>
             <a:pPr algn="ctr"/>
-            <a:endParaRPr/>
           </a:p>
         </p:txBody>
       </p:sp>
@@ -9471,7 +9484,7 @@
           <a:noFill/>
         </p:spPr>
         <p:txBody>
-          <a:bodyPr wrap="square" lIns="36576" tIns="18288" rIns="36576" bIns="18288" anchor="t">
+          <a:bodyPr wrap="square" anchor="t" lIns="36576" rIns="36576" tIns="18288" bIns="18288">
             <a:spAutoFit/>
           </a:bodyPr>
           <a:lstStyle/>
@@ -9480,7 +9493,7 @@
             <a:r>
               <a:rPr sz="1300" b="0" i="1">
                 <a:solidFill>
-                  <a:srgbClr val="94A3B8"/>
+                  <a:srgbClr val="C4B5FD"/>
                 </a:solidFill>
                 <a:latin typeface="Calibri"/>
               </a:rPr>
@@ -9506,7 +9519,7 @@
             </a:avLst>
           </a:prstGeom>
           <a:solidFill>
-            <a:srgbClr val="1C2541"/>
+            <a:srgbClr val="181926"/>
           </a:solidFill>
           <a:ln>
             <a:noFill/>
@@ -9532,7 +9545,6 @@
           <a:lstStyle/>
           <a:p>
             <a:pPr algn="ctr"/>
-            <a:endParaRPr/>
           </a:p>
         </p:txBody>
       </p:sp>
@@ -9577,7 +9589,7 @@
           <a:noFill/>
         </p:spPr>
         <p:txBody>
-          <a:bodyPr wrap="square" lIns="36576" tIns="18288" rIns="36576" bIns="18288" anchor="t">
+          <a:bodyPr wrap="square" anchor="t" lIns="36576" rIns="36576" tIns="18288" bIns="18288">
             <a:spAutoFit/>
           </a:bodyPr>
           <a:lstStyle/>
@@ -9586,7 +9598,7 @@
             <a:r>
               <a:rPr sz="1300" b="0" i="1">
                 <a:solidFill>
-                  <a:srgbClr val="94A3B8"/>
+                  <a:srgbClr val="C4B5FD"/>
                 </a:solidFill>
                 <a:latin typeface="Calibri"/>
               </a:rPr>
@@ -9612,7 +9624,7 @@
             </a:avLst>
           </a:prstGeom>
           <a:solidFill>
-            <a:srgbClr val="1C2541"/>
+            <a:srgbClr val="181926"/>
           </a:solidFill>
           <a:ln>
             <a:noFill/>
@@ -9638,95 +9650,12 @@
           <a:lstStyle/>
           <a:p>
             <a:pPr algn="ctr"/>
-            <a:endParaRPr/>
-          </a:p>
-        </p:txBody>
-      </p:sp>
-      <p:sp>
-        <p:nvSpPr>
-          <p:cNvPr id="14" name="TextBox 13"/>
-          <p:cNvSpPr txBox="1"/>
-          <p:nvPr/>
-        </p:nvSpPr>
-        <p:spPr>
-          <a:xfrm>
-            <a:off x="6217920" y="5138928"/>
-            <a:ext cx="2560320" cy="256032"/>
-          </a:xfrm>
-          <a:prstGeom prst="rect">
-            <a:avLst/>
-          </a:prstGeom>
-          <a:noFill/>
-        </p:spPr>
-        <p:txBody>
-          <a:bodyPr wrap="square" lIns="36576" tIns="18288" rIns="36576" bIns="18288" anchor="t">
-            <a:spAutoFit/>
-          </a:bodyPr>
-          <a:lstStyle/>
-          <a:p>
-            <a:pPr algn="ctr"/>
-            <a:r>
-              <a:rPr sz="1300" b="0" i="1">
-                <a:solidFill>
-                  <a:srgbClr val="94A3B8"/>
-                </a:solidFill>
-                <a:latin typeface="Calibri"/>
-              </a:rPr>
-              <a:t>3. Panel oscilando</a:t>
-            </a:r>
-          </a:p>
-        </p:txBody>
-      </p:sp>
-      <p:sp>
-        <p:nvSpPr>
-          <p:cNvPr id="15" name="Rounded Rectangle 14"/>
-          <p:cNvSpPr/>
-          <p:nvPr/>
-        </p:nvSpPr>
-        <p:spPr>
-          <a:xfrm>
-            <a:off x="8961120" y="1645920"/>
-            <a:ext cx="2560320" cy="3474720"/>
-          </a:xfrm>
-          <a:prstGeom prst="roundRect">
-            <a:avLst>
-              <a:gd name="adj" fmla="val 3000"/>
-            </a:avLst>
-          </a:prstGeom>
-          <a:solidFill>
-            <a:srgbClr val="1C2541"/>
-          </a:solidFill>
-          <a:ln>
-            <a:noFill/>
-          </a:ln>
-          <a:effectLst/>
-        </p:spPr>
-        <p:style>
-          <a:lnRef idx="1">
-            <a:schemeClr val="accent1"/>
-          </a:lnRef>
-          <a:fillRef idx="3">
-            <a:schemeClr val="accent1"/>
-          </a:fillRef>
-          <a:effectRef idx="2">
-            <a:schemeClr val="accent1"/>
-          </a:effectRef>
-          <a:fontRef idx="minor">
-            <a:schemeClr val="lt1"/>
-          </a:fontRef>
-        </p:style>
-        <p:txBody>
-          <a:bodyPr rtlCol="0" anchor="ctr"/>
-          <a:lstStyle/>
-          <a:p>
-            <a:pPr algn="ctr"/>
-            <a:endParaRPr/>
           </a:p>
         </p:txBody>
       </p:sp>
       <p:pic>
         <p:nvPicPr>
-          <p:cNvPr id="16" name="Picture 15" descr="sofia_saludo3.png"/>
+          <p:cNvPr id="13" name="Picture 12" descr="sofia_saludo2.png"/>
           <p:cNvPicPr>
             <a:picLocks noChangeAspect="1"/>
           </p:cNvPicPr>
@@ -9740,8 +9669,8 @@
         </p:blipFill>
         <p:spPr>
           <a:xfrm>
-            <a:off x="6272784" y="2729937"/>
-            <a:ext cx="2450592" cy="1379837"/>
+            <a:off x="6272784" y="2688391"/>
+            <a:ext cx="2450592" cy="1389777"/>
           </a:xfrm>
           <a:prstGeom prst="rect">
             <a:avLst/>
@@ -9750,13 +9679,13 @@
       </p:pic>
       <p:sp>
         <p:nvSpPr>
-          <p:cNvPr id="17" name="TextBox 16"/>
+          <p:cNvPr id="14" name="TextBox 13"/>
           <p:cNvSpPr txBox="1"/>
           <p:nvPr/>
         </p:nvSpPr>
         <p:spPr>
           <a:xfrm>
-            <a:off x="8961120" y="5138928"/>
+            <a:off x="6217920" y="5138928"/>
             <a:ext cx="2560320" cy="256032"/>
           </a:xfrm>
           <a:prstGeom prst="rect">
@@ -9765,7 +9694,7 @@
           <a:noFill/>
         </p:spPr>
         <p:txBody>
-          <a:bodyPr wrap="square" lIns="36576" tIns="18288" rIns="36576" bIns="18288" anchor="t">
+          <a:bodyPr wrap="square" anchor="t" lIns="36576" rIns="36576" tIns="18288" bIns="18288">
             <a:spAutoFit/>
           </a:bodyPr>
           <a:lstStyle/>
@@ -9774,33 +9703,33 @@
             <a:r>
               <a:rPr sz="1300" b="0" i="1">
                 <a:solidFill>
-                  <a:srgbClr val="94A3B8"/>
-                </a:solidFill>
-                <a:latin typeface="Calibri"/>
-              </a:rPr>
-              <a:t>4. Retorno a centro</a:t>
-            </a:r>
-          </a:p>
-        </p:txBody>
-      </p:sp>
-      <p:sp>
-        <p:nvSpPr>
-          <p:cNvPr id="18" name="Rounded Rectangle 17"/>
+                  <a:srgbClr val="C4B5FD"/>
+                </a:solidFill>
+                <a:latin typeface="Calibri"/>
+              </a:rPr>
+              <a:t>3. Panel oscilando</a:t>
+            </a:r>
+          </a:p>
+        </p:txBody>
+      </p:sp>
+      <p:sp>
+        <p:nvSpPr>
+          <p:cNvPr id="15" name="Rounded Rectangle 14"/>
           <p:cNvSpPr/>
           <p:nvPr/>
         </p:nvSpPr>
         <p:spPr>
           <a:xfrm>
-            <a:off x="731520" y="5440680"/>
-            <a:ext cx="10789920" cy="822960"/>
+            <a:off x="8961120" y="1645920"/>
+            <a:ext cx="2560320" cy="3474720"/>
           </a:xfrm>
           <a:prstGeom prst="roundRect">
             <a:avLst>
-              <a:gd name="adj" fmla="val 4000"/>
+              <a:gd name="adj" fmla="val 3000"/>
             </a:avLst>
           </a:prstGeom>
           <a:solidFill>
-            <a:srgbClr val="1C2541"/>
+            <a:srgbClr val="181926"/>
           </a:solidFill>
           <a:ln>
             <a:noFill/>
@@ -9826,118 +9755,12 @@
           <a:lstStyle/>
           <a:p>
             <a:pPr algn="ctr"/>
-            <a:endParaRPr/>
-          </a:p>
-        </p:txBody>
-      </p:sp>
-      <p:sp>
-        <p:nvSpPr>
-          <p:cNvPr id="19" name="TextBox 18"/>
-          <p:cNvSpPr txBox="1"/>
-          <p:nvPr/>
-        </p:nvSpPr>
-        <p:spPr>
-          <a:xfrm>
-            <a:off x="822960" y="5623560"/>
-            <a:ext cx="3474720" cy="457200"/>
-          </a:xfrm>
-          <a:prstGeom prst="rect">
-            <a:avLst/>
-          </a:prstGeom>
-          <a:noFill/>
-        </p:spPr>
-        <p:txBody>
-          <a:bodyPr wrap="square" lIns="36576" tIns="18288" rIns="36576" bIns="18288" anchor="t">
-            <a:spAutoFit/>
-          </a:bodyPr>
-          <a:lstStyle/>
-          <a:p>
-            <a:pPr algn="ctr"/>
-            <a:r>
-              <a:rPr sz="2000" b="1" i="0">
-                <a:solidFill>
-                  <a:srgbClr val="F8FAFC"/>
-                </a:solidFill>
-                <a:latin typeface="Calibri"/>
-              </a:rPr>
-              <a:t>⚡ Enlace Bluetooth sin cables</a:t>
-            </a:r>
-          </a:p>
-        </p:txBody>
-      </p:sp>
-      <p:sp>
-        <p:nvSpPr>
-          <p:cNvPr id="20" name="TextBox 19"/>
-          <p:cNvSpPr txBox="1"/>
-          <p:nvPr/>
-        </p:nvSpPr>
-        <p:spPr>
-          <a:xfrm>
-            <a:off x="4389120" y="5623560"/>
-            <a:ext cx="3474720" cy="457200"/>
-          </a:xfrm>
-          <a:prstGeom prst="rect">
-            <a:avLst/>
-          </a:prstGeom>
-          <a:noFill/>
-        </p:spPr>
-        <p:txBody>
-          <a:bodyPr wrap="square" lIns="36576" tIns="18288" rIns="36576" bIns="18288" anchor="t">
-            <a:spAutoFit/>
-          </a:bodyPr>
-          <a:lstStyle/>
-          <a:p>
-            <a:pPr algn="ctr"/>
-            <a:r>
-              <a:rPr sz="2000" b="1" i="0">
-                <a:solidFill>
-                  <a:srgbClr val="F8FAFC"/>
-                </a:solidFill>
-                <a:latin typeface="Calibri"/>
-              </a:rPr>
-              <a:t>⏱️ Respuesta en menos de 100 ms</a:t>
-            </a:r>
-          </a:p>
-        </p:txBody>
-      </p:sp>
-      <p:sp>
-        <p:nvSpPr>
-          <p:cNvPr id="21" name="TextBox 20"/>
-          <p:cNvSpPr txBox="1"/>
-          <p:nvPr/>
-        </p:nvSpPr>
-        <p:spPr>
-          <a:xfrm>
-            <a:off x="7955279" y="5623560"/>
-            <a:ext cx="3474720" cy="457200"/>
-          </a:xfrm>
-          <a:prstGeom prst="rect">
-            <a:avLst/>
-          </a:prstGeom>
-          <a:noFill/>
-        </p:spPr>
-        <p:txBody>
-          <a:bodyPr wrap="square" lIns="36576" tIns="18288" rIns="36576" bIns="18288" anchor="t">
-            <a:spAutoFit/>
-          </a:bodyPr>
-          <a:lstStyle/>
-          <a:p>
-            <a:pPr algn="ctr"/>
-            <a:r>
-              <a:rPr sz="2000" b="1" i="0">
-                <a:solidFill>
-                  <a:srgbClr val="F8FAFC"/>
-                </a:solidFill>
-                <a:latin typeface="Calibri"/>
-              </a:rPr>
-              <a:t>🔄 Movimiento suave y sincronizado</a:t>
-            </a:r>
           </a:p>
         </p:txBody>
       </p:sp>
       <p:pic>
         <p:nvPicPr>
-          <p:cNvPr id="13" name="Picture 12" descr="sofia_saludo2.png"/>
+          <p:cNvPr id="16" name="Picture 15" descr="sofia_saludo3.png"/>
           <p:cNvPicPr>
             <a:picLocks noChangeAspect="1"/>
           </p:cNvPicPr>
@@ -9951,14 +9774,200 @@
         </p:blipFill>
         <p:spPr>
           <a:xfrm>
-            <a:off x="9015984" y="2734111"/>
-            <a:ext cx="2450592" cy="1389777"/>
+            <a:off x="9015984" y="2693361"/>
+            <a:ext cx="2450592" cy="1379837"/>
           </a:xfrm>
           <a:prstGeom prst="rect">
             <a:avLst/>
           </a:prstGeom>
         </p:spPr>
       </p:pic>
+      <p:sp>
+        <p:nvSpPr>
+          <p:cNvPr id="17" name="TextBox 16"/>
+          <p:cNvSpPr txBox="1"/>
+          <p:nvPr/>
+        </p:nvSpPr>
+        <p:spPr>
+          <a:xfrm>
+            <a:off x="8961120" y="5138928"/>
+            <a:ext cx="2560320" cy="256032"/>
+          </a:xfrm>
+          <a:prstGeom prst="rect">
+            <a:avLst/>
+          </a:prstGeom>
+          <a:noFill/>
+        </p:spPr>
+        <p:txBody>
+          <a:bodyPr wrap="square" anchor="t" lIns="36576" rIns="36576" tIns="18288" bIns="18288">
+            <a:spAutoFit/>
+          </a:bodyPr>
+          <a:lstStyle/>
+          <a:p>
+            <a:pPr algn="ctr"/>
+            <a:r>
+              <a:rPr sz="1300" b="0" i="1">
+                <a:solidFill>
+                  <a:srgbClr val="C4B5FD"/>
+                </a:solidFill>
+                <a:latin typeface="Calibri"/>
+              </a:rPr>
+              <a:t>4. Retorno a centro</a:t>
+            </a:r>
+          </a:p>
+        </p:txBody>
+      </p:sp>
+      <p:sp>
+        <p:nvSpPr>
+          <p:cNvPr id="18" name="Rounded Rectangle 17"/>
+          <p:cNvSpPr/>
+          <p:nvPr/>
+        </p:nvSpPr>
+        <p:spPr>
+          <a:xfrm>
+            <a:off x="731520" y="5440680"/>
+            <a:ext cx="10789920" cy="822960"/>
+          </a:xfrm>
+          <a:prstGeom prst="roundRect">
+            <a:avLst>
+              <a:gd name="adj" fmla="val 4000"/>
+            </a:avLst>
+          </a:prstGeom>
+          <a:solidFill>
+            <a:srgbClr val="181926"/>
+          </a:solidFill>
+          <a:ln>
+            <a:noFill/>
+          </a:ln>
+          <a:effectLst/>
+        </p:spPr>
+        <p:style>
+          <a:lnRef idx="1">
+            <a:schemeClr val="accent1"/>
+          </a:lnRef>
+          <a:fillRef idx="3">
+            <a:schemeClr val="accent1"/>
+          </a:fillRef>
+          <a:effectRef idx="2">
+            <a:schemeClr val="accent1"/>
+          </a:effectRef>
+          <a:fontRef idx="minor">
+            <a:schemeClr val="lt1"/>
+          </a:fontRef>
+        </p:style>
+        <p:txBody>
+          <a:bodyPr rtlCol="0" anchor="ctr"/>
+          <a:lstStyle/>
+          <a:p>
+            <a:pPr algn="ctr"/>
+          </a:p>
+        </p:txBody>
+      </p:sp>
+      <p:sp>
+        <p:nvSpPr>
+          <p:cNvPr id="19" name="TextBox 18"/>
+          <p:cNvSpPr txBox="1"/>
+          <p:nvPr/>
+        </p:nvSpPr>
+        <p:spPr>
+          <a:xfrm>
+            <a:off x="822960" y="5623560"/>
+            <a:ext cx="3474720" cy="457200"/>
+          </a:xfrm>
+          <a:prstGeom prst="rect">
+            <a:avLst/>
+          </a:prstGeom>
+          <a:noFill/>
+        </p:spPr>
+        <p:txBody>
+          <a:bodyPr wrap="square" anchor="t" lIns="36576" rIns="36576" tIns="18288" bIns="18288">
+            <a:spAutoFit/>
+          </a:bodyPr>
+          <a:lstStyle/>
+          <a:p>
+            <a:pPr algn="ctr"/>
+            <a:r>
+              <a:rPr sz="2000" b="1" i="0">
+                <a:solidFill>
+                  <a:srgbClr val="FAF5FF"/>
+                </a:solidFill>
+                <a:latin typeface="Calibri"/>
+              </a:rPr>
+              <a:t>⏱️ Cámara + BLE: ~45–50 ms</a:t>
+            </a:r>
+          </a:p>
+        </p:txBody>
+      </p:sp>
+      <p:sp>
+        <p:nvSpPr>
+          <p:cNvPr id="20" name="TextBox 19"/>
+          <p:cNvSpPr txBox="1"/>
+          <p:nvPr/>
+        </p:nvSpPr>
+        <p:spPr>
+          <a:xfrm>
+            <a:off x="4389120" y="5623560"/>
+            <a:ext cx="3474720" cy="457200"/>
+          </a:xfrm>
+          <a:prstGeom prst="rect">
+            <a:avLst/>
+          </a:prstGeom>
+          <a:noFill/>
+        </p:spPr>
+        <p:txBody>
+          <a:bodyPr wrap="square" anchor="t" lIns="36576" rIns="36576" tIns="18288" bIns="18288">
+            <a:spAutoFit/>
+          </a:bodyPr>
+          <a:lstStyle/>
+          <a:p>
+            <a:pPr algn="ctr"/>
+            <a:r>
+              <a:rPr sz="2000" b="1" i="0">
+                <a:solidFill>
+                  <a:srgbClr val="FAF5FF"/>
+                </a:solidFill>
+                <a:latin typeface="Calibri"/>
+              </a:rPr>
+              <a:t>🔄 Ensayos repetidos (N=10)</a:t>
+            </a:r>
+          </a:p>
+        </p:txBody>
+      </p:sp>
+      <p:sp>
+        <p:nvSpPr>
+          <p:cNvPr id="21" name="TextBox 20"/>
+          <p:cNvSpPr txBox="1"/>
+          <p:nvPr/>
+        </p:nvSpPr>
+        <p:spPr>
+          <a:xfrm>
+            <a:off x="7955279" y="5623560"/>
+            <a:ext cx="3474720" cy="457200"/>
+          </a:xfrm>
+          <a:prstGeom prst="rect">
+            <a:avLst/>
+          </a:prstGeom>
+          <a:noFill/>
+        </p:spPr>
+        <p:txBody>
+          <a:bodyPr wrap="square" anchor="t" lIns="36576" rIns="36576" tIns="18288" bIns="18288">
+            <a:spAutoFit/>
+          </a:bodyPr>
+          <a:lstStyle/>
+          <a:p>
+            <a:pPr algn="ctr"/>
+            <a:r>
+              <a:rPr sz="2000" b="1" i="0">
+                <a:solidFill>
+                  <a:srgbClr val="FAF5FF"/>
+                </a:solidFill>
+                <a:latin typeface="Calibri"/>
+              </a:rPr>
+              <a:t>🛡️ Corte &lt; 15 s diseñado</a:t>
+            </a:r>
+          </a:p>
+        </p:txBody>
+      </p:sp>
     </p:spTree>
   </p:cSld>
   <p:clrMapOvr>
@@ -9968,12 +9977,12 @@
 </file>
 
 <file path=ppt/slides/slide7.xml><?xml version="1.0" encoding="utf-8"?>
-<p:sld xmlns:a="http://schemas.openxmlformats.org/drawingml/2006/main" xmlns:r="http://schemas.openxmlformats.org/officeDocument/2006/relationships" xmlns:p="http://schemas.openxmlformats.org/presentationml/2006/main">
+<p:sld xmlns:a="http://schemas.openxmlformats.org/drawingml/2006/main" xmlns:p="http://schemas.openxmlformats.org/presentationml/2006/main" xmlns:r="http://schemas.openxmlformats.org/officeDocument/2006/relationships">
   <p:cSld>
     <p:bg>
       <p:bgPr>
         <a:solidFill>
-          <a:srgbClr val="0B132B"/>
+          <a:srgbClr val="0F1016"/>
         </a:solidFill>
         <a:effectLst/>
       </p:bgPr>
@@ -9984,14 +9993,7 @@
         <p:cNvGrpSpPr/>
         <p:nvPr/>
       </p:nvGrpSpPr>
-      <p:grpSpPr>
-        <a:xfrm>
-          <a:off x="0" y="0"/>
-          <a:ext cx="0" cy="0"/>
-          <a:chOff x="0" y="0"/>
-          <a:chExt cx="0" cy="0"/>
-        </a:xfrm>
-      </p:grpSpPr>
+      <p:grpSpPr/>
       <p:sp>
         <p:nvSpPr>
           <p:cNvPr id="2" name="Rectangle 1"/>
@@ -10007,7 +10009,7 @@
             <a:avLst/>
           </a:prstGeom>
           <a:solidFill>
-            <a:srgbClr val="2DD4BF"/>
+            <a:srgbClr val="E024A5"/>
           </a:solidFill>
           <a:ln>
             <a:noFill/>
@@ -10033,7 +10035,6 @@
           <a:lstStyle/>
           <a:p>
             <a:pPr algn="ctr"/>
-            <a:endParaRPr/>
           </a:p>
         </p:txBody>
       </p:sp>
@@ -10054,7 +10055,7 @@
           <a:noFill/>
         </p:spPr>
         <p:txBody>
-          <a:bodyPr wrap="square" lIns="36576" tIns="18288" rIns="36576" bIns="18288" anchor="t">
+          <a:bodyPr wrap="square" anchor="t" lIns="36576" rIns="36576" tIns="18288" bIns="18288">
             <a:spAutoFit/>
           </a:bodyPr>
           <a:lstStyle/>
@@ -10063,7 +10064,7 @@
             <a:r>
               <a:rPr sz="1200" b="1" i="0">
                 <a:solidFill>
-                  <a:srgbClr val="2DD4BF"/>
+                  <a:srgbClr val="E024A5"/>
                 </a:solidFill>
                 <a:latin typeface="Calibri"/>
               </a:rPr>
@@ -10089,7 +10090,7 @@
           <a:noFill/>
         </p:spPr>
         <p:txBody>
-          <a:bodyPr wrap="square" lIns="36576" tIns="18288" rIns="36576" bIns="18288" anchor="t">
+          <a:bodyPr wrap="square" anchor="t" lIns="36576" rIns="36576" tIns="18288" bIns="18288">
             <a:spAutoFit/>
           </a:bodyPr>
           <a:lstStyle/>
@@ -10098,11 +10099,11 @@
             <a:r>
               <a:rPr sz="4000" b="1" i="0">
                 <a:solidFill>
-                  <a:srgbClr val="F8FAFC"/>
-                </a:solidFill>
-                <a:latin typeface="Calibri"/>
-              </a:rPr>
-              <a:t>Si un panel se atora, en 3 minutos se quema</a:t>
+                  <a:srgbClr val="FAF5FF"/>
+                </a:solidFill>
+                <a:latin typeface="Calibri"/>
+              </a:rPr>
+              <a:t>Si un panel se atora, en menos de 4 minutos se quema</a:t>
             </a:r>
           </a:p>
         </p:txBody>
@@ -10124,7 +10125,7 @@
           <a:noFill/>
         </p:spPr>
         <p:txBody>
-          <a:bodyPr wrap="square" lIns="36576" tIns="18288" rIns="36576" bIns="18288" anchor="t">
+          <a:bodyPr wrap="square" anchor="t" lIns="36576" rIns="36576" tIns="18288" bIns="18288">
             <a:spAutoFit/>
           </a:bodyPr>
           <a:lstStyle/>
@@ -10133,7 +10134,7 @@
             <a:r>
               <a:rPr sz="1300" b="0" i="0">
                 <a:solidFill>
-                  <a:srgbClr val="94A3B8"/>
+                  <a:srgbClr val="C4B5FD"/>
                 </a:solidFill>
                 <a:latin typeface="Calibri"/>
               </a:rPr>
@@ -10159,7 +10160,7 @@
             </a:avLst>
           </a:prstGeom>
           <a:solidFill>
-            <a:srgbClr val="1C2541"/>
+            <a:srgbClr val="181926"/>
           </a:solidFill>
           <a:ln>
             <a:noFill/>
@@ -10185,7 +10186,6 @@
           <a:lstStyle/>
           <a:p>
             <a:pPr algn="ctr"/>
-            <a:endParaRPr/>
           </a:p>
         </p:txBody>
       </p:sp>
@@ -10230,7 +10230,7 @@
           <a:noFill/>
         </p:spPr>
         <p:txBody>
-          <a:bodyPr wrap="square" lIns="36576" tIns="18288" rIns="36576" bIns="18288" anchor="t">
+          <a:bodyPr wrap="square" anchor="t" lIns="36576" rIns="36576" tIns="18288" bIns="18288">
             <a:spAutoFit/>
           </a:bodyPr>
           <a:lstStyle/>
@@ -10239,7 +10239,7 @@
             <a:r>
               <a:rPr sz="1300" b="0" i="1">
                 <a:solidFill>
-                  <a:srgbClr val="94A3B8"/>
+                  <a:srgbClr val="C4B5FD"/>
                 </a:solidFill>
                 <a:latin typeface="Calibri"/>
               </a:rPr>
@@ -10265,11 +10265,11 @@
             </a:avLst>
           </a:prstGeom>
           <a:solidFill>
-            <a:srgbClr val="1C2541"/>
+            <a:srgbClr val="181926"/>
           </a:solidFill>
           <a:ln w="19050">
             <a:solidFill>
-              <a:srgbClr val="F87171"/>
+              <a:srgbClr val="FB7185"/>
             </a:solidFill>
           </a:ln>
           <a:effectLst/>
@@ -10293,7 +10293,6 @@
           <a:lstStyle/>
           <a:p>
             <a:pPr algn="ctr"/>
-            <a:endParaRPr/>
           </a:p>
         </p:txBody>
       </p:sp>
@@ -10314,7 +10313,7 @@
           <a:noFill/>
         </p:spPr>
         <p:txBody>
-          <a:bodyPr wrap="square" lIns="36576" tIns="18288" rIns="36576" bIns="18288" anchor="t">
+          <a:bodyPr wrap="square" anchor="t" lIns="36576" rIns="36576" tIns="18288" bIns="18288">
             <a:spAutoFit/>
           </a:bodyPr>
           <a:lstStyle/>
@@ -10323,7 +10322,7 @@
             <a:r>
               <a:rPr sz="6000" b="1" i="0">
                 <a:solidFill>
-                  <a:srgbClr val="F87171"/>
+                  <a:srgbClr val="FB7185"/>
                 </a:solidFill>
                 <a:latin typeface="Calibri"/>
               </a:rPr>
@@ -10349,7 +10348,7 @@
           <a:noFill/>
         </p:spPr>
         <p:txBody>
-          <a:bodyPr wrap="square" lIns="36576" tIns="18288" rIns="36576" bIns="18288" anchor="t">
+          <a:bodyPr wrap="square" anchor="t" lIns="36576" rIns="36576" tIns="18288" bIns="18288">
             <a:spAutoFit/>
           </a:bodyPr>
           <a:lstStyle/>
@@ -10358,11 +10357,11 @@
             <a:r>
               <a:rPr sz="1600" b="0" i="0">
                 <a:solidFill>
-                  <a:srgbClr val="94A3B8"/>
-                </a:solidFill>
-                <a:latin typeface="Calibri"/>
-              </a:rPr>
-              <a:t>a los 226 s (engrane forzándose)</a:t>
+                  <a:srgbClr val="C4B5FD"/>
+                </a:solidFill>
+                <a:latin typeface="Calibri"/>
+              </a:rPr>
+              <a:t>a los 226 s (engrane forzado)</a:t>
             </a:r>
           </a:p>
         </p:txBody>
@@ -10384,7 +10383,7 @@
             </a:avLst>
           </a:prstGeom>
           <a:solidFill>
-            <a:srgbClr val="1C2541"/>
+            <a:srgbClr val="181926"/>
           </a:solidFill>
           <a:ln w="19050">
             <a:solidFill>
@@ -10412,7 +10411,6 @@
           <a:lstStyle/>
           <a:p>
             <a:pPr algn="ctr"/>
-            <a:endParaRPr/>
           </a:p>
         </p:txBody>
       </p:sp>
@@ -10433,20 +10431,20 @@
           <a:noFill/>
         </p:spPr>
         <p:txBody>
-          <a:bodyPr wrap="square" lIns="36576" tIns="18288" rIns="36576" bIns="18288" anchor="t">
+          <a:bodyPr wrap="square" anchor="t" lIns="36576" rIns="36576" tIns="18288" bIns="18288">
             <a:spAutoFit/>
           </a:bodyPr>
           <a:lstStyle/>
           <a:p>
             <a:pPr algn="ctr"/>
             <a:r>
-              <a:rPr sz="6000" b="1" i="0">
+              <a:rPr sz="5200" b="1" i="0">
                 <a:solidFill>
                   <a:srgbClr val="F59E0B"/>
                 </a:solidFill>
                 <a:latin typeface="Calibri"/>
               </a:rPr>
-              <a:t>3 min</a:t>
+              <a:t>13 °C/min</a:t>
             </a:r>
           </a:p>
         </p:txBody>
@@ -10468,7 +10466,7 @@
           <a:noFill/>
         </p:spPr>
         <p:txBody>
-          <a:bodyPr wrap="square" lIns="36576" tIns="18288" rIns="36576" bIns="18288" anchor="t">
+          <a:bodyPr wrap="square" anchor="t" lIns="36576" rIns="36576" tIns="18288" bIns="18288">
             <a:spAutoFit/>
           </a:bodyPr>
           <a:lstStyle/>
@@ -10477,11 +10475,11 @@
             <a:r>
               <a:rPr sz="1600" b="0" i="0">
                 <a:solidFill>
-                  <a:srgbClr val="94A3B8"/>
-                </a:solidFill>
-                <a:latin typeface="Calibri"/>
-              </a:rPr>
-              <a:t>pasa de 60 °C (plástico se afloja)</a:t>
+                  <a:srgbClr val="C4B5FD"/>
+                </a:solidFill>
+                <a:latin typeface="Calibri"/>
+              </a:rPr>
+              <a:t>a 3 min: 55 °C límite seguro</a:t>
             </a:r>
           </a:p>
         </p:txBody>
@@ -10503,11 +10501,11 @@
             </a:avLst>
           </a:prstGeom>
           <a:solidFill>
-            <a:srgbClr val="243356"/>
+            <a:srgbClr val="2A1B38"/>
           </a:solidFill>
           <a:ln w="19050">
             <a:solidFill>
-              <a:srgbClr val="2DD4BF"/>
+              <a:srgbClr val="E024A5"/>
             </a:solidFill>
           </a:ln>
           <a:effectLst/>
@@ -10531,7 +10529,6 @@
           <a:lstStyle/>
           <a:p>
             <a:pPr algn="ctr"/>
-            <a:endParaRPr/>
           </a:p>
         </p:txBody>
       </p:sp>
@@ -10552,7 +10549,7 @@
           <a:noFill/>
         </p:spPr>
         <p:txBody>
-          <a:bodyPr wrap="square" lIns="36576" tIns="18288" rIns="36576" bIns="18288" anchor="t">
+          <a:bodyPr wrap="square" anchor="t" lIns="36576" rIns="36576" tIns="18288" bIns="18288">
             <a:spAutoFit/>
           </a:bodyPr>
           <a:lstStyle/>
@@ -10561,11 +10558,11 @@
             <a:r>
               <a:rPr sz="2400" b="1" i="0">
                 <a:solidFill>
-                  <a:srgbClr val="2DD4BF"/>
-                </a:solidFill>
-                <a:latin typeface="Calibri"/>
-              </a:rPr>
-              <a:t>Por eso diseñamos un corte automático a los 15 s</a:t>
+                  <a:srgbClr val="E024A5"/>
+                </a:solidFill>
+                <a:latin typeface="Calibri"/>
+              </a:rPr>
+              <a:t>Con corte a 15 s: sube solo ~3 °C</a:t>
             </a:r>
           </a:p>
         </p:txBody>
@@ -10579,12 +10576,12 @@
 </file>
 
 <file path=ppt/slides/slide8.xml><?xml version="1.0" encoding="utf-8"?>
-<p:sld xmlns:a="http://schemas.openxmlformats.org/drawingml/2006/main" xmlns:r="http://schemas.openxmlformats.org/officeDocument/2006/relationships" xmlns:p="http://schemas.openxmlformats.org/presentationml/2006/main">
+<p:sld xmlns:a="http://schemas.openxmlformats.org/drawingml/2006/main" xmlns:p="http://schemas.openxmlformats.org/presentationml/2006/main" xmlns:r="http://schemas.openxmlformats.org/officeDocument/2006/relationships">
   <p:cSld>
     <p:bg>
       <p:bgPr>
         <a:solidFill>
-          <a:srgbClr val="0B132B"/>
+          <a:srgbClr val="0F1016"/>
         </a:solidFill>
         <a:effectLst/>
       </p:bgPr>
@@ -10595,14 +10592,7 @@
         <p:cNvGrpSpPr/>
         <p:nvPr/>
       </p:nvGrpSpPr>
-      <p:grpSpPr>
-        <a:xfrm>
-          <a:off x="0" y="0"/>
-          <a:ext cx="0" cy="0"/>
-          <a:chOff x="0" y="0"/>
-          <a:chExt cx="0" cy="0"/>
-        </a:xfrm>
-      </p:grpSpPr>
+      <p:grpSpPr/>
       <p:sp>
         <p:nvSpPr>
           <p:cNvPr id="2" name="Rectangle 1"/>
@@ -10618,7 +10608,7 @@
             <a:avLst/>
           </a:prstGeom>
           <a:solidFill>
-            <a:srgbClr val="2DD4BF"/>
+            <a:srgbClr val="E024A5"/>
           </a:solidFill>
           <a:ln>
             <a:noFill/>
@@ -10644,7 +10634,6 @@
           <a:lstStyle/>
           <a:p>
             <a:pPr algn="ctr"/>
-            <a:endParaRPr/>
           </a:p>
         </p:txBody>
       </p:sp>
@@ -10665,7 +10654,7 @@
           <a:noFill/>
         </p:spPr>
         <p:txBody>
-          <a:bodyPr wrap="square" lIns="36576" tIns="18288" rIns="36576" bIns="18288" anchor="t">
+          <a:bodyPr wrap="square" anchor="t" lIns="36576" rIns="36576" tIns="18288" bIns="18288">
             <a:spAutoFit/>
           </a:bodyPr>
           <a:lstStyle/>
@@ -10674,7 +10663,7 @@
             <a:r>
               <a:rPr sz="1200" b="1" i="0">
                 <a:solidFill>
-                  <a:srgbClr val="2DD4BF"/>
+                  <a:srgbClr val="E024A5"/>
                 </a:solidFill>
                 <a:latin typeface="Calibri"/>
               </a:rPr>
@@ -10700,7 +10689,7 @@
           <a:noFill/>
         </p:spPr>
         <p:txBody>
-          <a:bodyPr wrap="square" lIns="36576" tIns="18288" rIns="36576" bIns="18288" anchor="t">
+          <a:bodyPr wrap="square" anchor="t" lIns="36576" rIns="36576" tIns="18288" bIns="18288">
             <a:spAutoFit/>
           </a:bodyPr>
           <a:lstStyle/>
@@ -10709,7 +10698,7 @@
             <a:r>
               <a:rPr sz="4000" b="1" i="0">
                 <a:solidFill>
-                  <a:srgbClr val="F8FAFC"/>
+                  <a:srgbClr val="FAF5FF"/>
                 </a:solidFill>
                 <a:latin typeface="Calibri"/>
               </a:rPr>
@@ -10735,7 +10724,7 @@
           <a:noFill/>
         </p:spPr>
         <p:txBody>
-          <a:bodyPr wrap="square" lIns="36576" tIns="18288" rIns="36576" bIns="18288" anchor="t">
+          <a:bodyPr wrap="square" anchor="t" lIns="36576" rIns="36576" tIns="18288" bIns="18288">
             <a:spAutoFit/>
           </a:bodyPr>
           <a:lstStyle/>
@@ -10744,7 +10733,7 @@
             <a:r>
               <a:rPr sz="1300" b="0" i="0">
                 <a:solidFill>
-                  <a:srgbClr val="94A3B8"/>
+                  <a:srgbClr val="C4B5FD"/>
                 </a:solidFill>
                 <a:latin typeface="Calibri"/>
               </a:rPr>
@@ -10770,7 +10759,7 @@
             </a:avLst>
           </a:prstGeom>
           <a:solidFill>
-            <a:srgbClr val="1C2541"/>
+            <a:srgbClr val="181926"/>
           </a:solidFill>
           <a:ln>
             <a:noFill/>
@@ -10796,7 +10785,6 @@
           <a:lstStyle/>
           <a:p>
             <a:pPr algn="ctr"/>
-            <a:endParaRPr/>
           </a:p>
         </p:txBody>
       </p:sp>
@@ -10817,7 +10805,7 @@
           <a:noFill/>
         </p:spPr>
         <p:txBody>
-          <a:bodyPr wrap="square" lIns="36576" tIns="18288" rIns="36576" bIns="18288" anchor="t">
+          <a:bodyPr wrap="square" anchor="t" lIns="36576" rIns="36576" tIns="18288" bIns="18288">
             <a:spAutoFit/>
           </a:bodyPr>
           <a:lstStyle/>
@@ -10826,7 +10814,7 @@
             <a:r>
               <a:rPr sz="2200" b="1" i="0">
                 <a:solidFill>
-                  <a:srgbClr val="2DD4BF"/>
+                  <a:srgbClr val="E024A5"/>
                 </a:solidFill>
                 <a:latin typeface="Calibri"/>
               </a:rPr>
@@ -10852,7 +10840,7 @@
             </a:avLst>
           </a:prstGeom>
           <a:solidFill>
-            <a:srgbClr val="1C2541"/>
+            <a:srgbClr val="181926"/>
           </a:solidFill>
           <a:ln>
             <a:noFill/>
@@ -10878,7 +10866,6 @@
           <a:lstStyle/>
           <a:p>
             <a:pPr algn="ctr"/>
-            <a:endParaRPr/>
           </a:p>
         </p:txBody>
       </p:sp>
@@ -10899,7 +10886,7 @@
           <a:noFill/>
         </p:spPr>
         <p:txBody>
-          <a:bodyPr wrap="square" lIns="36576" tIns="18288" rIns="36576" bIns="18288" anchor="t">
+          <a:bodyPr wrap="square" anchor="t" lIns="36576" rIns="36576" tIns="18288" bIns="18288">
             <a:spAutoFit/>
           </a:bodyPr>
           <a:lstStyle/>
@@ -10934,7 +10921,7 @@
             </a:avLst>
           </a:prstGeom>
           <a:solidFill>
-            <a:srgbClr val="1C2541"/>
+            <a:srgbClr val="181926"/>
           </a:solidFill>
           <a:ln>
             <a:noFill/>
@@ -10960,7 +10947,6 @@
           <a:lstStyle/>
           <a:p>
             <a:pPr algn="ctr"/>
-            <a:endParaRPr/>
           </a:p>
         </p:txBody>
       </p:sp>
@@ -10981,7 +10967,7 @@
           <a:noFill/>
         </p:spPr>
         <p:txBody>
-          <a:bodyPr wrap="square" lIns="36576" tIns="18288" rIns="36576" bIns="18288" anchor="t">
+          <a:bodyPr wrap="square" anchor="t" lIns="36576" rIns="36576" tIns="18288" bIns="18288">
             <a:spAutoFit/>
           </a:bodyPr>
           <a:lstStyle/>
@@ -10990,7 +10976,7 @@
             <a:r>
               <a:rPr sz="2200" b="0" i="0">
                 <a:solidFill>
-                  <a:srgbClr val="F8FAFC"/>
+                  <a:srgbClr val="FAF5FF"/>
                 </a:solidFill>
                 <a:latin typeface="Calibri"/>
               </a:rPr>
@@ -11016,7 +11002,7 @@
             </a:avLst>
           </a:prstGeom>
           <a:solidFill>
-            <a:srgbClr val="243356"/>
+            <a:srgbClr val="2A1B38"/>
           </a:solidFill>
           <a:ln w="19050">
             <a:solidFill>
@@ -11044,7 +11030,6 @@
           <a:lstStyle/>
           <a:p>
             <a:pPr algn="ctr"/>
-            <a:endParaRPr/>
           </a:p>
         </p:txBody>
       </p:sp>
@@ -11057,7 +11042,7 @@
         <p:spPr>
           <a:xfrm>
             <a:off x="6492240" y="2606040"/>
-            <a:ext cx="4754880" cy="344710"/>
+            <a:ext cx="4754880" cy="457200"/>
           </a:xfrm>
           <a:prstGeom prst="rect">
             <a:avLst/>
@@ -11065,74 +11050,20 @@
           <a:noFill/>
         </p:spPr>
         <p:txBody>
-          <a:bodyPr wrap="square" lIns="36576" tIns="18288" rIns="36576" bIns="18288" anchor="t">
+          <a:bodyPr wrap="square" anchor="t" lIns="36576" rIns="36576" tIns="18288" bIns="18288">
             <a:spAutoFit/>
           </a:bodyPr>
           <a:lstStyle/>
           <a:p>
             <a:pPr algn="l"/>
             <a:r>
-              <a:rPr sz="2000" b="1" i="0" dirty="0">
-                <a:solidFill>
-                  <a:srgbClr val="F8FAFC"/>
-                </a:solidFill>
-                <a:latin typeface="Calibri"/>
-              </a:rPr>
-              <a:t>👥 </a:t>
-            </a:r>
-            <a:r>
-              <a:rPr sz="2000" b="1" i="0" dirty="0" err="1">
-                <a:solidFill>
-                  <a:srgbClr val="F8FAFC"/>
-                </a:solidFill>
-                <a:latin typeface="Calibri"/>
-              </a:rPr>
-              <a:t>Multitud</a:t>
-            </a:r>
-            <a:r>
-              <a:rPr sz="2000" b="1" i="0" dirty="0">
-                <a:solidFill>
-                  <a:srgbClr val="F8FAFC"/>
-                </a:solidFill>
-                <a:latin typeface="Calibri"/>
-              </a:rPr>
-              <a:t> de </a:t>
-            </a:r>
-            <a:r>
-              <a:rPr sz="2000" b="1" i="0" dirty="0" err="1">
-                <a:solidFill>
-                  <a:srgbClr val="F8FAFC"/>
-                </a:solidFill>
-                <a:latin typeface="Calibri"/>
-              </a:rPr>
-              <a:t>visitantes</a:t>
-            </a:r>
-            <a:r>
-              <a:rPr sz="2000" b="1" i="0" dirty="0">
-                <a:solidFill>
-                  <a:srgbClr val="F8FAFC"/>
-                </a:solidFill>
-                <a:latin typeface="Calibri"/>
-              </a:rPr>
-              <a:t> </a:t>
-            </a:r>
-            <a:r>
-              <a:rPr sz="2000" b="1" i="0" dirty="0" err="1">
-                <a:solidFill>
-                  <a:srgbClr val="F8FAFC"/>
-                </a:solidFill>
-                <a:latin typeface="Calibri"/>
-              </a:rPr>
-              <a:t>cruzando</a:t>
-            </a:r>
-            <a:r>
-              <a:rPr sz="2000" b="1" i="0" dirty="0">
-                <a:solidFill>
-                  <a:srgbClr val="F8FAFC"/>
-                </a:solidFill>
-                <a:latin typeface="Calibri"/>
-              </a:rPr>
-              <a:t> manos</a:t>
+              <a:rPr sz="2200" b="1" i="0">
+                <a:solidFill>
+                  <a:srgbClr val="FAF5FF"/>
+                </a:solidFill>
+                <a:latin typeface="Calibri"/>
+              </a:rPr>
+              <a:t>👥 Multitud de visitantes cruzando manos</a:t>
             </a:r>
           </a:p>
         </p:txBody>
@@ -11154,7 +11085,7 @@
             </a:avLst>
           </a:prstGeom>
           <a:solidFill>
-            <a:srgbClr val="1C2541"/>
+            <a:srgbClr val="181926"/>
           </a:solidFill>
           <a:ln>
             <a:noFill/>
@@ -11180,7 +11111,6 @@
           <a:lstStyle/>
           <a:p>
             <a:pPr algn="ctr"/>
-            <a:endParaRPr/>
           </a:p>
         </p:txBody>
       </p:sp>
@@ -11201,7 +11131,7 @@
           <a:noFill/>
         </p:spPr>
         <p:txBody>
-          <a:bodyPr wrap="square" lIns="36576" tIns="18288" rIns="36576" bIns="18288" anchor="t">
+          <a:bodyPr wrap="square" anchor="t" lIns="36576" rIns="36576" tIns="18288" bIns="18288">
             <a:spAutoFit/>
           </a:bodyPr>
           <a:lstStyle/>
@@ -11210,7 +11140,7 @@
             <a:r>
               <a:rPr sz="2200" b="0" i="0">
                 <a:solidFill>
-                  <a:srgbClr val="F8FAFC"/>
+                  <a:srgbClr val="FAF5FF"/>
                 </a:solidFill>
                 <a:latin typeface="Calibri"/>
               </a:rPr>
@@ -11236,7 +11166,7 @@
             </a:avLst>
           </a:prstGeom>
           <a:solidFill>
-            <a:srgbClr val="243356"/>
+            <a:srgbClr val="2A1B38"/>
           </a:solidFill>
           <a:ln w="19050">
             <a:solidFill>
@@ -11264,7 +11194,6 @@
           <a:lstStyle/>
           <a:p>
             <a:pPr algn="ctr"/>
-            <a:endParaRPr/>
           </a:p>
         </p:txBody>
       </p:sp>
@@ -11277,7 +11206,7 @@
         <p:spPr>
           <a:xfrm>
             <a:off x="6492240" y="3566160"/>
-            <a:ext cx="4754880" cy="344710"/>
+            <a:ext cx="4754880" cy="457200"/>
           </a:xfrm>
           <a:prstGeom prst="rect">
             <a:avLst/>
@@ -11285,16 +11214,16 @@
           <a:noFill/>
         </p:spPr>
         <p:txBody>
-          <a:bodyPr wrap="square" lIns="36576" tIns="18288" rIns="36576" bIns="18288" anchor="t">
+          <a:bodyPr wrap="square" anchor="t" lIns="36576" rIns="36576" tIns="18288" bIns="18288">
             <a:spAutoFit/>
           </a:bodyPr>
           <a:lstStyle/>
           <a:p>
             <a:pPr algn="l"/>
             <a:r>
-              <a:rPr sz="2000" b="1" i="0">
-                <a:solidFill>
-                  <a:srgbClr val="F8FAFC"/>
+              <a:rPr sz="2200" b="1" i="0">
+                <a:solidFill>
+                  <a:srgbClr val="FAF5FF"/>
                 </a:solidFill>
                 <a:latin typeface="Calibri"/>
               </a:rPr>
@@ -11320,7 +11249,7 @@
             </a:avLst>
           </a:prstGeom>
           <a:solidFill>
-            <a:srgbClr val="1C2541"/>
+            <a:srgbClr val="181926"/>
           </a:solidFill>
           <a:ln>
             <a:noFill/>
@@ -11346,7 +11275,6 @@
           <a:lstStyle/>
           <a:p>
             <a:pPr algn="ctr"/>
-            <a:endParaRPr/>
           </a:p>
         </p:txBody>
       </p:sp>
@@ -11367,7 +11295,7 @@
           <a:noFill/>
         </p:spPr>
         <p:txBody>
-          <a:bodyPr wrap="square" lIns="36576" tIns="18288" rIns="36576" bIns="18288" anchor="t">
+          <a:bodyPr wrap="square" anchor="t" lIns="36576" rIns="36576" tIns="18288" bIns="18288">
             <a:spAutoFit/>
           </a:bodyPr>
           <a:lstStyle/>
@@ -11376,7 +11304,7 @@
             <a:r>
               <a:rPr sz="2200" b="0" i="0">
                 <a:solidFill>
-                  <a:srgbClr val="F8FAFC"/>
+                  <a:srgbClr val="FAF5FF"/>
                 </a:solidFill>
                 <a:latin typeface="Calibri"/>
               </a:rPr>
@@ -11402,7 +11330,7 @@
             </a:avLst>
           </a:prstGeom>
           <a:solidFill>
-            <a:srgbClr val="243356"/>
+            <a:srgbClr val="2A1B38"/>
           </a:solidFill>
           <a:ln w="19050">
             <a:solidFill>
@@ -11430,7 +11358,6 @@
           <a:lstStyle/>
           <a:p>
             <a:pPr algn="ctr"/>
-            <a:endParaRPr/>
           </a:p>
         </p:txBody>
       </p:sp>
@@ -11443,7 +11370,7 @@
         <p:spPr>
           <a:xfrm>
             <a:off x="6492240" y="4526280"/>
-            <a:ext cx="4754880" cy="344710"/>
+            <a:ext cx="4754880" cy="457200"/>
           </a:xfrm>
           <a:prstGeom prst="rect">
             <a:avLst/>
@@ -11451,16 +11378,16 @@
           <a:noFill/>
         </p:spPr>
         <p:txBody>
-          <a:bodyPr wrap="square" lIns="36576" tIns="18288" rIns="36576" bIns="18288" anchor="t">
+          <a:bodyPr wrap="square" anchor="t" lIns="36576" rIns="36576" tIns="18288" bIns="18288">
             <a:spAutoFit/>
           </a:bodyPr>
           <a:lstStyle/>
           <a:p>
             <a:pPr algn="l"/>
             <a:r>
-              <a:rPr sz="2000" b="1" i="0">
-                <a:solidFill>
-                  <a:srgbClr val="F8FAFC"/>
+              <a:rPr sz="2200" b="1" i="0">
+                <a:solidFill>
+                  <a:srgbClr val="FAF5FF"/>
                 </a:solidFill>
                 <a:latin typeface="Calibri"/>
               </a:rPr>
@@ -11486,7 +11413,7 @@
             </a:avLst>
           </a:prstGeom>
           <a:solidFill>
-            <a:srgbClr val="1C2541"/>
+            <a:srgbClr val="181926"/>
           </a:solidFill>
           <a:ln>
             <a:noFill/>
@@ -11512,7 +11439,6 @@
           <a:lstStyle/>
           <a:p>
             <a:pPr algn="ctr"/>
-            <a:endParaRPr/>
           </a:p>
         </p:txBody>
       </p:sp>
@@ -11533,7 +11459,7 @@
           <a:noFill/>
         </p:spPr>
         <p:txBody>
-          <a:bodyPr wrap="square" lIns="36576" tIns="18288" rIns="36576" bIns="18288" anchor="t">
+          <a:bodyPr wrap="square" anchor="t" lIns="36576" rIns="36576" tIns="18288" bIns="18288">
             <a:spAutoFit/>
           </a:bodyPr>
           <a:lstStyle/>
@@ -11542,7 +11468,7 @@
             <a:r>
               <a:rPr sz="2200" b="0" i="0">
                 <a:solidFill>
-                  <a:srgbClr val="F8FAFC"/>
+                  <a:srgbClr val="FAF5FF"/>
                 </a:solidFill>
                 <a:latin typeface="Calibri"/>
               </a:rPr>
@@ -11568,7 +11494,7 @@
             </a:avLst>
           </a:prstGeom>
           <a:solidFill>
-            <a:srgbClr val="243356"/>
+            <a:srgbClr val="2A1B38"/>
           </a:solidFill>
           <a:ln w="19050">
             <a:solidFill>
@@ -11596,7 +11522,6 @@
           <a:lstStyle/>
           <a:p>
             <a:pPr algn="ctr"/>
-            <a:endParaRPr/>
           </a:p>
         </p:txBody>
       </p:sp>
@@ -11609,7 +11534,7 @@
         <p:spPr>
           <a:xfrm>
             <a:off x="6492240" y="5486400"/>
-            <a:ext cx="4754880" cy="344710"/>
+            <a:ext cx="4754880" cy="457200"/>
           </a:xfrm>
           <a:prstGeom prst="rect">
             <a:avLst/>
@@ -11617,16 +11542,16 @@
           <a:noFill/>
         </p:spPr>
         <p:txBody>
-          <a:bodyPr wrap="square" lIns="36576" tIns="18288" rIns="36576" bIns="18288" anchor="t">
+          <a:bodyPr wrap="square" anchor="t" lIns="36576" rIns="36576" tIns="18288" bIns="18288">
             <a:spAutoFit/>
           </a:bodyPr>
           <a:lstStyle/>
           <a:p>
             <a:pPr algn="l"/>
             <a:r>
-              <a:rPr sz="2000" b="1" i="0">
-                <a:solidFill>
-                  <a:srgbClr val="F8FAFC"/>
+              <a:rPr sz="2200" b="1" i="0">
+                <a:solidFill>
+                  <a:srgbClr val="FAF5FF"/>
                 </a:solidFill>
                 <a:latin typeface="Calibri"/>
               </a:rPr>
@@ -11644,12 +11569,12 @@
 </file>
 
 <file path=ppt/slides/slide9.xml><?xml version="1.0" encoding="utf-8"?>
-<p:sld xmlns:a="http://schemas.openxmlformats.org/drawingml/2006/main" xmlns:r="http://schemas.openxmlformats.org/officeDocument/2006/relationships" xmlns:p="http://schemas.openxmlformats.org/presentationml/2006/main">
+<p:sld xmlns:a="http://schemas.openxmlformats.org/drawingml/2006/main" xmlns:p="http://schemas.openxmlformats.org/presentationml/2006/main" xmlns:r="http://schemas.openxmlformats.org/officeDocument/2006/relationships">
   <p:cSld>
     <p:bg>
       <p:bgPr>
         <a:solidFill>
-          <a:srgbClr val="0B132B"/>
+          <a:srgbClr val="0F1016"/>
         </a:solidFill>
         <a:effectLst/>
       </p:bgPr>
@@ -11660,14 +11585,7 @@
         <p:cNvGrpSpPr/>
         <p:nvPr/>
       </p:nvGrpSpPr>
-      <p:grpSpPr>
-        <a:xfrm>
-          <a:off x="0" y="0"/>
-          <a:ext cx="0" cy="0"/>
-          <a:chOff x="0" y="0"/>
-          <a:chExt cx="0" cy="0"/>
-        </a:xfrm>
-      </p:grpSpPr>
+      <p:grpSpPr/>
       <p:sp>
         <p:nvSpPr>
           <p:cNvPr id="2" name="Rectangle 1"/>
@@ -11683,7 +11601,7 @@
             <a:avLst/>
           </a:prstGeom>
           <a:solidFill>
-            <a:srgbClr val="2DD4BF"/>
+            <a:srgbClr val="E024A5"/>
           </a:solidFill>
           <a:ln>
             <a:noFill/>
@@ -11709,7 +11627,6 @@
           <a:lstStyle/>
           <a:p>
             <a:pPr algn="ctr"/>
-            <a:endParaRPr/>
           </a:p>
         </p:txBody>
       </p:sp>
@@ -11730,7 +11647,7 @@
           <a:noFill/>
         </p:spPr>
         <p:txBody>
-          <a:bodyPr wrap="square" lIns="36576" tIns="18288" rIns="36576" bIns="18288" anchor="t">
+          <a:bodyPr wrap="square" anchor="t" lIns="36576" rIns="36576" tIns="18288" bIns="18288">
             <a:spAutoFit/>
           </a:bodyPr>
           <a:lstStyle/>
@@ -11739,7 +11656,7 @@
             <a:r>
               <a:rPr sz="1200" b="1" i="0">
                 <a:solidFill>
-                  <a:srgbClr val="2DD4BF"/>
+                  <a:srgbClr val="E024A5"/>
                 </a:solidFill>
                 <a:latin typeface="Calibri"/>
               </a:rPr>
@@ -11765,7 +11682,7 @@
           <a:noFill/>
         </p:spPr>
         <p:txBody>
-          <a:bodyPr wrap="square" lIns="36576" tIns="18288" rIns="36576" bIns="18288" anchor="t">
+          <a:bodyPr wrap="square" anchor="t" lIns="36576" rIns="36576" tIns="18288" bIns="18288">
             <a:spAutoFit/>
           </a:bodyPr>
           <a:lstStyle/>
@@ -11774,7 +11691,7 @@
             <a:r>
               <a:rPr sz="4000" b="1" i="0">
                 <a:solidFill>
-                  <a:srgbClr val="F8FAFC"/>
+                  <a:srgbClr val="FAF5FF"/>
                 </a:solidFill>
                 <a:latin typeface="Calibri"/>
               </a:rPr>
@@ -11800,7 +11717,7 @@
           <a:noFill/>
         </p:spPr>
         <p:txBody>
-          <a:bodyPr wrap="square" lIns="36576" tIns="18288" rIns="36576" bIns="18288" anchor="t">
+          <a:bodyPr wrap="square" anchor="t" lIns="36576" rIns="36576" tIns="18288" bIns="18288">
             <a:spAutoFit/>
           </a:bodyPr>
           <a:lstStyle/>
@@ -11809,7 +11726,7 @@
             <a:r>
               <a:rPr sz="1300" b="0" i="0">
                 <a:solidFill>
-                  <a:srgbClr val="94A3B8"/>
+                  <a:srgbClr val="C4B5FD"/>
                 </a:solidFill>
                 <a:latin typeface="Calibri"/>
               </a:rPr>
@@ -11835,7 +11752,7 @@
             </a:avLst>
           </a:prstGeom>
           <a:solidFill>
-            <a:srgbClr val="1C2541"/>
+            <a:srgbClr val="181926"/>
           </a:solidFill>
           <a:ln>
             <a:noFill/>
@@ -11861,7 +11778,6 @@
           <a:lstStyle/>
           <a:p>
             <a:pPr algn="ctr"/>
-            <a:endParaRPr/>
           </a:p>
         </p:txBody>
       </p:sp>
@@ -11882,7 +11798,7 @@
           <a:noFill/>
         </p:spPr>
         <p:txBody>
-          <a:bodyPr wrap="square" lIns="36576" tIns="18288" rIns="36576" bIns="18288" anchor="t">
+          <a:bodyPr wrap="square" anchor="t" lIns="36576" rIns="36576" tIns="18288" bIns="18288">
             <a:spAutoFit/>
           </a:bodyPr>
           <a:lstStyle/>
@@ -11891,7 +11807,7 @@
             <a:r>
               <a:rPr sz="2200" b="1" i="0">
                 <a:solidFill>
-                  <a:srgbClr val="2DD4BF"/>
+                  <a:srgbClr val="E024A5"/>
                 </a:solidFill>
                 <a:latin typeface="Calibri"/>
               </a:rPr>
@@ -11917,7 +11833,7 @@
             </a:avLst>
           </a:prstGeom>
           <a:solidFill>
-            <a:srgbClr val="1C2541"/>
+            <a:srgbClr val="181926"/>
           </a:solidFill>
           <a:ln>
             <a:noFill/>
@@ -11943,7 +11859,6 @@
           <a:lstStyle/>
           <a:p>
             <a:pPr algn="ctr"/>
-            <a:endParaRPr/>
           </a:p>
         </p:txBody>
       </p:sp>
@@ -11964,7 +11879,7 @@
           <a:noFill/>
         </p:spPr>
         <p:txBody>
-          <a:bodyPr wrap="square" lIns="36576" tIns="18288" rIns="36576" bIns="18288" anchor="t">
+          <a:bodyPr wrap="square" anchor="t" lIns="36576" rIns="36576" tIns="18288" bIns="18288">
             <a:spAutoFit/>
           </a:bodyPr>
           <a:lstStyle/>
@@ -11973,7 +11888,7 @@
             <a:r>
               <a:rPr sz="2200" b="1" i="0">
                 <a:solidFill>
-                  <a:srgbClr val="F87171"/>
+                  <a:srgbClr val="FB7185"/>
                 </a:solidFill>
                 <a:latin typeface="Calibri"/>
               </a:rPr>
@@ -11999,7 +11914,7 @@
             </a:avLst>
           </a:prstGeom>
           <a:solidFill>
-            <a:srgbClr val="1C2541"/>
+            <a:srgbClr val="181926"/>
           </a:solidFill>
           <a:ln>
             <a:noFill/>
@@ -12025,7 +11940,6 @@
           <a:lstStyle/>
           <a:p>
             <a:pPr algn="ctr"/>
-            <a:endParaRPr/>
           </a:p>
         </p:txBody>
       </p:sp>
@@ -12046,7 +11960,7 @@
           <a:noFill/>
         </p:spPr>
         <p:txBody>
-          <a:bodyPr wrap="square" lIns="36576" tIns="18288" rIns="36576" bIns="18288" anchor="t">
+          <a:bodyPr wrap="square" anchor="t" lIns="36576" rIns="36576" tIns="18288" bIns="18288">
             <a:spAutoFit/>
           </a:bodyPr>
           <a:lstStyle/>
@@ -12055,7 +11969,7 @@
             <a:r>
               <a:rPr sz="2200" b="0" i="0">
                 <a:solidFill>
-                  <a:srgbClr val="F8FAFC"/>
+                  <a:srgbClr val="FAF5FF"/>
                 </a:solidFill>
                 <a:latin typeface="Calibri"/>
               </a:rPr>
@@ -12081,11 +11995,11 @@
             </a:avLst>
           </a:prstGeom>
           <a:solidFill>
-            <a:srgbClr val="243356"/>
+            <a:srgbClr val="2A1B38"/>
           </a:solidFill>
           <a:ln w="19050">
             <a:solidFill>
-              <a:srgbClr val="F87171"/>
+              <a:srgbClr val="FB7185"/>
             </a:solidFill>
           </a:ln>
           <a:effectLst/>
@@ -12109,7 +12023,6 @@
           <a:lstStyle/>
           <a:p>
             <a:pPr algn="ctr"/>
-            <a:endParaRPr/>
           </a:p>
         </p:txBody>
       </p:sp>
@@ -12122,7 +12035,7 @@
         <p:spPr>
           <a:xfrm>
             <a:off x="6492240" y="2606040"/>
-            <a:ext cx="4754880" cy="344710"/>
+            <a:ext cx="4754880" cy="457200"/>
           </a:xfrm>
           <a:prstGeom prst="rect">
             <a:avLst/>
@@ -12130,54 +12043,21 @@
           <a:noFill/>
         </p:spPr>
         <p:txBody>
-          <a:bodyPr wrap="square" lIns="36576" tIns="18288" rIns="36576" bIns="18288" anchor="t">
+          <a:bodyPr wrap="square" anchor="t" lIns="36576" rIns="36576" tIns="18288" bIns="18288">
             <a:spAutoFit/>
           </a:bodyPr>
           <a:lstStyle/>
           <a:p>
             <a:pPr algn="l"/>
             <a:r>
-              <a:rPr sz="2000" b="1" i="0" dirty="0">
-                <a:solidFill>
-                  <a:srgbClr val="F8FAFC"/>
-                </a:solidFill>
-                <a:latin typeface="Calibri"/>
-              </a:rPr>
-              <a:t>⏳ 8 a 12 horas </a:t>
-            </a:r>
-            <a:r>
-              <a:rPr sz="2000" b="1" i="0" dirty="0" err="1">
-                <a:solidFill>
-                  <a:srgbClr val="F8FAFC"/>
-                </a:solidFill>
-                <a:latin typeface="Calibri"/>
-              </a:rPr>
-              <a:t>diarias</a:t>
-            </a:r>
-            <a:r>
-              <a:rPr sz="2000" b="1" i="0" dirty="0">
-                <a:solidFill>
-                  <a:srgbClr val="F8FAFC"/>
-                </a:solidFill>
-                <a:latin typeface="Calibri"/>
-              </a:rPr>
-              <a:t> </a:t>
-            </a:r>
-            <a:r>
-              <a:rPr sz="2000" b="1" i="0" dirty="0" err="1">
-                <a:solidFill>
-                  <a:srgbClr val="F8FAFC"/>
-                </a:solidFill>
-                <a:latin typeface="Calibri"/>
-              </a:rPr>
-              <a:t>ininterrumpidas</a:t>
-            </a:r>
-            <a:endParaRPr sz="2000" b="1" i="0" dirty="0">
-              <a:solidFill>
-                <a:srgbClr val="F8FAFC"/>
-              </a:solidFill>
-              <a:latin typeface="Calibri"/>
-            </a:endParaRPr>
+              <a:rPr sz="2200" b="1" i="0">
+                <a:solidFill>
+                  <a:srgbClr val="FAF5FF"/>
+                </a:solidFill>
+                <a:latin typeface="Calibri"/>
+              </a:rPr>
+              <a:t>⏳ 8 a 12 horas diarias ininterrumpidas</a:t>
+            </a:r>
           </a:p>
         </p:txBody>
       </p:sp>
@@ -12198,7 +12078,7 @@
             </a:avLst>
           </a:prstGeom>
           <a:solidFill>
-            <a:srgbClr val="1C2541"/>
+            <a:srgbClr val="181926"/>
           </a:solidFill>
           <a:ln>
             <a:noFill/>
@@ -12224,7 +12104,6 @@
           <a:lstStyle/>
           <a:p>
             <a:pPr algn="ctr"/>
-            <a:endParaRPr/>
           </a:p>
         </p:txBody>
       </p:sp>
@@ -12245,7 +12124,7 @@
           <a:noFill/>
         </p:spPr>
         <p:txBody>
-          <a:bodyPr wrap="square" lIns="36576" tIns="18288" rIns="36576" bIns="18288" anchor="t">
+          <a:bodyPr wrap="square" anchor="t" lIns="36576" rIns="36576" tIns="18288" bIns="18288">
             <a:spAutoFit/>
           </a:bodyPr>
           <a:lstStyle/>
@@ -12254,7 +12133,7 @@
             <a:r>
               <a:rPr sz="2200" b="0" i="0">
                 <a:solidFill>
-                  <a:srgbClr val="F8FAFC"/>
+                  <a:srgbClr val="FAF5FF"/>
                 </a:solidFill>
                 <a:latin typeface="Calibri"/>
               </a:rPr>
@@ -12280,11 +12159,11 @@
             </a:avLst>
           </a:prstGeom>
           <a:solidFill>
-            <a:srgbClr val="243356"/>
+            <a:srgbClr val="2A1B38"/>
           </a:solidFill>
           <a:ln w="19050">
             <a:solidFill>
-              <a:srgbClr val="F87171"/>
+              <a:srgbClr val="FB7185"/>
             </a:solidFill>
           </a:ln>
           <a:effectLst/>
@@ -12308,7 +12187,6 @@
           <a:lstStyle/>
           <a:p>
             <a:pPr algn="ctr"/>
-            <a:endParaRPr/>
           </a:p>
         </p:txBody>
       </p:sp>
@@ -12321,7 +12199,7 @@
         <p:spPr>
           <a:xfrm>
             <a:off x="6492240" y="3566160"/>
-            <a:ext cx="4754880" cy="652486"/>
+            <a:ext cx="4754880" cy="457200"/>
           </a:xfrm>
           <a:prstGeom prst="rect">
             <a:avLst/>
@@ -12329,128 +12207,20 @@
           <a:noFill/>
         </p:spPr>
         <p:txBody>
-          <a:bodyPr wrap="square" lIns="36576" tIns="18288" rIns="36576" bIns="18288" anchor="t">
+          <a:bodyPr wrap="square" anchor="t" lIns="36576" rIns="36576" tIns="18288" bIns="18288">
             <a:spAutoFit/>
           </a:bodyPr>
           <a:lstStyle/>
           <a:p>
             <a:pPr algn="l"/>
             <a:r>
-              <a:rPr sz="2000" b="1" i="0" dirty="0">
-                <a:solidFill>
-                  <a:srgbClr val="F8FAFC"/>
-                </a:solidFill>
-                <a:latin typeface="Calibri"/>
-              </a:rPr>
-              <a:t>👶 </a:t>
-            </a:r>
-            <a:r>
-              <a:rPr sz="2000" b="1" i="0" dirty="0" err="1">
-                <a:solidFill>
-                  <a:srgbClr val="F8FAFC"/>
-                </a:solidFill>
-                <a:latin typeface="Calibri"/>
-              </a:rPr>
-              <a:t>Niños</a:t>
-            </a:r>
-            <a:r>
-              <a:rPr sz="2000" b="1" i="0" dirty="0">
-                <a:solidFill>
-                  <a:srgbClr val="F8FAFC"/>
-                </a:solidFill>
-                <a:latin typeface="Calibri"/>
-              </a:rPr>
-              <a:t> </a:t>
-            </a:r>
-            <a:r>
-              <a:rPr sz="2000" b="1" i="0" dirty="0" err="1">
-                <a:solidFill>
-                  <a:srgbClr val="F8FAFC"/>
-                </a:solidFill>
-                <a:latin typeface="Calibri"/>
-              </a:rPr>
-              <a:t>jalando</a:t>
-            </a:r>
-            <a:r>
-              <a:rPr sz="2000" b="1" i="0" dirty="0">
-                <a:solidFill>
-                  <a:srgbClr val="F8FAFC"/>
-                </a:solidFill>
-                <a:latin typeface="Calibri"/>
-              </a:rPr>
-              <a:t> </a:t>
-            </a:r>
-            <a:r>
-              <a:rPr sz="2000" b="1" i="0" dirty="0" err="1">
-                <a:solidFill>
-                  <a:srgbClr val="F8FAFC"/>
-                </a:solidFill>
-                <a:latin typeface="Calibri"/>
-              </a:rPr>
-              <a:t>pétalos</a:t>
-            </a:r>
-            <a:r>
-              <a:rPr sz="2000" b="1" i="0" dirty="0">
-                <a:solidFill>
-                  <a:srgbClr val="F8FAFC"/>
-                </a:solidFill>
-                <a:latin typeface="Calibri"/>
-              </a:rPr>
-              <a:t> (</a:t>
-            </a:r>
-            <a:r>
-              <a:rPr sz="2000" b="1" i="0" dirty="0" err="1">
-                <a:solidFill>
-                  <a:srgbClr val="F8FAFC"/>
-                </a:solidFill>
-                <a:latin typeface="Calibri"/>
-              </a:rPr>
-              <a:t>acople</a:t>
-            </a:r>
-            <a:r>
-              <a:rPr sz="2000" b="1" i="0" dirty="0">
-                <a:solidFill>
-                  <a:srgbClr val="F8FAFC"/>
-                </a:solidFill>
-                <a:latin typeface="Calibri"/>
-              </a:rPr>
-              <a:t> </a:t>
-            </a:r>
-            <a:r>
-              <a:rPr sz="2000" b="1" i="0" dirty="0" err="1">
-                <a:solidFill>
-                  <a:srgbClr val="F8FAFC"/>
-                </a:solidFill>
-                <a:latin typeface="Calibri"/>
-              </a:rPr>
-              <a:t>que</a:t>
-            </a:r>
-            <a:r>
-              <a:rPr sz="2000" b="1" i="0" dirty="0">
-                <a:solidFill>
-                  <a:srgbClr val="F8FAFC"/>
-                </a:solidFill>
-                <a:latin typeface="Calibri"/>
-              </a:rPr>
-              <a:t> se </a:t>
-            </a:r>
-            <a:r>
-              <a:rPr sz="2000" b="1" i="0" dirty="0" err="1">
-                <a:solidFill>
-                  <a:srgbClr val="F8FAFC"/>
-                </a:solidFill>
-                <a:latin typeface="Calibri"/>
-              </a:rPr>
-              <a:t>zafe</a:t>
-            </a:r>
-            <a:r>
-              <a:rPr sz="2000" b="1" i="0" dirty="0">
-                <a:solidFill>
-                  <a:srgbClr val="F8FAFC"/>
-                </a:solidFill>
-                <a:latin typeface="Calibri"/>
-              </a:rPr>
-              <a:t>)</a:t>
+              <a:rPr sz="2200" b="1" i="0">
+                <a:solidFill>
+                  <a:srgbClr val="FAF5FF"/>
+                </a:solidFill>
+                <a:latin typeface="Calibri"/>
+              </a:rPr>
+              <a:t>👶 Niños jalando pétalos (atasco: 0.9 A y 4.6 W)</a:t>
             </a:r>
           </a:p>
         </p:txBody>
@@ -12472,7 +12242,7 @@
             </a:avLst>
           </a:prstGeom>
           <a:solidFill>
-            <a:srgbClr val="1C2541"/>
+            <a:srgbClr val="181926"/>
           </a:solidFill>
           <a:ln>
             <a:noFill/>
@@ -12498,7 +12268,6 @@
           <a:lstStyle/>
           <a:p>
             <a:pPr algn="ctr"/>
-            <a:endParaRPr/>
           </a:p>
         </p:txBody>
       </p:sp>
@@ -12519,7 +12288,7 @@
           <a:noFill/>
         </p:spPr>
         <p:txBody>
-          <a:bodyPr wrap="square" lIns="36576" tIns="18288" rIns="36576" bIns="18288" anchor="t">
+          <a:bodyPr wrap="square" anchor="t" lIns="36576" rIns="36576" tIns="18288" bIns="18288">
             <a:spAutoFit/>
           </a:bodyPr>
           <a:lstStyle/>
@@ -12528,7 +12297,7 @@
             <a:r>
               <a:rPr sz="2200" b="0" i="0">
                 <a:solidFill>
-                  <a:srgbClr val="F8FAFC"/>
+                  <a:srgbClr val="FAF5FF"/>
                 </a:solidFill>
                 <a:latin typeface="Calibri"/>
               </a:rPr>
@@ -12554,11 +12323,11 @@
             </a:avLst>
           </a:prstGeom>
           <a:solidFill>
-            <a:srgbClr val="243356"/>
+            <a:srgbClr val="2A1B38"/>
           </a:solidFill>
           <a:ln w="19050">
             <a:solidFill>
-              <a:srgbClr val="F87171"/>
+              <a:srgbClr val="FB7185"/>
             </a:solidFill>
           </a:ln>
           <a:effectLst/>
@@ -12582,7 +12351,6 @@
           <a:lstStyle/>
           <a:p>
             <a:pPr algn="ctr"/>
-            <a:endParaRPr/>
           </a:p>
         </p:txBody>
       </p:sp>
@@ -12595,7 +12363,7 @@
         <p:spPr>
           <a:xfrm>
             <a:off x="6492240" y="4526280"/>
-            <a:ext cx="4754880" cy="652486"/>
+            <a:ext cx="4754880" cy="457200"/>
           </a:xfrm>
           <a:prstGeom prst="rect">
             <a:avLst/>
@@ -12603,56 +12371,20 @@
           <a:noFill/>
         </p:spPr>
         <p:txBody>
-          <a:bodyPr wrap="square" lIns="36576" tIns="18288" rIns="36576" bIns="18288" anchor="t">
+          <a:bodyPr wrap="square" anchor="t" lIns="36576" rIns="36576" tIns="18288" bIns="18288">
             <a:spAutoFit/>
           </a:bodyPr>
           <a:lstStyle/>
           <a:p>
             <a:pPr algn="l"/>
             <a:r>
-              <a:rPr sz="2000" b="1" i="0" dirty="0">
-                <a:solidFill>
-                  <a:srgbClr val="F8FAFC"/>
-                </a:solidFill>
-                <a:latin typeface="Calibri"/>
-              </a:rPr>
-              <a:t>⚡ 32 </a:t>
-            </a:r>
-            <a:r>
-              <a:rPr sz="2000" b="1" i="0" dirty="0" err="1">
-                <a:solidFill>
-                  <a:srgbClr val="F8FAFC"/>
-                </a:solidFill>
-                <a:latin typeface="Calibri"/>
-              </a:rPr>
-              <a:t>motores</a:t>
-            </a:r>
-            <a:r>
-              <a:rPr sz="2000" b="1" i="0" dirty="0">
-                <a:solidFill>
-                  <a:srgbClr val="F8FAFC"/>
-                </a:solidFill>
-                <a:latin typeface="Calibri"/>
-              </a:rPr>
-              <a:t> hasta 25-30 A (</a:t>
-            </a:r>
-            <a:r>
-              <a:rPr sz="2000" b="1" i="0" dirty="0" err="1">
-                <a:solidFill>
-                  <a:srgbClr val="F8FAFC"/>
-                </a:solidFill>
-                <a:latin typeface="Calibri"/>
-              </a:rPr>
-              <a:t>fuente</a:t>
-            </a:r>
-            <a:r>
-              <a:rPr sz="2000" b="1" i="0" dirty="0">
-                <a:solidFill>
-                  <a:srgbClr val="F8FAFC"/>
-                </a:solidFill>
-                <a:latin typeface="Calibri"/>
-              </a:rPr>
-              <a:t> industrial)</a:t>
+              <a:rPr sz="2200" b="1" i="0">
+                <a:solidFill>
+                  <a:srgbClr val="FAF5FF"/>
+                </a:solidFill>
+                <a:latin typeface="Calibri"/>
+              </a:rPr>
+              <a:t>⚡ 32 motores: ~23 A al arrancar (fuente 25 A)</a:t>
             </a:r>
           </a:p>
         </p:txBody>
@@ -12674,7 +12406,7 @@
             </a:avLst>
           </a:prstGeom>
           <a:solidFill>
-            <a:srgbClr val="1C2541"/>
+            <a:srgbClr val="181926"/>
           </a:solidFill>
           <a:ln>
             <a:noFill/>
@@ -12700,7 +12432,6 @@
           <a:lstStyle/>
           <a:p>
             <a:pPr algn="ctr"/>
-            <a:endParaRPr/>
           </a:p>
         </p:txBody>
       </p:sp>
@@ -12721,7 +12452,7 @@
           <a:noFill/>
         </p:spPr>
         <p:txBody>
-          <a:bodyPr wrap="square" lIns="36576" tIns="18288" rIns="36576" bIns="18288" anchor="t">
+          <a:bodyPr wrap="square" anchor="t" lIns="36576" rIns="36576" tIns="18288" bIns="18288">
             <a:spAutoFit/>
           </a:bodyPr>
           <a:lstStyle/>
@@ -12730,7 +12461,7 @@
             <a:r>
               <a:rPr sz="2200" b="0" i="0">
                 <a:solidFill>
-                  <a:srgbClr val="F8FAFC"/>
+                  <a:srgbClr val="FAF5FF"/>
                 </a:solidFill>
                 <a:latin typeface="Calibri"/>
               </a:rPr>
@@ -12756,11 +12487,11 @@
             </a:avLst>
           </a:prstGeom>
           <a:solidFill>
-            <a:srgbClr val="243356"/>
+            <a:srgbClr val="2A1B38"/>
           </a:solidFill>
           <a:ln w="19050">
             <a:solidFill>
-              <a:srgbClr val="F87171"/>
+              <a:srgbClr val="FB7185"/>
             </a:solidFill>
           </a:ln>
           <a:effectLst/>
@@ -12784,7 +12515,6 @@
           <a:lstStyle/>
           <a:p>
             <a:pPr algn="ctr"/>
-            <a:endParaRPr sz="1600"/>
           </a:p>
         </p:txBody>
       </p:sp>
@@ -12797,7 +12527,7 @@
         <p:spPr>
           <a:xfrm>
             <a:off x="6492240" y="5486400"/>
-            <a:ext cx="4754880" cy="344710"/>
+            <a:ext cx="4754880" cy="457200"/>
           </a:xfrm>
           <a:prstGeom prst="rect">
             <a:avLst/>
@@ -12805,54 +12535,21 @@
           <a:noFill/>
         </p:spPr>
         <p:txBody>
-          <a:bodyPr wrap="square" lIns="36576" tIns="18288" rIns="36576" bIns="18288" anchor="t">
+          <a:bodyPr wrap="square" anchor="t" lIns="36576" rIns="36576" tIns="18288" bIns="18288">
             <a:spAutoFit/>
           </a:bodyPr>
           <a:lstStyle/>
           <a:p>
             <a:pPr algn="l"/>
             <a:r>
-              <a:rPr sz="2000" b="1" i="0" dirty="0">
-                <a:solidFill>
-                  <a:srgbClr val="F8FAFC"/>
-                </a:solidFill>
-                <a:latin typeface="Calibri"/>
-              </a:rPr>
-              <a:t>🔄 Se auto-</a:t>
-            </a:r>
-            <a:r>
-              <a:rPr sz="2000" b="1" i="0" dirty="0" err="1">
-                <a:solidFill>
-                  <a:srgbClr val="F8FAFC"/>
-                </a:solidFill>
-                <a:latin typeface="Calibri"/>
-              </a:rPr>
-              <a:t>recupera</a:t>
-            </a:r>
-            <a:r>
-              <a:rPr sz="2000" b="1" i="0" dirty="0">
-                <a:solidFill>
-                  <a:srgbClr val="F8FAFC"/>
-                </a:solidFill>
-                <a:latin typeface="Calibri"/>
-              </a:rPr>
-              <a:t> sola ante </a:t>
-            </a:r>
-            <a:r>
-              <a:rPr sz="2000" b="1" i="0" dirty="0" err="1">
-                <a:solidFill>
-                  <a:srgbClr val="F8FAFC"/>
-                </a:solidFill>
-                <a:latin typeface="Calibri"/>
-              </a:rPr>
-              <a:t>fallas</a:t>
-            </a:r>
-            <a:endParaRPr sz="2000" b="1" i="0" dirty="0">
-              <a:solidFill>
-                <a:srgbClr val="F8FAFC"/>
-              </a:solidFill>
-              <a:latin typeface="Calibri"/>
-            </a:endParaRPr>
+              <a:rPr sz="2200" b="1" i="0">
+                <a:solidFill>
+                  <a:srgbClr val="FAF5FF"/>
+                </a:solidFill>
+                <a:latin typeface="Calibri"/>
+              </a:rPr>
+              <a:t>🔄 Se auto-recupera sola ante fallas</a:t>
+            </a:r>
           </a:p>
         </p:txBody>
       </p:sp>
@@ -13185,7 +12882,7 @@
 </file>
 
 <file path=ppt/theme/theme2.xml><?xml version="1.0" encoding="utf-8"?>
-<a:theme xmlns:a="http://schemas.openxmlformats.org/drawingml/2006/main" name="Tema de Office">
+<a:theme xmlns:a="http://schemas.openxmlformats.org/drawingml/2006/main" name="Office Theme">
   <a:themeElements>
     <a:clrScheme name="Office">
       <a:dk1>
@@ -13195,44 +12892,44 @@
         <a:sysClr val="window" lastClr="FFFFFF"/>
       </a:lt1>
       <a:dk2>
-        <a:srgbClr val="0E2841"/>
+        <a:srgbClr val="1F497D"/>
       </a:dk2>
       <a:lt2>
-        <a:srgbClr val="E8E8E8"/>
+        <a:srgbClr val="EEECE1"/>
       </a:lt2>
       <a:accent1>
-        <a:srgbClr val="156082"/>
+        <a:srgbClr val="4F81BD"/>
       </a:accent1>
       <a:accent2>
-        <a:srgbClr val="E97132"/>
+        <a:srgbClr val="C0504D"/>
       </a:accent2>
       <a:accent3>
-        <a:srgbClr val="196B24"/>
+        <a:srgbClr val="9BBB59"/>
       </a:accent3>
       <a:accent4>
-        <a:srgbClr val="0F9ED5"/>
+        <a:srgbClr val="8064A2"/>
       </a:accent4>
       <a:accent5>
-        <a:srgbClr val="A02B93"/>
+        <a:srgbClr val="4BACC6"/>
       </a:accent5>
       <a:accent6>
-        <a:srgbClr val="4EA72E"/>
+        <a:srgbClr val="F79646"/>
       </a:accent6>
       <a:hlink>
-        <a:srgbClr val="467886"/>
+        <a:srgbClr val="0000FF"/>
       </a:hlink>
       <a:folHlink>
-        <a:srgbClr val="96607D"/>
+        <a:srgbClr val="800080"/>
       </a:folHlink>
     </a:clrScheme>
     <a:fontScheme name="Office">
       <a:majorFont>
-        <a:latin typeface="Aptos Display" panose="02110004020202020204"/>
+        <a:latin typeface="Calibri"/>
         <a:ea typeface=""/>
         <a:cs typeface=""/>
-        <a:font script="Jpan" typeface="游ゴシック Light"/>
+        <a:font script="Jpan" typeface="ＭＳ Ｐゴシック"/>
         <a:font script="Hang" typeface="맑은 고딕"/>
-        <a:font script="Hans" typeface="等线 Light"/>
+        <a:font script="Hans" typeface="宋体"/>
         <a:font script="Hant" typeface="新細明體"/>
         <a:font script="Arab" typeface="Times New Roman"/>
         <a:font script="Hebr" typeface="Times New Roman"/>
@@ -13260,31 +12957,14 @@
         <a:font script="Viet" typeface="Times New Roman"/>
         <a:font script="Uigh" typeface="Microsoft Uighur"/>
         <a:font script="Geor" typeface="Sylfaen"/>
-        <a:font script="Armn" typeface="Arial"/>
-        <a:font script="Bugi" typeface="Leelawadee UI"/>
-        <a:font script="Bopo" typeface="Microsoft JhengHei"/>
-        <a:font script="Java" typeface="Javanese Text"/>
-        <a:font script="Lisu" typeface="Segoe UI"/>
-        <a:font script="Mymr" typeface="Myanmar Text"/>
-        <a:font script="Nkoo" typeface="Ebrima"/>
-        <a:font script="Olck" typeface="Nirmala UI"/>
-        <a:font script="Osma" typeface="Ebrima"/>
-        <a:font script="Phag" typeface="Phagspa"/>
-        <a:font script="Syrn" typeface="Estrangelo Edessa"/>
-        <a:font script="Syrj" typeface="Estrangelo Edessa"/>
-        <a:font script="Syre" typeface="Estrangelo Edessa"/>
-        <a:font script="Sora" typeface="Nirmala UI"/>
-        <a:font script="Tale" typeface="Microsoft Tai Le"/>
-        <a:font script="Talu" typeface="Microsoft New Tai Lue"/>
-        <a:font script="Tfng" typeface="Ebrima"/>
       </a:majorFont>
       <a:minorFont>
-        <a:latin typeface="Aptos" panose="02110004020202020204"/>
+        <a:latin typeface="Calibri"/>
         <a:ea typeface=""/>
         <a:cs typeface=""/>
-        <a:font script="Jpan" typeface="游ゴシック"/>
+        <a:font script="Jpan" typeface="ＭＳ Ｐゴシック"/>
         <a:font script="Hang" typeface="맑은 고딕"/>
-        <a:font script="Hans" typeface="等线"/>
+        <a:font script="Hans" typeface="宋体"/>
         <a:font script="Hant" typeface="新細明體"/>
         <a:font script="Arab" typeface="Arial"/>
         <a:font script="Hebr" typeface="Arial"/>
@@ -13312,23 +12992,6 @@
         <a:font script="Viet" typeface="Arial"/>
         <a:font script="Uigh" typeface="Microsoft Uighur"/>
         <a:font script="Geor" typeface="Sylfaen"/>
-        <a:font script="Armn" typeface="Arial"/>
-        <a:font script="Bugi" typeface="Leelawadee UI"/>
-        <a:font script="Bopo" typeface="Microsoft JhengHei"/>
-        <a:font script="Java" typeface="Javanese Text"/>
-        <a:font script="Lisu" typeface="Segoe UI"/>
-        <a:font script="Mymr" typeface="Myanmar Text"/>
-        <a:font script="Nkoo" typeface="Ebrima"/>
-        <a:font script="Olck" typeface="Nirmala UI"/>
-        <a:font script="Osma" typeface="Ebrima"/>
-        <a:font script="Phag" typeface="Phagspa"/>
-        <a:font script="Syrn" typeface="Estrangelo Edessa"/>
-        <a:font script="Syrj" typeface="Estrangelo Edessa"/>
-        <a:font script="Syre" typeface="Estrangelo Edessa"/>
-        <a:font script="Sora" typeface="Nirmala UI"/>
-        <a:font script="Tale" typeface="Microsoft Tai Le"/>
-        <a:font script="Talu" typeface="Microsoft New Tai Lue"/>
-        <a:font script="Tfng" typeface="Ebrima"/>
       </a:minorFont>
     </a:fontScheme>
     <a:fmtScheme name="Office">
@@ -13340,136 +13003,180 @@
           <a:gsLst>
             <a:gs pos="0">
               <a:schemeClr val="phClr">
-                <a:lumMod val="110000"/>
-                <a:satMod val="105000"/>
-                <a:tint val="67000"/>
+                <a:tint val="50000"/>
+                <a:satMod val="300000"/>
               </a:schemeClr>
             </a:gs>
-            <a:gs pos="50000">
+            <a:gs pos="35000">
               <a:schemeClr val="phClr">
-                <a:lumMod val="105000"/>
-                <a:satMod val="103000"/>
-                <a:tint val="73000"/>
+                <a:tint val="37000"/>
+                <a:satMod val="300000"/>
               </a:schemeClr>
             </a:gs>
             <a:gs pos="100000">
               <a:schemeClr val="phClr">
-                <a:lumMod val="105000"/>
-                <a:satMod val="109000"/>
-                <a:tint val="81000"/>
+                <a:tint val="15000"/>
+                <a:satMod val="350000"/>
               </a:schemeClr>
             </a:gs>
           </a:gsLst>
-          <a:lin ang="5400000" scaled="0"/>
+          <a:lin ang="16200000" scaled="1"/>
         </a:gradFill>
         <a:gradFill rotWithShape="1">
           <a:gsLst>
             <a:gs pos="0">
               <a:schemeClr val="phClr">
-                <a:satMod val="103000"/>
-                <a:lumMod val="102000"/>
-                <a:tint val="94000"/>
-              </a:schemeClr>
-            </a:gs>
-            <a:gs pos="50000">
-              <a:schemeClr val="phClr">
-                <a:satMod val="110000"/>
-                <a:lumMod val="100000"/>
+                <a:tint val="100000"/>
                 <a:shade val="100000"/>
+                <a:satMod val="130000"/>
               </a:schemeClr>
             </a:gs>
             <a:gs pos="100000">
               <a:schemeClr val="phClr">
-                <a:lumMod val="99000"/>
-                <a:satMod val="120000"/>
-                <a:shade val="78000"/>
+                <a:tint val="50000"/>
+                <a:shade val="100000"/>
+                <a:satMod val="350000"/>
               </a:schemeClr>
             </a:gs>
           </a:gsLst>
-          <a:lin ang="5400000" scaled="0"/>
+          <a:lin ang="16200000" scaled="0"/>
         </a:gradFill>
       </a:fillStyleLst>
       <a:lnStyleLst>
-        <a:ln w="12700" cap="flat" cmpd="sng" algn="ctr">
+        <a:ln w="9525" cap="flat" cmpd="sng" algn="ctr">
           <a:solidFill>
-            <a:schemeClr val="phClr"/>
+            <a:schemeClr val="phClr">
+              <a:shade val="95000"/>
+              <a:satMod val="105000"/>
+            </a:schemeClr>
           </a:solidFill>
           <a:prstDash val="solid"/>
-          <a:miter lim="800000"/>
-        </a:ln>
-        <a:ln w="19050" cap="flat" cmpd="sng" algn="ctr">
-          <a:solidFill>
-            <a:schemeClr val="phClr"/>
-          </a:solidFill>
-          <a:prstDash val="solid"/>
-          <a:miter lim="800000"/>
         </a:ln>
         <a:ln w="25400" cap="flat" cmpd="sng" algn="ctr">
           <a:solidFill>
             <a:schemeClr val="phClr"/>
           </a:solidFill>
           <a:prstDash val="solid"/>
-          <a:miter lim="800000"/>
+        </a:ln>
+        <a:ln w="38100" cap="flat" cmpd="sng" algn="ctr">
+          <a:solidFill>
+            <a:schemeClr val="phClr"/>
+          </a:solidFill>
+          <a:prstDash val="solid"/>
         </a:ln>
       </a:lnStyleLst>
       <a:effectStyleLst>
         <a:effectStyle>
-          <a:effectLst/>
-        </a:effectStyle>
-        <a:effectStyle>
-          <a:effectLst/>
+          <a:effectLst>
+            <a:outerShdw blurRad="40000" dist="20000" dir="5400000" rotWithShape="0">
+              <a:srgbClr val="000000">
+                <a:alpha val="38000"/>
+              </a:srgbClr>
+            </a:outerShdw>
+          </a:effectLst>
         </a:effectStyle>
         <a:effectStyle>
           <a:effectLst>
-            <a:outerShdw blurRad="57150" dist="19050" dir="5400000" algn="ctr" rotWithShape="0">
+            <a:outerShdw blurRad="40000" dist="23000" dir="5400000" rotWithShape="0">
               <a:srgbClr val="000000">
-                <a:alpha val="63000"/>
+                <a:alpha val="35000"/>
               </a:srgbClr>
             </a:outerShdw>
           </a:effectLst>
+        </a:effectStyle>
+        <a:effectStyle>
+          <a:effectLst>
+            <a:outerShdw blurRad="40000" dist="23000" dir="5400000" rotWithShape="0">
+              <a:srgbClr val="000000">
+                <a:alpha val="35000"/>
+              </a:srgbClr>
+            </a:outerShdw>
+          </a:effectLst>
+          <a:scene3d>
+            <a:camera prst="orthographicFront">
+              <a:rot lat="0" lon="0" rev="0"/>
+            </a:camera>
+            <a:lightRig rig="threePt" dir="t">
+              <a:rot lat="0" lon="0" rev="1200000"/>
+            </a:lightRig>
+          </a:scene3d>
+          <a:sp3d>
+            <a:bevelT w="63500" h="25400"/>
+          </a:sp3d>
         </a:effectStyle>
       </a:effectStyleLst>
       <a:bgFillStyleLst>
         <a:solidFill>
           <a:schemeClr val="phClr"/>
         </a:solidFill>
-        <a:solidFill>
-          <a:schemeClr val="phClr">
-            <a:tint val="95000"/>
-            <a:satMod val="170000"/>
-          </a:schemeClr>
-        </a:solidFill>
         <a:gradFill rotWithShape="1">
           <a:gsLst>
             <a:gs pos="0">
               <a:schemeClr val="phClr">
-                <a:tint val="93000"/>
-                <a:satMod val="150000"/>
-                <a:shade val="98000"/>
-                <a:lumMod val="102000"/>
+                <a:tint val="40000"/>
+                <a:satMod val="350000"/>
               </a:schemeClr>
             </a:gs>
-            <a:gs pos="50000">
+            <a:gs pos="40000">
               <a:schemeClr val="phClr">
-                <a:tint val="98000"/>
-                <a:satMod val="130000"/>
-                <a:shade val="90000"/>
-                <a:lumMod val="103000"/>
+                <a:tint val="45000"/>
+                <a:shade val="99000"/>
+                <a:satMod val="350000"/>
               </a:schemeClr>
             </a:gs>
             <a:gs pos="100000">
               <a:schemeClr val="phClr">
-                <a:shade val="63000"/>
-                <a:satMod val="120000"/>
+                <a:shade val="20000"/>
+                <a:satMod val="255000"/>
               </a:schemeClr>
             </a:gs>
           </a:gsLst>
-          <a:lin ang="5400000" scaled="0"/>
+          <a:path path="circle">
+            <a:fillToRect l="50000" t="-80000" r="50000" b="180000"/>
+          </a:path>
+        </a:gradFill>
+        <a:gradFill rotWithShape="1">
+          <a:gsLst>
+            <a:gs pos="0">
+              <a:schemeClr val="phClr">
+                <a:tint val="80000"/>
+                <a:satMod val="300000"/>
+              </a:schemeClr>
+            </a:gs>
+            <a:gs pos="100000">
+              <a:schemeClr val="phClr">
+                <a:shade val="30000"/>
+                <a:satMod val="200000"/>
+              </a:schemeClr>
+            </a:gs>
+          </a:gsLst>
+          <a:path path="circle">
+            <a:fillToRect l="50000" t="50000" r="50000" b="50000"/>
+          </a:path>
         </a:gradFill>
       </a:bgFillStyleLst>
     </a:fmtScheme>
   </a:themeElements>
   <a:objectDefaults>
+    <a:spDef>
+      <a:spPr/>
+      <a:bodyPr/>
+      <a:lstStyle/>
+      <a:style>
+        <a:lnRef idx="1">
+          <a:schemeClr val="accent1"/>
+        </a:lnRef>
+        <a:fillRef idx="3">
+          <a:schemeClr val="accent1"/>
+        </a:fillRef>
+        <a:effectRef idx="2">
+          <a:schemeClr val="accent1"/>
+        </a:effectRef>
+        <a:fontRef idx="minor">
+          <a:schemeClr val="lt1"/>
+        </a:fontRef>
+      </a:style>
+    </a:spDef>
     <a:lnDef>
       <a:spPr/>
       <a:bodyPr/>
@@ -13491,10 +13198,5 @@
     </a:lnDef>
   </a:objectDefaults>
   <a:extraClrSchemeLst/>
-  <a:extLst>
-    <a:ext uri="{05A4C25C-085E-4340-85A3-A5531E510DB2}">
-      <thm15:themeFamily xmlns:thm15="http://schemas.microsoft.com/office/thememl/2012/main" name="Office Theme" id="{2E142A2C-CD16-42D6-873A-C26D2A0506FA}" vid="{1BDDFF52-6CD6-40A5-AB3C-68EB2F1E4D0A}"/>
-    </a:ext>
-  </a:extLst>
 </a:theme>
 </file>